--- a/slides/Vitoma_BP_part1_team.pptx
+++ b/slides/Vitoma_BP_part1_team.pptx
@@ -113,17 +113,17 @@
   <p:extLst>
     <p:ext uri="{521415D9-36F7-43E2-AB2F-B90AF26B5E84}">
       <p14:sectionLst xmlns:p14="http://schemas.microsoft.com/office/powerpoint/2010/main">
-        <p14:section name="封面" id="{12ee3b46-d46c-94b5-c236-256d3f7003d1}">
+        <p14:section name="封面" id="{a2803719-65f1-6f39-7b31-182d015804a9}">
           <p14:sldIdLst>
             <p14:sldId id="256"/>
           </p14:sldIdLst>
         </p14:section>
-        <p14:section name="目录" id="{e0ef32e9-d7f2-747f-6506-d997ae8ca35e}">
+        <p14:section name="目录" id="{49ca34a8-416e-64ec-4702-f77d7f79b61d}">
           <p14:sldIdLst>
             <p14:sldId id="257"/>
           </p14:sldIdLst>
         </p14:section>
-        <p14:section name="第一部分 为什么要做" id="{92e76903-7bff-45ce-a718-4f4bc348dcb6}">
+        <p14:section name="第一部分 为什么要做" id="{cef22f5b-50a6-25be-2adf-bb872da9e5ea}">
           <p14:sldIdLst>
             <p14:sldId id="258"/>
             <p14:sldId id="259"/>
@@ -131,7 +131,7 @@
             <p14:sldId id="261"/>
           </p14:sldIdLst>
         </p14:section>
-        <p14:section name="第二部分 为什么我们能做成" id="{bbb34a75-be22-908a-ef99-93fe88c6412c}">
+        <p14:section name="第二部分 为什么我们能做成" id="{ebb9c49c-60d4-3c05-82e3-defe5dce84c7}">
           <p14:sldIdLst>
             <p14:sldId id="262"/>
           </p14:sldIdLst>
@@ -1923,7 +1923,7 @@
                   <a:schemeClr val="bg1"/>
                 </a:solidFill>
               </a:rPr>
-              <a:t>让每一次治疗，先在患者自己的类器官上预演</a:t>
+              <a:t>患者与类器官双轨校准，预见肿瘤的下一步</a:t>
             </a:r>
             <a:endParaRPr lang="en-US" sz="3400" dirty="0"/>
           </a:p>
@@ -1962,7 +1962,7 @@
                 <a:ea typeface="Arial" pitchFamily="34" charset="-122"/>
                 <a:cs typeface="Arial" pitchFamily="34" charset="-120"/>
               </a:rPr>
-              <a:t>Rehearse every treatment on the patient's own organoids — before it begins.</a:t>
+              <a:t>Patient and organoid, calibrated in parallel — to foresee the tumor's next move.</a:t>
             </a:r>
             <a:endParaRPr lang="en-US" sz="1600" dirty="0"/>
           </a:p>

--- a/slides/Vitoma_BP_part1_team.pptx
+++ b/slides/Vitoma_BP_part1_team.pptx
@@ -12,9 +12,9 @@
     <p:sldId id="257" r:id="rId5"/>
     <p:sldId id="258" r:id="rId6"/>
     <p:sldId id="259" r:id="rId7"/>
-    <p:sldId id="260" r:id="rId8"/>
+    <p:sldId id="274" r:id="rId25"/>
     <p:sldId id="262" r:id="rId10"/>
-    <p:sldId id="267" r:id="rId15"/>
+    <p:sldId id="263" r:id="rId11"/>
     <p:sldId id="268" r:id="rId16"/>
   </p:sldIdLst>
   <p:sldSz cx="12192000" cy="6858000"/>
@@ -318,70 +318,6 @@
 </p:notes>
 </file>
 
-<file path=ppt/notesSlides/notesSlide12.xml><?xml version="1.0" encoding="utf-8"?>
-<p:notes xmlns:a="http://schemas.openxmlformats.org/drawingml/2006/main" xmlns:r="http://schemas.openxmlformats.org/officeDocument/2006/relationships" xmlns:p="http://schemas.openxmlformats.org/presentationml/2006/main">
-  <p:cSld>
-    <p:spTree>
-      <p:nvGrpSpPr>
-        <p:cNvPr id="1" name=""/>
-        <p:cNvGrpSpPr/>
-        <p:nvPr/>
-      </p:nvGrpSpPr>
-      <p:grpSpPr/>
-      <p:sp>
-        <p:nvSpPr>
-          <p:cNvPr id="2" name="Slide Image Placeholder 1"/>
-          <p:cNvSpPr>
-            <a:spLocks noGrp="1"/>
-          </p:cNvSpPr>
-          <p:nvPr>
-            <p:ph type="sldImg"/>
-          </p:nvPr>
-        </p:nvSpPr>
-        <p:spPr/>
-      </p:sp>
-      <p:sp>
-        <p:nvSpPr>
-          <p:cNvPr id="3" name="Notes Placeholder 2"/>
-          <p:cNvSpPr>
-            <a:spLocks noGrp="1"/>
-          </p:cNvSpPr>
-          <p:nvPr>
-            <p:ph type="body" idx="1"/>
-          </p:nvPr>
-        </p:nvSpPr>
-        <p:spPr/>
-        <p:txBody>
-          <a:bodyPr/>
-          <a:lstStyle/>
-          <a:p/>
-        </p:txBody>
-      </p:sp>
-      <p:sp>
-        <p:nvSpPr>
-          <p:cNvPr id="4" name="Slide Number Placeholder 3"/>
-          <p:cNvSpPr>
-            <a:spLocks noGrp="1"/>
-          </p:cNvSpPr>
-          <p:nvPr>
-            <p:ph type="sldNum" idx="5"/>
-          </p:nvPr>
-        </p:nvSpPr>
-        <p:spPr/>
-        <p:txBody>
-          <a:bodyPr/>
-          <a:lstStyle/>
-          <a:p/>
-        </p:txBody>
-      </p:sp>
-    </p:spTree>
-  </p:cSld>
-  <p:clrMapOvr>
-    <a:masterClrMapping/>
-  </p:clrMapOvr>
-</p:notes>
-</file>
-
 <file path=ppt/notesSlides/notesSlide13.xml><?xml version="1.0" encoding="utf-8"?>
 <p:notes xmlns:a="http://schemas.openxmlformats.org/drawingml/2006/main" xmlns:r="http://schemas.openxmlformats.org/officeDocument/2006/relationships" xmlns:p="http://schemas.openxmlformats.org/presentationml/2006/main">
   <p:cSld>
@@ -638,7 +574,7 @@
 </p:notes>
 </file>
 
-<file path=ppt/notesSlides/notesSlide5.xml><?xml version="1.0" encoding="utf-8"?>
+<file path=ppt/notesSlides/notesSlide7.xml><?xml version="1.0" encoding="utf-8"?>
 <p:notes xmlns:a="http://schemas.openxmlformats.org/drawingml/2006/main" xmlns:r="http://schemas.openxmlformats.org/officeDocument/2006/relationships" xmlns:p="http://schemas.openxmlformats.org/presentationml/2006/main">
   <p:cSld>
     <p:spTree>
@@ -702,7 +638,7 @@
 </p:notes>
 </file>
 
-<file path=ppt/notesSlides/notesSlide7.xml><?xml version="1.0" encoding="utf-8"?>
+<file path=ppt/notesSlides/notesSlide8.xml><?xml version="1.0" encoding="utf-8"?>
 <p:notes xmlns:a="http://schemas.openxmlformats.org/drawingml/2006/main" xmlns:r="http://schemas.openxmlformats.org/officeDocument/2006/relationships" xmlns:p="http://schemas.openxmlformats.org/presentationml/2006/main">
   <p:cSld>
     <p:spTree>
@@ -1658,201 +1594,6 @@
 </p:sld>
 </file>
 
-<file path=ppt/slides/slide12.xml><?xml version="1.0" encoding="utf-8"?>
-<p:sld xmlns:a="http://schemas.openxmlformats.org/drawingml/2006/main" xmlns:r="http://schemas.openxmlformats.org/officeDocument/2006/relationships" xmlns:p="http://schemas.openxmlformats.org/presentationml/2006/main">
-  <p:cSld>
-    <p:spTree>
-      <p:nvGrpSpPr>
-        <p:cNvPr id="1" name=""/>
-        <p:cNvGrpSpPr/>
-        <p:nvPr/>
-      </p:nvGrpSpPr>
-      <p:grpSpPr/>
-      <p:sp>
-        <p:nvSpPr>
-          <p:cNvPr id="85" name="矩形 58"/>
-          <p:cNvSpPr>
-            <a:spLocks noGrp="1"/>
-          </p:cNvSpPr>
-          <p:nvPr/>
-        </p:nvSpPr>
-        <p:spPr>
-          <a:xfrm>
-            <a:off x="0" y="0"/>
-            <a:ext cx="12192000" cy="6858000"/>
-          </a:xfrm>
-          <a:prstGeom prst="rect">
-            <a:avLst/>
-          </a:prstGeom>
-          <a:solidFill>
-            <a:srgbClr val="062032"/>
-          </a:solidFill>
-        </p:spPr>
-        <p:txBody>
-          <a:bodyPr/>
-          <a:lstStyle/>
-          <a:p/>
-        </p:txBody>
-      </p:sp>
-      <p:sp>
-        <p:nvSpPr>
-          <p:cNvPr id="86" name="文本框 59"/>
-          <p:cNvSpPr>
-            <a:spLocks noGrp="1"/>
-          </p:cNvSpPr>
-          <p:nvPr/>
-        </p:nvSpPr>
-        <p:spPr>
-          <a:xfrm>
-            <a:off x="4429125" y="2981325"/>
-            <a:ext cx="2628900" cy="533400"/>
-          </a:xfrm>
-          <a:prstGeom prst="rect">
-            <a:avLst/>
-          </a:prstGeom>
-        </p:spPr>
-        <p:txBody>
-          <a:bodyPr wrap="none" lIns="0" tIns="0" rIns="0" bIns="0"/>
-          <a:lstStyle/>
-          <a:p>
-            <a:pPr>
-              <a:lnSpc>
-                <a:spcPct val="100000"/>
-              </a:lnSpc>
-              <a:buNone/>
-            </a:pPr>
-            <a:r>
-              <a:rPr sz="3450" b="1">
-                <a:solidFill>
-                  <a:srgbClr val="FFFFFF"/>
-                </a:solidFill>
-                <a:latin typeface="微软雅黑"/>
-                <a:ea typeface="微软雅黑"/>
-                <a:cs typeface="微软雅黑"/>
-              </a:rPr>
-              <a:t>团队</a:t>
-            </a:r>
-            <a:endParaRPr sz="3450" b="1">
-              <a:solidFill>
-                <a:srgbClr val="FFFFFF"/>
-              </a:solidFill>
-              <a:latin typeface="微软雅黑"/>
-              <a:ea typeface="微软雅黑"/>
-              <a:cs typeface="微软雅黑"/>
-            </a:endParaRPr>
-          </a:p>
-        </p:txBody>
-      </p:sp>
-      <p:sp>
-        <p:nvSpPr>
-          <p:cNvPr id="87" name="文本框 60"/>
-          <p:cNvSpPr>
-            <a:spLocks noGrp="1"/>
-          </p:cNvSpPr>
-          <p:nvPr/>
-        </p:nvSpPr>
-        <p:spPr>
-          <a:xfrm>
-            <a:off x="4429125" y="3648075"/>
-            <a:ext cx="2628900" cy="228600"/>
-          </a:xfrm>
-          <a:prstGeom prst="rect">
-            <a:avLst/>
-          </a:prstGeom>
-        </p:spPr>
-        <p:txBody>
-          <a:bodyPr wrap="none" lIns="0" tIns="0" rIns="0" bIns="0"/>
-          <a:lstStyle/>
-          <a:p>
-            <a:pPr>
-              <a:lnSpc>
-                <a:spcPct val="100000"/>
-              </a:lnSpc>
-              <a:buNone/>
-            </a:pPr>
-            <a:r>
-              <a:rPr sz="1500" spc="225">
-                <a:solidFill>
-                  <a:srgbClr val="99BDED"/>
-                </a:solidFill>
-                <a:latin typeface="微软雅黑"/>
-                <a:ea typeface="微软雅黑"/>
-                <a:cs typeface="微软雅黑"/>
-              </a:rPr>
-              <a:t>THE TEAM</a:t>
-            </a:r>
-            <a:endParaRPr sz="1500" spc="225">
-              <a:solidFill>
-                <a:srgbClr val="99BDED"/>
-              </a:solidFill>
-              <a:latin typeface="微软雅黑"/>
-              <a:ea typeface="微软雅黑"/>
-              <a:cs typeface="微软雅黑"/>
-            </a:endParaRPr>
-          </a:p>
-        </p:txBody>
-      </p:sp>
-      <p:sp>
-        <p:nvSpPr>
-          <p:cNvPr id="88" name="文本框 61"/>
-          <p:cNvSpPr>
-            <a:spLocks noGrp="1"/>
-          </p:cNvSpPr>
-          <p:nvPr/>
-        </p:nvSpPr>
-        <p:spPr>
-          <a:xfrm>
-            <a:off x="685800" y="1943100"/>
-            <a:ext cx="3057525" cy="2971800"/>
-          </a:xfrm>
-          <a:prstGeom prst="rect">
-            <a:avLst/>
-          </a:prstGeom>
-        </p:spPr>
-        <p:txBody>
-          <a:bodyPr wrap="none" lIns="0" tIns="0" rIns="0" bIns="0"/>
-          <a:lstStyle/>
-          <a:p>
-            <a:pPr>
-              <a:lnSpc>
-                <a:spcPct val="100000"/>
-              </a:lnSpc>
-              <a:buNone/>
-            </a:pPr>
-            <a:r>
-              <a:rPr sz="19500" b="1">
-                <a:solidFill>
-                  <a:srgbClr val="FFFFFF">
-                    <a:alpha val="12000"/>
-                  </a:srgbClr>
-                </a:solidFill>
-                <a:latin typeface="微软雅黑"/>
-                <a:ea typeface="微软雅黑"/>
-                <a:cs typeface="微软雅黑"/>
-              </a:rPr>
-              <a:t>03</a:t>
-            </a:r>
-            <a:endParaRPr sz="19500" b="1">
-              <a:solidFill>
-                <a:srgbClr val="FFFFFF">
-                  <a:alpha val="12000"/>
-                </a:srgbClr>
-              </a:solidFill>
-              <a:latin typeface="微软雅黑"/>
-              <a:ea typeface="微软雅黑"/>
-              <a:cs typeface="微软雅黑"/>
-            </a:endParaRPr>
-          </a:p>
-        </p:txBody>
-      </p:sp>
-    </p:spTree>
-  </p:cSld>
-  <p:clrMapOvr>
-    <a:masterClrMapping/>
-  </p:clrMapOvr>
-</p:sld>
-</file>
-
 <file path=ppt/slides/slide13.xml><?xml version="1.0" encoding="utf-8"?>
 <p:sld xmlns:a="http://schemas.openxmlformats.org/drawingml/2006/main" xmlns:r="http://schemas.openxmlformats.org/officeDocument/2006/relationships" xmlns:p="http://schemas.openxmlformats.org/presentationml/2006/main">
   <p:cSld>
@@ -1999,33 +1740,81 @@
       </p:sp>
       <p:sp>
         <p:nvSpPr>
-          <p:cNvPr id="93" name="文本框 66"/>
-          <p:cNvSpPr>
-            <a:spLocks noGrp="1"/>
-          </p:cNvSpPr>
-          <p:nvPr/>
-        </p:nvSpPr>
-        <p:spPr>
-          <a:xfrm>
-            <a:off x="533400" y="1019175"/>
-            <a:ext cx="11274879" cy="2518682"/>
-          </a:xfrm>
-          <a:prstGeom prst="rect">
-            <a:avLst/>
-          </a:prstGeom>
-        </p:spPr>
-        <p:txBody>
-          <a:bodyPr wrap="square" lIns="0" tIns="0" rIns="0" bIns="0"/>
-          <a:lstStyle/>
-          <a:p>
-            <a:pPr algn="l">
-              <a:lnSpc>
-                <a:spcPct val="100000"/>
-              </a:lnSpc>
-              <a:buNone/>
-            </a:pPr>
-            <a:r>
-              <a:rPr lang="zh-CN" altLang="en-US" sz="1400" b="1">
+          <p:cNvPr id="301" name="照片 1"/>
+          <p:cNvSpPr/>
+          <p:nvPr/>
+        </p:nvSpPr>
+        <p:spPr>
+          <a:xfrm>
+            <a:off x="1109853" y="1097280"/>
+            <a:ext cx="1417320" cy="1417320"/>
+          </a:xfrm>
+          <a:prstGeom prst="ellipse">
+            <a:avLst/>
+          </a:prstGeom>
+          <a:solidFill>
+            <a:srgbClr val="E7ECF2"/>
+          </a:solidFill>
+          <a:ln w="12700">
+            <a:solidFill>
+              <a:srgbClr val="99BDED"/>
+            </a:solidFill>
+          </a:ln>
+        </p:spPr>
+        <p:txBody>
+          <a:bodyPr anchor="ctr"/>
+          <a:lstStyle/>
+          <a:p>
+            <a:pPr algn="ctr">
+              <a:lnSpc>
+                <a:spcPct val="115000"/>
+              </a:lnSpc>
+              <a:buNone/>
+            </a:pPr>
+            <a:r>
+              <a:rPr lang="zh-CN" altLang="en-US" sz="1200">
+                <a:solidFill>
+                  <a:srgbClr val="8496B0"/>
+                </a:solidFill>
+                <a:latin typeface="微软雅黑"/>
+                <a:ea typeface="微软雅黑"/>
+                <a:cs typeface="微软雅黑"/>
+              </a:rPr>
+              <a:t>照片</a:t>
+            </a:r>
+          </a:p>
+        </p:txBody>
+      </p:sp>
+      <p:sp>
+        <p:nvSpPr>
+          <p:cNvPr id="302" name="姓名 1"/>
+          <p:cNvSpPr txBox="1"/>
+          <p:nvPr/>
+        </p:nvSpPr>
+        <p:spPr>
+          <a:xfrm>
+            <a:off x="530352" y="2651760"/>
+            <a:ext cx="2576322" cy="347472"/>
+          </a:xfrm>
+          <a:prstGeom prst="rect">
+            <a:avLst/>
+          </a:prstGeom>
+          <a:noFill/>
+        </p:spPr>
+        <p:txBody>
+          <a:bodyPr wrap="square" lIns="0" tIns="0" rIns="0" bIns="0" anchor="ctr">
+            <a:noAutofit/>
+          </a:bodyPr>
+          <a:lstStyle/>
+          <a:p>
+            <a:pPr algn="ctr">
+              <a:lnSpc>
+                <a:spcPct val="115000"/>
+              </a:lnSpc>
+              <a:buNone/>
+            </a:pPr>
+            <a:r>
+              <a:rPr lang="zh-CN" altLang="en-US" sz="1600" b="1">
                 <a:solidFill>
                   <a:srgbClr val="061F32"/>
                 </a:solidFill>
@@ -2033,10 +1822,309 @@
                 <a:ea typeface="微软雅黑"/>
                 <a:cs typeface="微软雅黑"/>
               </a:rPr>
-              <a:t>- CEO 卓悦博士：</a:t>
-            </a:r>
-            <a:r>
-              <a:rPr lang="zh-CN" altLang="en-US" sz="1400">
+              <a:t>卓悦 博士</a:t>
+            </a:r>
+          </a:p>
+        </p:txBody>
+      </p:sp>
+      <p:sp>
+        <p:nvSpPr>
+          <p:cNvPr id="303" name="职位 1"/>
+          <p:cNvSpPr txBox="1"/>
+          <p:nvPr/>
+        </p:nvSpPr>
+        <p:spPr>
+          <a:xfrm>
+            <a:off x="530352" y="2999232"/>
+            <a:ext cx="2576322" cy="292608"/>
+          </a:xfrm>
+          <a:prstGeom prst="rect">
+            <a:avLst/>
+          </a:prstGeom>
+          <a:noFill/>
+        </p:spPr>
+        <p:txBody>
+          <a:bodyPr wrap="square" lIns="0" tIns="0" rIns="0" bIns="0" anchor="ctr">
+            <a:noAutofit/>
+          </a:bodyPr>
+          <a:lstStyle/>
+          <a:p>
+            <a:pPr algn="ctr">
+              <a:lnSpc>
+                <a:spcPct val="115000"/>
+              </a:lnSpc>
+              <a:buNone/>
+            </a:pPr>
+            <a:r>
+              <a:rPr lang="zh-CN" altLang="en-US" sz="1300" b="1">
+                <a:solidFill>
+                  <a:srgbClr val="08A6F6"/>
+                </a:solidFill>
+                <a:latin typeface="微软雅黑"/>
+                <a:ea typeface="微软雅黑"/>
+                <a:cs typeface="微软雅黑"/>
+              </a:rPr>
+              <a:t>CEO 首席执行官</a:t>
+            </a:r>
+          </a:p>
+        </p:txBody>
+      </p:sp>
+      <p:sp>
+        <p:nvSpPr>
+          <p:cNvPr id="304" name="经历 1"/>
+          <p:cNvSpPr txBox="1"/>
+          <p:nvPr/>
+        </p:nvSpPr>
+        <p:spPr>
+          <a:xfrm>
+            <a:off x="621792" y="3474720"/>
+            <a:ext cx="2439162" cy="2788920"/>
+          </a:xfrm>
+          <a:prstGeom prst="rect">
+            <a:avLst/>
+          </a:prstGeom>
+          <a:noFill/>
+        </p:spPr>
+        <p:txBody>
+          <a:bodyPr wrap="square" lIns="0" tIns="0" rIns="0" bIns="0" anchor="t">
+            <a:noAutofit/>
+          </a:bodyPr>
+          <a:lstStyle/>
+          <a:p>
+            <a:pPr algn="l" marL="171450" indent="-171450">
+              <a:lnSpc>
+                <a:spcPct val="115000"/>
+              </a:lnSpc>
+              <a:spcAft>
+                <a:spcPts val="400"/>
+              </a:spcAft>
+              <a:buClr>
+                <a:srgbClr val="08A6F6"/>
+              </a:buClr>
+              <a:buFont typeface="Arial"/>
+              <a:buChar char="•"/>
+            </a:pPr>
+            <a:r>
+              <a:rPr lang="zh-CN" altLang="en-US" sz="1100">
+                <a:solidFill>
+                  <a:srgbClr val="44546A"/>
+                </a:solidFill>
+                <a:latin typeface="微软雅黑"/>
+                <a:ea typeface="微软雅黑"/>
+                <a:cs typeface="微软雅黑"/>
+              </a:rPr>
+              <a:t>海德堡大学/DKFZ 发育生物学博士</a:t>
+            </a:r>
+          </a:p>
+          <a:p>
+            <a:pPr algn="l" marL="171450" indent="-171450">
+              <a:lnSpc>
+                <a:spcPct val="115000"/>
+              </a:lnSpc>
+              <a:spcAft>
+                <a:spcPts val="400"/>
+              </a:spcAft>
+              <a:buClr>
+                <a:srgbClr val="08A6F6"/>
+              </a:buClr>
+              <a:buFont typeface="Arial"/>
+              <a:buChar char="•"/>
+            </a:pPr>
+            <a:r>
+              <a:rPr lang="zh-CN" altLang="en-US" sz="1100">
+                <a:solidFill>
+                  <a:srgbClr val="44546A"/>
+                </a:solidFill>
+                <a:latin typeface="微软雅黑"/>
+                <a:ea typeface="微软雅黑"/>
+                <a:cs typeface="微软雅黑"/>
+              </a:rPr>
+              <a:t>密歇根大学安娜堡分校学士</a:t>
+            </a:r>
+          </a:p>
+          <a:p>
+            <a:pPr algn="l" marL="171450" indent="-171450">
+              <a:lnSpc>
+                <a:spcPct val="115000"/>
+              </a:lnSpc>
+              <a:spcAft>
+                <a:spcPts val="400"/>
+              </a:spcAft>
+              <a:buClr>
+                <a:srgbClr val="08A6F6"/>
+              </a:buClr>
+              <a:buFont typeface="Arial"/>
+              <a:buChar char="•"/>
+            </a:pPr>
+            <a:r>
+              <a:rPr lang="zh-CN" altLang="en-US" sz="1100">
+                <a:solidFill>
+                  <a:srgbClr val="44546A"/>
+                </a:solidFill>
+                <a:latin typeface="微软雅黑"/>
+                <a:ea typeface="微软雅黑"/>
+                <a:cs typeface="微软雅黑"/>
+              </a:rPr>
+              <a:t>Verqura 实验室管理系统创始人</a:t>
+            </a:r>
+          </a:p>
+          <a:p>
+            <a:pPr algn="l" marL="171450" indent="-171450">
+              <a:lnSpc>
+                <a:spcPct val="115000"/>
+              </a:lnSpc>
+              <a:spcAft>
+                <a:spcPts val="400"/>
+              </a:spcAft>
+              <a:buClr>
+                <a:srgbClr val="08A6F6"/>
+              </a:buClr>
+              <a:buFont typeface="Arial"/>
+              <a:buChar char="•"/>
+            </a:pPr>
+            <a:r>
+              <a:rPr lang="zh-CN" altLang="en-US" sz="1100">
+                <a:solidFill>
+                  <a:srgbClr val="44546A"/>
+                </a:solidFill>
+                <a:latin typeface="微软雅黑"/>
+                <a:ea typeface="微软雅黑"/>
+                <a:cs typeface="微软雅黑"/>
+              </a:rPr>
+              <a:t>精通 iPSC 脑类器官构建、CRISPR 基因组编辑与标记</a:t>
+            </a:r>
+          </a:p>
+          <a:p>
+            <a:pPr algn="l" marL="171450" indent="-171450">
+              <a:lnSpc>
+                <a:spcPct val="115000"/>
+              </a:lnSpc>
+              <a:spcAft>
+                <a:spcPts val="400"/>
+              </a:spcAft>
+              <a:buClr>
+                <a:srgbClr val="08A6F6"/>
+              </a:buClr>
+              <a:buFont typeface="Arial"/>
+              <a:buChar char="•"/>
+            </a:pPr>
+            <a:r>
+              <a:rPr lang="zh-CN" altLang="en-US" sz="1100">
+                <a:solidFill>
+                  <a:srgbClr val="44546A"/>
+                </a:solidFill>
+                <a:latin typeface="微软雅黑"/>
+                <a:ea typeface="微软雅黑"/>
+                <a:cs typeface="微软雅黑"/>
+              </a:rPr>
+              <a:t>单细胞测序与 AI 图像分析（YOLO / Cellpose）</a:t>
+            </a:r>
+          </a:p>
+          <a:p>
+            <a:pPr algn="l" marL="171450" indent="-171450">
+              <a:lnSpc>
+                <a:spcPct val="115000"/>
+              </a:lnSpc>
+              <a:spcAft>
+                <a:spcPts val="400"/>
+              </a:spcAft>
+              <a:buClr>
+                <a:srgbClr val="08A6F6"/>
+              </a:buClr>
+              <a:buFont typeface="Arial"/>
+              <a:buChar char="•"/>
+            </a:pPr>
+            <a:r>
+              <a:rPr lang="zh-CN" altLang="en-US" sz="1100">
+                <a:solidFill>
+                  <a:srgbClr val="44546A"/>
+                </a:solidFill>
+                <a:latin typeface="微软雅黑"/>
+                <a:ea typeface="微软雅黑"/>
+                <a:cs typeface="微软雅黑"/>
+              </a:rPr>
+              <a:t>Cell Stem Cell 2025、npj Precision Oncology 2024 作者</a:t>
+            </a:r>
+          </a:p>
+        </p:txBody>
+      </p:sp>
+      <p:sp>
+        <p:nvSpPr>
+          <p:cNvPr id="305" name="照片 2"/>
+          <p:cNvSpPr/>
+          <p:nvPr/>
+        </p:nvSpPr>
+        <p:spPr>
+          <a:xfrm>
+            <a:off x="3960495" y="1097280"/>
+            <a:ext cx="1417320" cy="1417320"/>
+          </a:xfrm>
+          <a:prstGeom prst="ellipse">
+            <a:avLst/>
+          </a:prstGeom>
+          <a:solidFill>
+            <a:srgbClr val="E7ECF2"/>
+          </a:solidFill>
+          <a:ln w="12700">
+            <a:solidFill>
+              <a:srgbClr val="99BDED"/>
+            </a:solidFill>
+          </a:ln>
+        </p:spPr>
+        <p:txBody>
+          <a:bodyPr anchor="ctr"/>
+          <a:lstStyle/>
+          <a:p>
+            <a:pPr algn="ctr">
+              <a:lnSpc>
+                <a:spcPct val="115000"/>
+              </a:lnSpc>
+              <a:buNone/>
+            </a:pPr>
+            <a:r>
+              <a:rPr lang="zh-CN" altLang="en-US" sz="1200">
+                <a:solidFill>
+                  <a:srgbClr val="8496B0"/>
+                </a:solidFill>
+                <a:latin typeface="微软雅黑"/>
+                <a:ea typeface="微软雅黑"/>
+                <a:cs typeface="微软雅黑"/>
+              </a:rPr>
+              <a:t>照片</a:t>
+            </a:r>
+          </a:p>
+        </p:txBody>
+      </p:sp>
+      <p:sp>
+        <p:nvSpPr>
+          <p:cNvPr id="306" name="姓名 2"/>
+          <p:cNvSpPr txBox="1"/>
+          <p:nvPr/>
+        </p:nvSpPr>
+        <p:spPr>
+          <a:xfrm>
+            <a:off x="3380994" y="2651760"/>
+            <a:ext cx="2576322" cy="347472"/>
+          </a:xfrm>
+          <a:prstGeom prst="rect">
+            <a:avLst/>
+          </a:prstGeom>
+          <a:noFill/>
+        </p:spPr>
+        <p:txBody>
+          <a:bodyPr wrap="square" lIns="0" tIns="0" rIns="0" bIns="0" anchor="ctr">
+            <a:noAutofit/>
+          </a:bodyPr>
+          <a:lstStyle/>
+          <a:p>
+            <a:pPr algn="ctr">
+              <a:lnSpc>
+                <a:spcPct val="115000"/>
+              </a:lnSpc>
+              <a:buNone/>
+            </a:pPr>
+            <a:r>
+              <a:rPr lang="zh-CN" altLang="en-US" sz="1600" b="1">
                 <a:solidFill>
                   <a:srgbClr val="061F32"/>
                 </a:solidFill>
@@ -2044,42 +2132,283 @@
                 <a:ea typeface="微软雅黑"/>
                 <a:cs typeface="微软雅黑"/>
               </a:rPr>
-              <a:t>DKFZ / 海德堡大学发育生物学博士，密歇根大学安娜堡分校学士；Verqura 实验室管理系统创始人；精通 iPSC 脑类器官构建、CRISPR 基因组编辑与标记，单细胞测序与 AI 图像分析；Cell Stem Cell 2025、npj Precision Oncology 2024 作者。</a:t>
-            </a:r>
-            <a:endParaRPr lang="zh-CN" altLang="en-US" sz="1400">
-              <a:solidFill>
-                <a:srgbClr val="061F32"/>
-              </a:solidFill>
-              <a:latin typeface="微软雅黑"/>
-              <a:ea typeface="微软雅黑"/>
-              <a:cs typeface="微软雅黑"/>
-            </a:endParaRPr>
-          </a:p>
-          <a:p>
-            <a:pPr algn="l">
-              <a:lnSpc>
-                <a:spcPct val="100000"/>
-              </a:lnSpc>
-              <a:buNone/>
-            </a:pPr>
-            <a:endParaRPr lang="zh-CN" altLang="en-US" sz="1400">
-              <a:solidFill>
-                <a:srgbClr val="061F32"/>
-              </a:solidFill>
-              <a:latin typeface="微软雅黑"/>
-              <a:ea typeface="微软雅黑"/>
-              <a:cs typeface="微软雅黑"/>
-            </a:endParaRPr>
-          </a:p>
-          <a:p>
-            <a:pPr algn="l">
-              <a:lnSpc>
-                <a:spcPct val="100000"/>
-              </a:lnSpc>
-              <a:buNone/>
-            </a:pPr>
-            <a:r>
-              <a:rPr lang="zh-CN" altLang="en-US" sz="1400" b="1">
+              <a:t>田伟利 博士</a:t>
+            </a:r>
+          </a:p>
+        </p:txBody>
+      </p:sp>
+      <p:sp>
+        <p:nvSpPr>
+          <p:cNvPr id="307" name="职位 2"/>
+          <p:cNvSpPr txBox="1"/>
+          <p:nvPr/>
+        </p:nvSpPr>
+        <p:spPr>
+          <a:xfrm>
+            <a:off x="3380994" y="2999232"/>
+            <a:ext cx="2576322" cy="292608"/>
+          </a:xfrm>
+          <a:prstGeom prst="rect">
+            <a:avLst/>
+          </a:prstGeom>
+          <a:noFill/>
+        </p:spPr>
+        <p:txBody>
+          <a:bodyPr wrap="square" lIns="0" tIns="0" rIns="0" bIns="0" anchor="ctr">
+            <a:noAutofit/>
+          </a:bodyPr>
+          <a:lstStyle/>
+          <a:p>
+            <a:pPr algn="ctr">
+              <a:lnSpc>
+                <a:spcPct val="115000"/>
+              </a:lnSpc>
+              <a:buNone/>
+            </a:pPr>
+            <a:r>
+              <a:rPr lang="zh-CN" altLang="en-US" sz="1300" b="1">
+                <a:solidFill>
+                  <a:srgbClr val="08A6F6"/>
+                </a:solidFill>
+                <a:latin typeface="微软雅黑"/>
+                <a:ea typeface="微软雅黑"/>
+                <a:cs typeface="微软雅黑"/>
+              </a:rPr>
+              <a:t>CSO 首席科学官</a:t>
+            </a:r>
+          </a:p>
+        </p:txBody>
+      </p:sp>
+      <p:sp>
+        <p:nvSpPr>
+          <p:cNvPr id="308" name="经历 2"/>
+          <p:cNvSpPr txBox="1"/>
+          <p:nvPr/>
+        </p:nvSpPr>
+        <p:spPr>
+          <a:xfrm>
+            <a:off x="3472434" y="3474720"/>
+            <a:ext cx="2439162" cy="2788920"/>
+          </a:xfrm>
+          <a:prstGeom prst="rect">
+            <a:avLst/>
+          </a:prstGeom>
+          <a:noFill/>
+        </p:spPr>
+        <p:txBody>
+          <a:bodyPr wrap="square" lIns="0" tIns="0" rIns="0" bIns="0" anchor="t">
+            <a:noAutofit/>
+          </a:bodyPr>
+          <a:lstStyle/>
+          <a:p>
+            <a:pPr algn="l" marL="171450" indent="-171450">
+              <a:lnSpc>
+                <a:spcPct val="115000"/>
+              </a:lnSpc>
+              <a:spcAft>
+                <a:spcPts val="400"/>
+              </a:spcAft>
+              <a:buClr>
+                <a:srgbClr val="08A6F6"/>
+              </a:buClr>
+              <a:buFont typeface="Arial"/>
+              <a:buChar char="•"/>
+            </a:pPr>
+            <a:r>
+              <a:rPr lang="zh-CN" altLang="en-US" sz="1100">
+                <a:solidFill>
+                  <a:srgbClr val="44546A"/>
+                </a:solidFill>
+                <a:latin typeface="微软雅黑"/>
+                <a:ea typeface="微软雅黑"/>
+                <a:cs typeface="微软雅黑"/>
+              </a:rPr>
+              <a:t>DKFZ / 海德堡大学分子神经遗传学资深科学家</a:t>
+            </a:r>
+          </a:p>
+          <a:p>
+            <a:pPr algn="l" marL="171450" indent="-171450">
+              <a:lnSpc>
+                <a:spcPct val="115000"/>
+              </a:lnSpc>
+              <a:spcAft>
+                <a:spcPts val="400"/>
+              </a:spcAft>
+              <a:buClr>
+                <a:srgbClr val="08A6F6"/>
+              </a:buClr>
+              <a:buFont typeface="Arial"/>
+              <a:buChar char="•"/>
+            </a:pPr>
+            <a:r>
+              <a:rPr lang="zh-CN" altLang="en-US" sz="1100">
+                <a:solidFill>
+                  <a:srgbClr val="44546A"/>
+                </a:solidFill>
+                <a:latin typeface="微软雅黑"/>
+                <a:ea typeface="微软雅黑"/>
+                <a:cs typeface="微软雅黑"/>
+              </a:rPr>
+              <a:t>霍英东杰出青年学者</a:t>
+            </a:r>
+          </a:p>
+          <a:p>
+            <a:pPr algn="l" marL="171450" indent="-171450">
+              <a:lnSpc>
+                <a:spcPct val="115000"/>
+              </a:lnSpc>
+              <a:spcAft>
+                <a:spcPts val="400"/>
+              </a:spcAft>
+              <a:buClr>
+                <a:srgbClr val="08A6F6"/>
+              </a:buClr>
+              <a:buFont typeface="Arial"/>
+              <a:buChar char="•"/>
+            </a:pPr>
+            <a:r>
+              <a:rPr lang="zh-CN" altLang="en-US" sz="1100">
+                <a:solidFill>
+                  <a:srgbClr val="44546A"/>
+                </a:solidFill>
+                <a:latin typeface="微软雅黑"/>
+                <a:ea typeface="微软雅黑"/>
+                <a:cs typeface="微软雅黑"/>
+              </a:rPr>
+              <a:t>主持欧中重大科研项目</a:t>
+            </a:r>
+          </a:p>
+          <a:p>
+            <a:pPr algn="l" marL="171450" indent="-171450">
+              <a:lnSpc>
+                <a:spcPct val="115000"/>
+              </a:lnSpc>
+              <a:spcAft>
+                <a:spcPts val="400"/>
+              </a:spcAft>
+              <a:buClr>
+                <a:srgbClr val="08A6F6"/>
+              </a:buClr>
+              <a:buFont typeface="Arial"/>
+              <a:buChar char="•"/>
+            </a:pPr>
+            <a:r>
+              <a:rPr lang="zh-CN" altLang="en-US" sz="1100">
+                <a:solidFill>
+                  <a:srgbClr val="44546A"/>
+                </a:solidFill>
+                <a:latin typeface="微软雅黑"/>
+                <a:ea typeface="微软雅黑"/>
+                <a:cs typeface="微软雅黑"/>
+              </a:rPr>
+              <a:t>深耕神经调控与脑类器官方向，长期研究胶质母细胞瘤复发与耐药</a:t>
+            </a:r>
+          </a:p>
+          <a:p>
+            <a:pPr algn="l" marL="171450" indent="-171450">
+              <a:lnSpc>
+                <a:spcPct val="115000"/>
+              </a:lnSpc>
+              <a:spcAft>
+                <a:spcPts val="400"/>
+              </a:spcAft>
+              <a:buClr>
+                <a:srgbClr val="08A6F6"/>
+              </a:buClr>
+              <a:buFont typeface="Arial"/>
+              <a:buChar char="•"/>
+            </a:pPr>
+            <a:r>
+              <a:rPr lang="zh-CN" altLang="en-US" sz="1100">
+                <a:solidFill>
+                  <a:srgbClr val="44546A"/>
+                </a:solidFill>
+                <a:latin typeface="微软雅黑"/>
+                <a:ea typeface="微软雅黑"/>
+                <a:cs typeface="微软雅黑"/>
+              </a:rPr>
+              <a:t>Cell Stem Cell 2025、npj Precision Oncology 2024 核心成员</a:t>
+            </a:r>
+          </a:p>
+        </p:txBody>
+      </p:sp>
+      <p:sp>
+        <p:nvSpPr>
+          <p:cNvPr id="309" name="照片 3"/>
+          <p:cNvSpPr/>
+          <p:nvPr/>
+        </p:nvSpPr>
+        <p:spPr>
+          <a:xfrm>
+            <a:off x="6811137" y="1097280"/>
+            <a:ext cx="1417320" cy="1417320"/>
+          </a:xfrm>
+          <a:prstGeom prst="ellipse">
+            <a:avLst/>
+          </a:prstGeom>
+          <a:solidFill>
+            <a:srgbClr val="E7ECF2"/>
+          </a:solidFill>
+          <a:ln w="12700">
+            <a:solidFill>
+              <a:srgbClr val="99BDED"/>
+            </a:solidFill>
+          </a:ln>
+        </p:spPr>
+        <p:txBody>
+          <a:bodyPr anchor="ctr"/>
+          <a:lstStyle/>
+          <a:p>
+            <a:pPr algn="ctr">
+              <a:lnSpc>
+                <a:spcPct val="115000"/>
+              </a:lnSpc>
+              <a:buNone/>
+            </a:pPr>
+            <a:r>
+              <a:rPr lang="zh-CN" altLang="en-US" sz="1200">
+                <a:solidFill>
+                  <a:srgbClr val="8496B0"/>
+                </a:solidFill>
+                <a:latin typeface="微软雅黑"/>
+                <a:ea typeface="微软雅黑"/>
+                <a:cs typeface="微软雅黑"/>
+              </a:rPr>
+              <a:t>照片</a:t>
+            </a:r>
+          </a:p>
+        </p:txBody>
+      </p:sp>
+      <p:sp>
+        <p:nvSpPr>
+          <p:cNvPr id="310" name="姓名 3"/>
+          <p:cNvSpPr txBox="1"/>
+          <p:nvPr/>
+        </p:nvSpPr>
+        <p:spPr>
+          <a:xfrm>
+            <a:off x="6231636" y="2651760"/>
+            <a:ext cx="2576322" cy="347472"/>
+          </a:xfrm>
+          <a:prstGeom prst="rect">
+            <a:avLst/>
+          </a:prstGeom>
+          <a:noFill/>
+        </p:spPr>
+        <p:txBody>
+          <a:bodyPr wrap="square" lIns="0" tIns="0" rIns="0" bIns="0" anchor="ctr">
+            <a:noAutofit/>
+          </a:bodyPr>
+          <a:lstStyle/>
+          <a:p>
+            <a:pPr algn="ctr">
+              <a:lnSpc>
+                <a:spcPct val="115000"/>
+              </a:lnSpc>
+              <a:buNone/>
+            </a:pPr>
+            <a:r>
+              <a:rPr lang="zh-CN" altLang="en-US" sz="1600" b="1">
                 <a:solidFill>
                   <a:srgbClr val="061F32"/>
                 </a:solidFill>
@@ -2087,10 +2416,283 @@
                 <a:ea typeface="微软雅黑"/>
                 <a:cs typeface="微软雅黑"/>
               </a:rPr>
-              <a:t>- CSO 田伟利博士：</a:t>
-            </a:r>
-            <a:r>
-              <a:rPr lang="zh-CN" altLang="en-US" sz="1400">
+              <a:t>王中杰 博士</a:t>
+            </a:r>
+          </a:p>
+        </p:txBody>
+      </p:sp>
+      <p:sp>
+        <p:nvSpPr>
+          <p:cNvPr id="311" name="职位 3"/>
+          <p:cNvSpPr txBox="1"/>
+          <p:nvPr/>
+        </p:nvSpPr>
+        <p:spPr>
+          <a:xfrm>
+            <a:off x="6231636" y="2999232"/>
+            <a:ext cx="2576322" cy="292608"/>
+          </a:xfrm>
+          <a:prstGeom prst="rect">
+            <a:avLst/>
+          </a:prstGeom>
+          <a:noFill/>
+        </p:spPr>
+        <p:txBody>
+          <a:bodyPr wrap="square" lIns="0" tIns="0" rIns="0" bIns="0" anchor="ctr">
+            <a:noAutofit/>
+          </a:bodyPr>
+          <a:lstStyle/>
+          <a:p>
+            <a:pPr algn="ctr">
+              <a:lnSpc>
+                <a:spcPct val="115000"/>
+              </a:lnSpc>
+              <a:buNone/>
+            </a:pPr>
+            <a:r>
+              <a:rPr lang="zh-CN" altLang="en-US" sz="1300" b="1">
+                <a:solidFill>
+                  <a:srgbClr val="08A6F6"/>
+                </a:solidFill>
+                <a:latin typeface="微软雅黑"/>
+                <a:ea typeface="微软雅黑"/>
+                <a:cs typeface="微软雅黑"/>
+              </a:rPr>
+              <a:t>CTO 首席技术官</a:t>
+            </a:r>
+          </a:p>
+        </p:txBody>
+      </p:sp>
+      <p:sp>
+        <p:nvSpPr>
+          <p:cNvPr id="312" name="经历 3"/>
+          <p:cNvSpPr txBox="1"/>
+          <p:nvPr/>
+        </p:nvSpPr>
+        <p:spPr>
+          <a:xfrm>
+            <a:off x="6323076" y="3474720"/>
+            <a:ext cx="2439162" cy="2788920"/>
+          </a:xfrm>
+          <a:prstGeom prst="rect">
+            <a:avLst/>
+          </a:prstGeom>
+          <a:noFill/>
+        </p:spPr>
+        <p:txBody>
+          <a:bodyPr wrap="square" lIns="0" tIns="0" rIns="0" bIns="0" anchor="t">
+            <a:noAutofit/>
+          </a:bodyPr>
+          <a:lstStyle/>
+          <a:p>
+            <a:pPr algn="l" marL="171450" indent="-171450">
+              <a:lnSpc>
+                <a:spcPct val="115000"/>
+              </a:lnSpc>
+              <a:spcAft>
+                <a:spcPts val="400"/>
+              </a:spcAft>
+              <a:buClr>
+                <a:srgbClr val="08A6F6"/>
+              </a:buClr>
+              <a:buFont typeface="Arial"/>
+              <a:buChar char="•"/>
+            </a:pPr>
+            <a:r>
+              <a:rPr lang="zh-CN" altLang="en-US" sz="1100">
+                <a:solidFill>
+                  <a:srgbClr val="44546A"/>
+                </a:solidFill>
+                <a:latin typeface="微软雅黑"/>
+                <a:ea typeface="微软雅黑"/>
+                <a:cs typeface="微软雅黑"/>
+              </a:rPr>
+              <a:t>慕尼黑大学博士</a:t>
+            </a:r>
+          </a:p>
+          <a:p>
+            <a:pPr algn="l" marL="171450" indent="-171450">
+              <a:lnSpc>
+                <a:spcPct val="115000"/>
+              </a:lnSpc>
+              <a:spcAft>
+                <a:spcPts val="400"/>
+              </a:spcAft>
+              <a:buClr>
+                <a:srgbClr val="08A6F6"/>
+              </a:buClr>
+              <a:buFont typeface="Arial"/>
+              <a:buChar char="•"/>
+            </a:pPr>
+            <a:r>
+              <a:rPr lang="zh-CN" altLang="en-US" sz="1100">
+                <a:solidFill>
+                  <a:srgbClr val="44546A"/>
+                </a:solidFill>
+                <a:latin typeface="微软雅黑"/>
+                <a:ea typeface="微软雅黑"/>
+                <a:cs typeface="微软雅黑"/>
+              </a:rPr>
+              <a:t>曾任职哈佛医学院</a:t>
+            </a:r>
+          </a:p>
+          <a:p>
+            <a:pPr algn="l" marL="171450" indent="-171450">
+              <a:lnSpc>
+                <a:spcPct val="115000"/>
+              </a:lnSpc>
+              <a:spcAft>
+                <a:spcPts val="400"/>
+              </a:spcAft>
+              <a:buClr>
+                <a:srgbClr val="08A6F6"/>
+              </a:buClr>
+              <a:buFont typeface="Arial"/>
+              <a:buChar char="•"/>
+            </a:pPr>
+            <a:r>
+              <a:rPr lang="zh-CN" altLang="en-US" sz="1100">
+                <a:solidFill>
+                  <a:srgbClr val="44546A"/>
+                </a:solidFill>
+                <a:latin typeface="微软雅黑"/>
+                <a:ea typeface="微软雅黑"/>
+                <a:cs typeface="微软雅黑"/>
+              </a:rPr>
+              <a:t>近 10 年生物信息与多组学数据分析经验</a:t>
+            </a:r>
+          </a:p>
+          <a:p>
+            <a:pPr algn="l" marL="171450" indent="-171450">
+              <a:lnSpc>
+                <a:spcPct val="115000"/>
+              </a:lnSpc>
+              <a:spcAft>
+                <a:spcPts val="400"/>
+              </a:spcAft>
+              <a:buClr>
+                <a:srgbClr val="08A6F6"/>
+              </a:buClr>
+              <a:buFont typeface="Arial"/>
+              <a:buChar char="•"/>
+            </a:pPr>
+            <a:r>
+              <a:rPr lang="zh-CN" altLang="en-US" sz="1100">
+                <a:solidFill>
+                  <a:srgbClr val="44546A"/>
+                </a:solidFill>
+                <a:latin typeface="微软雅黑"/>
+                <a:ea typeface="微软雅黑"/>
+                <a:cs typeface="微软雅黑"/>
+              </a:rPr>
+              <a:t>精通大规模计算与机器学习预测建模</a:t>
+            </a:r>
+          </a:p>
+          <a:p>
+            <a:pPr algn="l" marL="171450" indent="-171450">
+              <a:lnSpc>
+                <a:spcPct val="115000"/>
+              </a:lnSpc>
+              <a:spcAft>
+                <a:spcPts val="400"/>
+              </a:spcAft>
+              <a:buClr>
+                <a:srgbClr val="08A6F6"/>
+              </a:buClr>
+              <a:buFont typeface="Arial"/>
+              <a:buChar char="•"/>
+            </a:pPr>
+            <a:r>
+              <a:rPr lang="zh-CN" altLang="en-US" sz="1100">
+                <a:solidFill>
+                  <a:srgbClr val="44546A"/>
+                </a:solidFill>
+                <a:latin typeface="微软雅黑"/>
+                <a:ea typeface="微软雅黑"/>
+                <a:cs typeface="微软雅黑"/>
+              </a:rPr>
+              <a:t>擅长搭建端到端可复用分析流程，支撑临床与生物医药项目的数据挖掘与决策输出</a:t>
+            </a:r>
+          </a:p>
+        </p:txBody>
+      </p:sp>
+      <p:sp>
+        <p:nvSpPr>
+          <p:cNvPr id="313" name="照片 4"/>
+          <p:cNvSpPr/>
+          <p:nvPr/>
+        </p:nvSpPr>
+        <p:spPr>
+          <a:xfrm>
+            <a:off x="9661779" y="1097280"/>
+            <a:ext cx="1417320" cy="1417320"/>
+          </a:xfrm>
+          <a:prstGeom prst="ellipse">
+            <a:avLst/>
+          </a:prstGeom>
+          <a:solidFill>
+            <a:srgbClr val="E7ECF2"/>
+          </a:solidFill>
+          <a:ln w="12700">
+            <a:solidFill>
+              <a:srgbClr val="99BDED"/>
+            </a:solidFill>
+          </a:ln>
+        </p:spPr>
+        <p:txBody>
+          <a:bodyPr anchor="ctr"/>
+          <a:lstStyle/>
+          <a:p>
+            <a:pPr algn="ctr">
+              <a:lnSpc>
+                <a:spcPct val="115000"/>
+              </a:lnSpc>
+              <a:buNone/>
+            </a:pPr>
+            <a:r>
+              <a:rPr lang="zh-CN" altLang="en-US" sz="1200">
+                <a:solidFill>
+                  <a:srgbClr val="8496B0"/>
+                </a:solidFill>
+                <a:latin typeface="微软雅黑"/>
+                <a:ea typeface="微软雅黑"/>
+                <a:cs typeface="微软雅黑"/>
+              </a:rPr>
+              <a:t>照片</a:t>
+            </a:r>
+          </a:p>
+        </p:txBody>
+      </p:sp>
+      <p:sp>
+        <p:nvSpPr>
+          <p:cNvPr id="314" name="姓名 4"/>
+          <p:cNvSpPr txBox="1"/>
+          <p:nvPr/>
+        </p:nvSpPr>
+        <p:spPr>
+          <a:xfrm>
+            <a:off x="9082278" y="2651760"/>
+            <a:ext cx="2576322" cy="347472"/>
+          </a:xfrm>
+          <a:prstGeom prst="rect">
+            <a:avLst/>
+          </a:prstGeom>
+          <a:noFill/>
+        </p:spPr>
+        <p:txBody>
+          <a:bodyPr wrap="square" lIns="0" tIns="0" rIns="0" bIns="0" anchor="ctr">
+            <a:noAutofit/>
+          </a:bodyPr>
+          <a:lstStyle/>
+          <a:p>
+            <a:pPr algn="ctr">
+              <a:lnSpc>
+                <a:spcPct val="115000"/>
+              </a:lnSpc>
+              <a:buNone/>
+            </a:pPr>
+            <a:r>
+              <a:rPr lang="zh-CN" altLang="en-US" sz="1600" b="1">
                 <a:solidFill>
                   <a:srgbClr val="061F32"/>
                 </a:solidFill>
@@ -2098,1565 +2700,203 @@
                 <a:ea typeface="微软雅黑"/>
                 <a:cs typeface="微软雅黑"/>
               </a:rPr>
-              <a:t>DKFZ / 海德堡大学分子神经遗传学资深科学家，霍英东杰出青年学者；深耕神经调控与脑类器官方向，主持欧中重大科研项目，以核心成员身份完成 Cell Stem Cell 2025（IPTO 预测治疗响应）、npj Precision Oncology 2024（GBM 类器官多维图谱）两项顶刊工作。长期研究胶质母细胞瘤复发、耐药等临床上亟待解决的难题，兼具顶尖科研与产业转化经验。</a:t>
-            </a:r>
-            <a:endParaRPr lang="zh-CN" altLang="en-US" sz="1400">
-              <a:solidFill>
-                <a:srgbClr val="061F32"/>
-              </a:solidFill>
-              <a:latin typeface="微软雅黑"/>
-              <a:ea typeface="微软雅黑"/>
-              <a:cs typeface="微软雅黑"/>
-            </a:endParaRPr>
-          </a:p>
-          <a:p>
-            <a:pPr algn="l">
-              <a:lnSpc>
-                <a:spcPct val="100000"/>
-              </a:lnSpc>
-              <a:buNone/>
-            </a:pPr>
-            <a:endParaRPr lang="zh-CN" altLang="en-US" sz="1400">
-              <a:solidFill>
-                <a:srgbClr val="061F32"/>
-              </a:solidFill>
-              <a:latin typeface="微软雅黑"/>
-              <a:ea typeface="微软雅黑"/>
-              <a:cs typeface="微软雅黑"/>
-            </a:endParaRPr>
-          </a:p>
-          <a:p>
-            <a:pPr algn="l">
-              <a:lnSpc>
-                <a:spcPct val="100000"/>
-              </a:lnSpc>
-              <a:buNone/>
-            </a:pPr>
-            <a:r>
-              <a:rPr lang="zh-CN" altLang="en-US" sz="1400" b="1">
-                <a:solidFill>
-                  <a:srgbClr val="061F32"/>
-                </a:solidFill>
-                <a:latin typeface="微软雅黑"/>
-                <a:ea typeface="微软雅黑"/>
-                <a:cs typeface="微软雅黑"/>
-              </a:rPr>
-              <a:t>- CTO 王中杰博士：</a:t>
-            </a:r>
-            <a:r>
-              <a:rPr lang="zh-CN" altLang="en-US" sz="1400">
-                <a:solidFill>
-                  <a:srgbClr val="061F32"/>
-                </a:solidFill>
-                <a:latin typeface="微软雅黑"/>
-                <a:ea typeface="微软雅黑"/>
-                <a:cs typeface="微软雅黑"/>
-              </a:rPr>
-              <a:t>巴斯德研究所博士后，近 10 年生物信息与多组学数据分析经验；曾任职哈佛医学院，精通大规模计算与机器学习预测建模，擅长搭建端到端可复用分析流程，支撑临床与生物医药项目的数据挖掘与决策输出。</a:t>
-            </a:r>
-            <a:endParaRPr lang="zh-CN" altLang="en-US" sz="1400">
-              <a:solidFill>
-                <a:srgbClr val="061F32"/>
-              </a:solidFill>
-              <a:latin typeface="微软雅黑"/>
-              <a:ea typeface="微软雅黑"/>
-              <a:cs typeface="微软雅黑"/>
-            </a:endParaRPr>
-          </a:p>
-          <a:p>
-            <a:pPr algn="l">
-              <a:lnSpc>
-                <a:spcPct val="100000"/>
-              </a:lnSpc>
-              <a:buNone/>
-            </a:pPr>
-            <a:endParaRPr lang="zh-CN" altLang="en-US" sz="1400">
-              <a:solidFill>
-                <a:srgbClr val="061F32"/>
-              </a:solidFill>
-              <a:latin typeface="微软雅黑"/>
-              <a:ea typeface="微软雅黑"/>
-              <a:cs typeface="微软雅黑"/>
-            </a:endParaRPr>
-          </a:p>
-          <a:p>
-            <a:pPr algn="l">
-              <a:lnSpc>
-                <a:spcPct val="100000"/>
-              </a:lnSpc>
-              <a:buNone/>
-            </a:pPr>
-            <a:r>
-              <a:rPr lang="zh-CN" altLang="en-US" sz="1400" b="1">
-                <a:solidFill>
-                  <a:srgbClr val="061F32"/>
-                </a:solidFill>
-                <a:latin typeface="微软雅黑"/>
-                <a:ea typeface="微软雅黑"/>
-                <a:cs typeface="微软雅黑"/>
-              </a:rPr>
-              <a:t>- COO 兰晓静：</a:t>
-            </a:r>
-            <a:r>
-              <a:rPr lang="zh-CN" altLang="en-US" sz="1400">
-                <a:solidFill>
-                  <a:srgbClr val="061F32"/>
-                </a:solidFill>
-                <a:latin typeface="微软雅黑"/>
-                <a:ea typeface="微软雅黑"/>
-                <a:cs typeface="微软雅黑"/>
-              </a:rPr>
-              <a:t>海德堡大学经济学硕士，浙江大学管理学学士，竺可桢学院创业与创新管理强化班，FRM 持证人；拥有多年国际金融机构风控合规、跨境尽调经验，精通跨境财务统筹、合规体系搭建与硬科技创业项目运营。</a:t>
-            </a:r>
-            <a:endParaRPr lang="zh-CN" altLang="en-US" sz="1400">
-              <a:solidFill>
-                <a:srgbClr val="061F32"/>
-              </a:solidFill>
-              <a:latin typeface="微软雅黑"/>
-              <a:ea typeface="微软雅黑"/>
-              <a:cs typeface="微软雅黑"/>
-            </a:endParaRPr>
-          </a:p>
-        </p:txBody>
-      </p:sp>
-      <p:graphicFrame>
-        <p:nvGraphicFramePr>
-          <p:cNvPr id="112" name="表格 71"/>
-          <p:cNvGraphicFramePr/>
-          <p:nvPr/>
-        </p:nvGraphicFramePr>
-        <p:xfrm>
-          <a:off x="533400" y="3769179"/>
-          <a:ext cx="10856595" cy="2048510"/>
-        </p:xfrm>
-        <a:graphic>
-          <a:graphicData uri="http://schemas.openxmlformats.org/drawingml/2006/table">
-            <a:tbl>
-              <a:tblPr/>
-              <a:tblGrid>
-                <a:gridCol w="2316480"/>
-                <a:gridCol w="2096770"/>
-                <a:gridCol w="6443345"/>
-              </a:tblGrid>
-              <a:tr h="398780">
-                <a:tc>
-                  <a:txBody>
-                    <a:bodyPr wrap="square">
-                      <a:spAutoFit/>
-                    </a:bodyPr>
-                    <a:lstStyle/>
-                    <a:p>
-                      <a:pPr marL="114300" marR="114300" algn="l">
-                        <a:lnSpc>
-                          <a:spcPct val="120000"/>
-                        </a:lnSpc>
-                        <a:buNone/>
-                      </a:pPr>
-                      <a:r>
-                        <a:rPr sz="1125" b="1">
-                          <a:solidFill>
-                            <a:srgbClr val="FFFFFF"/>
-                          </a:solidFill>
-                          <a:latin typeface="微软雅黑"/>
-                          <a:ea typeface="微软雅黑"/>
-                          <a:cs typeface="微软雅黑"/>
-                        </a:rPr>
-                        <a:t>角色</a:t>
-                      </a:r>
-                      <a:endParaRPr sz="1125" b="1">
-                        <a:solidFill>
-                          <a:srgbClr val="FFFFFF"/>
-                        </a:solidFill>
-                        <a:latin typeface="微软雅黑"/>
-                        <a:ea typeface="微软雅黑"/>
-                        <a:cs typeface="微软雅黑"/>
-                      </a:endParaRPr>
-                    </a:p>
-                  </a:txBody>
-                  <a:tcPr marL="0" marR="0" marT="0" marB="0" anchor="ctr">
-                    <a:lnL>
-                      <a:noFill/>
-                    </a:lnL>
-                    <a:lnR>
-                      <a:noFill/>
-                    </a:lnR>
-                    <a:lnT>
-                      <a:noFill/>
-                    </a:lnT>
-                    <a:lnB>
-                      <a:noFill/>
-                    </a:lnB>
-                    <a:solidFill>
-                      <a:srgbClr val="061F32"/>
-                    </a:solidFill>
-                  </a:tcPr>
-                </a:tc>
-                <a:tc>
-                  <a:txBody>
-                    <a:bodyPr wrap="square">
-                      <a:spAutoFit/>
-                    </a:bodyPr>
-                    <a:lstStyle/>
-                    <a:p>
-                      <a:pPr marL="114300" marR="114300" algn="l">
-                        <a:lnSpc>
-                          <a:spcPct val="120000"/>
-                        </a:lnSpc>
-                        <a:buNone/>
-                      </a:pPr>
-                      <a:r>
-                        <a:rPr sz="1125" b="1">
-                          <a:solidFill>
-                            <a:srgbClr val="FFFFFF"/>
-                          </a:solidFill>
-                          <a:latin typeface="微软雅黑"/>
-                          <a:ea typeface="微软雅黑"/>
-                          <a:cs typeface="微软雅黑"/>
-                        </a:rPr>
-                        <a:t>人选</a:t>
-                      </a:r>
-                      <a:endParaRPr sz="1125" b="1">
-                        <a:solidFill>
-                          <a:srgbClr val="FFFFFF"/>
-                        </a:solidFill>
-                        <a:latin typeface="微软雅黑"/>
-                        <a:ea typeface="微软雅黑"/>
-                        <a:cs typeface="微软雅黑"/>
-                      </a:endParaRPr>
-                    </a:p>
-                  </a:txBody>
-                  <a:tcPr marL="0" marR="0" marT="0" marB="0" anchor="ctr">
-                    <a:lnL>
-                      <a:noFill/>
-                    </a:lnL>
-                    <a:lnR>
-                      <a:noFill/>
-                    </a:lnR>
-                    <a:lnT>
-                      <a:noFill/>
-                    </a:lnT>
-                    <a:lnB>
-                      <a:noFill/>
-                    </a:lnB>
-                    <a:solidFill>
-                      <a:srgbClr val="061F32"/>
-                    </a:solidFill>
-                  </a:tcPr>
-                </a:tc>
-                <a:tc>
-                  <a:txBody>
-                    <a:bodyPr wrap="square">
-                      <a:spAutoFit/>
-                    </a:bodyPr>
-                    <a:lstStyle/>
-                    <a:p>
-                      <a:pPr marL="114300" marR="114300" algn="l">
-                        <a:lnSpc>
-                          <a:spcPct val="120000"/>
-                        </a:lnSpc>
-                        <a:buNone/>
-                      </a:pPr>
-                      <a:r>
-                        <a:rPr sz="1125" b="1">
-                          <a:solidFill>
-                            <a:srgbClr val="FFFFFF"/>
-                          </a:solidFill>
-                          <a:latin typeface="微软雅黑"/>
-                          <a:ea typeface="微软雅黑"/>
-                          <a:cs typeface="微软雅黑"/>
-                        </a:rPr>
-                        <a:t>职责</a:t>
-                      </a:r>
-                      <a:endParaRPr sz="1125" b="1">
-                        <a:solidFill>
-                          <a:srgbClr val="FFFFFF"/>
-                        </a:solidFill>
-                        <a:latin typeface="微软雅黑"/>
-                        <a:ea typeface="微软雅黑"/>
-                        <a:cs typeface="微软雅黑"/>
-                      </a:endParaRPr>
-                    </a:p>
-                  </a:txBody>
-                  <a:tcPr marL="0" marR="0" marT="0" marB="0" anchor="ctr">
-                    <a:lnL>
-                      <a:noFill/>
-                    </a:lnL>
-                    <a:lnR>
-                      <a:noFill/>
-                    </a:lnR>
-                    <a:lnT>
-                      <a:noFill/>
-                    </a:lnT>
-                    <a:lnB>
-                      <a:noFill/>
-                    </a:lnB>
-                    <a:solidFill>
-                      <a:srgbClr val="061F32"/>
-                    </a:solidFill>
-                  </a:tcPr>
-                </a:tc>
-              </a:tr>
-              <a:tr h="412750">
-                <a:tc>
-                  <a:txBody>
-                    <a:bodyPr wrap="square">
-                      <a:spAutoFit/>
-                    </a:bodyPr>
-                    <a:lstStyle/>
-                    <a:p>
-                      <a:pPr marL="114300" marR="114300" algn="l">
-                        <a:lnSpc>
-                          <a:spcPct val="120000"/>
-                        </a:lnSpc>
-                        <a:buNone/>
-                      </a:pPr>
-                      <a:r>
-                        <a:rPr sz="1125" b="1">
-                          <a:solidFill>
-                            <a:srgbClr val="061F32"/>
-                          </a:solidFill>
-                          <a:latin typeface="微软雅黑"/>
-                          <a:ea typeface="微软雅黑"/>
-                          <a:cs typeface="微软雅黑"/>
-                        </a:rPr>
-                        <a:t>CEO</a:t>
-                      </a:r>
-                      <a:endParaRPr sz="1125" b="1">
-                        <a:solidFill>
-                          <a:srgbClr val="061F32"/>
-                        </a:solidFill>
-                        <a:latin typeface="微软雅黑"/>
-                        <a:ea typeface="微软雅黑"/>
-                        <a:cs typeface="微软雅黑"/>
-                      </a:endParaRPr>
-                    </a:p>
-                    <a:p>
-                      <a:pPr marL="114300" marR="114300" algn="l">
-                        <a:lnSpc>
-                          <a:spcPct val="120000"/>
-                        </a:lnSpc>
-                        <a:buNone/>
-                      </a:pPr>
-                      <a:r>
-                        <a:rPr sz="1125" b="1">
-                          <a:solidFill>
-                            <a:srgbClr val="061F32"/>
-                          </a:solidFill>
-                          <a:latin typeface="微软雅黑"/>
-                          <a:ea typeface="微软雅黑"/>
-                          <a:cs typeface="微软雅黑"/>
-                        </a:rPr>
-                        <a:t/>
-                      </a:r>
-                      <a:endParaRPr sz="1125" b="1">
-                        <a:solidFill>
-                          <a:srgbClr val="061F32"/>
-                        </a:solidFill>
-                        <a:latin typeface="微软雅黑"/>
-                        <a:ea typeface="微软雅黑"/>
-                        <a:cs typeface="微软雅黑"/>
-                      </a:endParaRPr>
-                    </a:p>
-                  </a:txBody>
-                  <a:tcPr marL="0" marR="0" marT="0" marB="0" anchor="ctr">
-                    <a:lnL>
-                      <a:noFill/>
-                    </a:lnL>
-                    <a:lnR>
-                      <a:noFill/>
-                    </a:lnR>
-                    <a:lnT>
-                      <a:noFill/>
-                    </a:lnT>
-                    <a:lnB>
-                      <a:noFill/>
-                    </a:lnB>
-                  </a:tcPr>
-                </a:tc>
-                <a:tc>
-                  <a:txBody>
-                    <a:bodyPr wrap="square">
-                      <a:spAutoFit/>
-                    </a:bodyPr>
-                    <a:lstStyle/>
-                    <a:p>
-                      <a:pPr marL="114300" marR="114300" algn="l">
-                        <a:lnSpc>
-                          <a:spcPct val="120000"/>
-                        </a:lnSpc>
-                        <a:buNone/>
-                      </a:pPr>
-                      <a:r>
-                        <a:rPr sz="1125">
-                          <a:solidFill>
-                            <a:srgbClr val="44546A"/>
-                          </a:solidFill>
-                          <a:latin typeface="微软雅黑"/>
-                          <a:ea typeface="微软雅黑"/>
-                          <a:cs typeface="微软雅黑"/>
-                        </a:rPr>
-                        <a:t>卓悦</a:t>
-                      </a:r>
-                      <a:endParaRPr sz="1125">
-                        <a:solidFill>
-                          <a:srgbClr val="44546A"/>
-                        </a:solidFill>
-                        <a:latin typeface="微软雅黑"/>
-                        <a:ea typeface="微软雅黑"/>
-                        <a:cs typeface="微软雅黑"/>
-                      </a:endParaRPr>
-                    </a:p>
-                  </a:txBody>
-                  <a:tcPr marL="0" marR="0" marT="0" marB="0" anchor="ctr">
-                    <a:lnL>
-                      <a:noFill/>
-                    </a:lnL>
-                    <a:lnR>
-                      <a:noFill/>
-                    </a:lnR>
-                    <a:lnT>
-                      <a:noFill/>
-                    </a:lnT>
-                    <a:lnB>
-                      <a:noFill/>
-                    </a:lnB>
-                  </a:tcPr>
-                </a:tc>
-                <a:tc>
-                  <a:txBody>
-                    <a:bodyPr wrap="square">
-                      <a:spAutoFit/>
-                    </a:bodyPr>
-                    <a:lstStyle/>
-                    <a:p>
-                      <a:pPr marL="114300" marR="114300" algn="l">
-                        <a:lnSpc>
-                          <a:spcPct val="120000"/>
-                        </a:lnSpc>
-                        <a:buNone/>
-                      </a:pPr>
-                      <a:r>
-                        <a:rPr sz="1125">
-                          <a:solidFill>
-                            <a:srgbClr val="44546A"/>
-                          </a:solidFill>
-                          <a:latin typeface="微软雅黑"/>
-                          <a:ea typeface="微软雅黑"/>
-                          <a:cs typeface="微软雅黑"/>
-                        </a:rPr>
-                        <a:t>公司战略与融资；实验数字化与数据标准，自建 Verqura 系统；关键合作伙伴关系</a:t>
-                      </a:r>
-                      <a:r>
-                        <a:rPr lang="zh-CN" altLang="en-US" sz="1125">
-                          <a:solidFill>
-                            <a:srgbClr val="44546A"/>
-                          </a:solidFill>
-                          <a:latin typeface="微软雅黑"/>
-                          <a:ea typeface="微软雅黑"/>
-                          <a:cs typeface="Arial" panose="020B0604020202020204" pitchFamily="34" charset="0"/>
-                        </a:rPr>
-                        <a:t/>
-                      </a:r>
-                      <a:r>
-                        <a:rPr sz="1125">
-                          <a:solidFill>
-                            <a:srgbClr val="44546A"/>
-                          </a:solidFill>
-                          <a:latin typeface="微软雅黑"/>
-                          <a:ea typeface="微软雅黑"/>
-                          <a:cs typeface="微软雅黑"/>
-                        </a:rPr>
-                        <a:t/>
-                      </a:r>
-                      <a:r>
-                        <a:rPr lang="zh-CN" altLang="en-US" sz="1125">
-                          <a:solidFill>
-                            <a:srgbClr val="44546A"/>
-                          </a:solidFill>
-                          <a:latin typeface="微软雅黑"/>
-                          <a:ea typeface="微软雅黑"/>
-                          <a:cs typeface="微软雅黑"/>
-                        </a:rPr>
-                        <a:t/>
-                      </a:r>
-                      <a:r>
-                        <a:rPr sz="1125">
-                          <a:solidFill>
-                            <a:srgbClr val="44546A"/>
-                          </a:solidFill>
-                          <a:latin typeface="微软雅黑"/>
-                          <a:ea typeface="微软雅黑"/>
-                          <a:cs typeface="微软雅黑"/>
-                        </a:rPr>
-                        <a:t/>
-                      </a:r>
-                      <a:r>
-                        <a:rPr lang="zh-CN" altLang="en-US" sz="1125">
-                          <a:solidFill>
-                            <a:srgbClr val="44546A"/>
-                          </a:solidFill>
-                          <a:latin typeface="微软雅黑"/>
-                          <a:ea typeface="微软雅黑"/>
-                          <a:cs typeface="微软雅黑"/>
-                        </a:rPr>
-                        <a:t/>
-                      </a:r>
-                      <a:r>
-                        <a:rPr sz="1125">
-                          <a:solidFill>
-                            <a:srgbClr val="44546A"/>
-                          </a:solidFill>
-                          <a:latin typeface="微软雅黑"/>
-                          <a:ea typeface="微软雅黑"/>
-                          <a:cs typeface="微软雅黑"/>
-                        </a:rPr>
-                        <a:t/>
-                      </a:r>
-                      <a:r>
-                        <a:rPr lang="zh-CN" altLang="en-US" sz="1125">
-                          <a:solidFill>
-                            <a:srgbClr val="44546A"/>
-                          </a:solidFill>
-                          <a:latin typeface="微软雅黑"/>
-                          <a:ea typeface="微软雅黑"/>
-                          <a:cs typeface="微软雅黑"/>
-                        </a:rPr>
-                        <a:t/>
-                      </a:r>
-                      <a:endParaRPr sz="1125">
-                        <a:solidFill>
-                          <a:srgbClr val="44546A"/>
-                        </a:solidFill>
-                        <a:latin typeface="微软雅黑"/>
-                        <a:ea typeface="微软雅黑"/>
-                        <a:cs typeface="微软雅黑"/>
-                      </a:endParaRPr>
-                    </a:p>
-                  </a:txBody>
-                  <a:tcPr marL="0" marR="0" marT="0" marB="0" anchor="ctr">
-                    <a:lnL>
-                      <a:noFill/>
-                    </a:lnL>
-                    <a:lnR>
-                      <a:noFill/>
-                    </a:lnR>
-                    <a:lnT>
-                      <a:noFill/>
-                    </a:lnT>
-                    <a:lnB>
-                      <a:noFill/>
-                    </a:lnB>
-                  </a:tcPr>
-                </a:tc>
-              </a:tr>
-              <a:tr h="412750">
-                <a:tc>
-                  <a:txBody>
-                    <a:bodyPr wrap="square">
-                      <a:spAutoFit/>
-                    </a:bodyPr>
-                    <a:lstStyle/>
-                    <a:p>
-                      <a:pPr marL="114300" marR="114300" algn="l">
-                        <a:lnSpc>
-                          <a:spcPct val="120000"/>
-                        </a:lnSpc>
-                        <a:buNone/>
-                      </a:pPr>
-                      <a:r>
-                        <a:rPr sz="1125" b="1">
-                          <a:solidFill>
-                            <a:srgbClr val="061F32"/>
-                          </a:solidFill>
-                          <a:latin typeface="微软雅黑"/>
-                          <a:ea typeface="微软雅黑"/>
-                          <a:cs typeface="微软雅黑"/>
-                        </a:rPr>
-                        <a:t>CSO</a:t>
-                      </a:r>
-                      <a:endParaRPr sz="1125" b="1">
-                        <a:solidFill>
-                          <a:srgbClr val="061F32"/>
-                        </a:solidFill>
-                        <a:latin typeface="微软雅黑"/>
-                        <a:ea typeface="微软雅黑"/>
-                        <a:cs typeface="微软雅黑"/>
-                      </a:endParaRPr>
-                    </a:p>
-                    <a:p>
-                      <a:pPr marL="114300" marR="114300" algn="l">
-                        <a:lnSpc>
-                          <a:spcPct val="120000"/>
-                        </a:lnSpc>
-                        <a:buNone/>
-                      </a:pPr>
-                      <a:r>
-                        <a:rPr sz="1125" b="1">
-                          <a:solidFill>
-                            <a:srgbClr val="061F32"/>
-                          </a:solidFill>
-                          <a:latin typeface="微软雅黑"/>
-                          <a:ea typeface="微软雅黑"/>
-                          <a:cs typeface="微软雅黑"/>
-                        </a:rPr>
-                        <a:t/>
-                      </a:r>
-                      <a:endParaRPr sz="1125" b="1">
-                        <a:solidFill>
-                          <a:srgbClr val="061F32"/>
-                        </a:solidFill>
-                        <a:latin typeface="微软雅黑"/>
-                        <a:ea typeface="微软雅黑"/>
-                        <a:cs typeface="微软雅黑"/>
-                      </a:endParaRPr>
-                    </a:p>
-                  </a:txBody>
-                  <a:tcPr marL="0" marR="0" marT="0" marB="0" anchor="ctr">
-                    <a:lnL>
-                      <a:noFill/>
-                    </a:lnL>
-                    <a:lnR>
-                      <a:noFill/>
-                    </a:lnR>
-                    <a:lnT>
-                      <a:noFill/>
-                    </a:lnT>
-                    <a:lnB>
-                      <a:noFill/>
-                    </a:lnB>
-                    <a:solidFill>
-                      <a:srgbClr val="F5F5F5"/>
-                    </a:solidFill>
-                  </a:tcPr>
-                </a:tc>
-                <a:tc>
-                  <a:txBody>
-                    <a:bodyPr wrap="square">
-                      <a:spAutoFit/>
-                    </a:bodyPr>
-                    <a:lstStyle/>
-                    <a:p>
-                      <a:pPr marL="114300" marR="114300" algn="l">
-                        <a:lnSpc>
-                          <a:spcPct val="120000"/>
-                        </a:lnSpc>
-                        <a:buNone/>
-                      </a:pPr>
-                      <a:r>
-                        <a:rPr sz="1125">
-                          <a:solidFill>
-                            <a:srgbClr val="44546A"/>
-                          </a:solidFill>
-                          <a:latin typeface="微软雅黑"/>
-                          <a:ea typeface="微软雅黑"/>
-                          <a:cs typeface="微软雅黑"/>
-                        </a:rPr>
-                        <a:t>田伟利</a:t>
-                      </a:r>
-                      <a:endParaRPr sz="1125">
-                        <a:solidFill>
-                          <a:srgbClr val="44546A"/>
-                        </a:solidFill>
-                        <a:latin typeface="微软雅黑"/>
-                        <a:ea typeface="微软雅黑"/>
-                        <a:cs typeface="微软雅黑"/>
-                      </a:endParaRPr>
-                    </a:p>
-                  </a:txBody>
-                  <a:tcPr marL="0" marR="0" marT="0" marB="0" anchor="ctr">
-                    <a:lnL>
-                      <a:noFill/>
-                    </a:lnL>
-                    <a:lnR>
-                      <a:noFill/>
-                    </a:lnR>
-                    <a:lnT>
-                      <a:noFill/>
-                    </a:lnT>
-                    <a:lnB>
-                      <a:noFill/>
-                    </a:lnB>
-                    <a:solidFill>
-                      <a:srgbClr val="F5F5F5"/>
-                    </a:solidFill>
-                  </a:tcPr>
-                </a:tc>
-                <a:tc>
-                  <a:txBody>
-                    <a:bodyPr wrap="square">
-                      <a:spAutoFit/>
-                    </a:bodyPr>
-                    <a:lstStyle/>
-                    <a:p>
-                      <a:pPr marL="114300" marR="114300" algn="l">
-                        <a:lnSpc>
-                          <a:spcPct val="120000"/>
-                        </a:lnSpc>
-                        <a:buNone/>
-                      </a:pPr>
-                      <a:r>
-                        <a:rPr sz="1125">
-                          <a:solidFill>
-                            <a:srgbClr val="44546A"/>
-                          </a:solidFill>
-                          <a:latin typeface="微软雅黑"/>
-                          <a:ea typeface="微软雅黑"/>
-                          <a:cs typeface="微软雅黑"/>
-                        </a:rPr>
-                        <a:t>脑类器官体系搭建、疾病机制研究、整体科学路线规划；临床合作与验证设计</a:t>
-                      </a:r>
-                      <a:r>
-                        <a:rPr lang="zh-CN" altLang="en-US" sz="1125">
-                          <a:solidFill>
-                            <a:srgbClr val="44546A"/>
-                          </a:solidFill>
-                          <a:latin typeface="微软雅黑"/>
-                          <a:ea typeface="微软雅黑"/>
-                          <a:cs typeface="微软雅黑"/>
-                        </a:rPr>
-                        <a:t/>
-                      </a:r>
-                      <a:r>
-                        <a:rPr sz="1125">
-                          <a:solidFill>
-                            <a:srgbClr val="44546A"/>
-                          </a:solidFill>
-                          <a:latin typeface="微软雅黑"/>
-                          <a:ea typeface="微软雅黑"/>
-                          <a:cs typeface="微软雅黑"/>
-                        </a:rPr>
-                        <a:t/>
-                      </a:r>
-                      <a:r>
-                        <a:rPr lang="zh-CN" altLang="en-US" sz="1125">
-                          <a:solidFill>
-                            <a:srgbClr val="44546A"/>
-                          </a:solidFill>
-                          <a:latin typeface="微软雅黑"/>
-                          <a:ea typeface="微软雅黑"/>
-                          <a:cs typeface="微软雅黑"/>
-                        </a:rPr>
-                        <a:t/>
-                      </a:r>
-                      <a:r>
-                        <a:rPr sz="1125">
-                          <a:solidFill>
-                            <a:srgbClr val="44546A"/>
-                          </a:solidFill>
-                          <a:latin typeface="微软雅黑"/>
-                          <a:ea typeface="微软雅黑"/>
-                          <a:cs typeface="微软雅黑"/>
-                        </a:rPr>
-                        <a:t/>
-                      </a:r>
-                      <a:r>
-                        <a:rPr lang="zh-CN" altLang="en-US" sz="1125">
-                          <a:solidFill>
-                            <a:srgbClr val="44546A"/>
-                          </a:solidFill>
-                          <a:latin typeface="微软雅黑"/>
-                          <a:ea typeface="微软雅黑"/>
-                          <a:cs typeface="微软雅黑"/>
-                        </a:rPr>
-                        <a:t/>
-                      </a:r>
-                      <a:r>
-                        <a:rPr sz="1125">
-                          <a:solidFill>
-                            <a:srgbClr val="44546A"/>
-                          </a:solidFill>
-                          <a:latin typeface="微软雅黑"/>
-                          <a:ea typeface="微软雅黑"/>
-                          <a:cs typeface="微软雅黑"/>
-                        </a:rPr>
-                        <a:t/>
-                      </a:r>
-                      <a:endParaRPr sz="1125">
-                        <a:solidFill>
-                          <a:srgbClr val="44546A"/>
-                        </a:solidFill>
-                        <a:latin typeface="微软雅黑"/>
-                        <a:ea typeface="微软雅黑"/>
-                        <a:cs typeface="微软雅黑"/>
-                      </a:endParaRPr>
-                    </a:p>
-                  </a:txBody>
-                  <a:tcPr marL="0" marR="0" marT="0" marB="0" anchor="ctr">
-                    <a:lnL>
-                      <a:noFill/>
-                    </a:lnL>
-                    <a:lnR>
-                      <a:noFill/>
-                    </a:lnR>
-                    <a:lnT>
-                      <a:noFill/>
-                    </a:lnT>
-                    <a:lnB>
-                      <a:noFill/>
-                    </a:lnB>
-                    <a:solidFill>
-                      <a:srgbClr val="F5F5F5"/>
-                    </a:solidFill>
-                  </a:tcPr>
-                </a:tc>
-              </a:tr>
-              <a:tr h="412750">
-                <a:tc>
-                  <a:txBody>
-                    <a:bodyPr wrap="square">
-                      <a:spAutoFit/>
-                    </a:bodyPr>
-                    <a:lstStyle/>
-                    <a:p>
-                      <a:pPr marL="114300" algn="l">
-                        <a:lnSpc>
-                          <a:spcPct val="120000"/>
-                        </a:lnSpc>
-                        <a:buNone/>
-                      </a:pPr>
-                      <a:r>
-                        <a:rPr sz="1125" b="1" i="0" u="none">
-                          <a:solidFill>
-                            <a:srgbClr val="061F32">
-                              <a:alpha val="100000"/>
-                            </a:srgbClr>
-                          </a:solidFill>
-                          <a:latin typeface="微软雅黑"/>
-                          <a:ea typeface="微软雅黑"/>
-                          <a:cs typeface="微软雅黑"/>
-                        </a:rPr>
-                        <a:t>CTO</a:t>
-                      </a:r>
-                      <a:endParaRPr sz="1125" b="1">
-                        <a:solidFill>
-                          <a:srgbClr val="08A6F6">
-                            <a:alpha val="100000"/>
-                          </a:srgbClr>
-                        </a:solidFill>
-                        <a:latin typeface="微软雅黑"/>
-                        <a:ea typeface="微软雅黑"/>
-                        <a:cs typeface="微软雅黑"/>
-                      </a:endParaRPr>
-                    </a:p>
-                    <a:p>
-                      <a:pPr marL="114300" algn="l">
-                        <a:lnSpc>
-                          <a:spcPct val="120000"/>
-                        </a:lnSpc>
-                        <a:buNone/>
-                      </a:pPr>
-                      <a:r>
-                        <a:rPr sz="1125" b="1" i="0" u="none">
-                          <a:solidFill>
-                            <a:srgbClr val="061F32">
-                              <a:alpha val="100000"/>
-                            </a:srgbClr>
-                          </a:solidFill>
-                          <a:latin typeface="微软雅黑"/>
-                          <a:ea typeface="微软雅黑"/>
-                          <a:cs typeface="微软雅黑"/>
-                        </a:rPr>
-                        <a:t/>
-                      </a:r>
-                      <a:r>
-                        <a:rPr sz="1125" b="1" i="0" u="none">
-                          <a:solidFill>
-                            <a:srgbClr val="061F32">
-                              <a:alpha val="100000"/>
-                            </a:srgbClr>
-                          </a:solidFill>
-                          <a:latin typeface="微软雅黑"/>
-                          <a:ea typeface="微软雅黑"/>
-                          <a:cs typeface="微软雅黑"/>
-                        </a:rPr>
-                        <a:t/>
-                      </a:r>
-                      <a:r>
-                        <a:rPr sz="1125" b="1" i="0" u="none">
-                          <a:solidFill>
-                            <a:srgbClr val="061F32">
-                              <a:alpha val="100000"/>
-                            </a:srgbClr>
-                          </a:solidFill>
-                          <a:latin typeface="微软雅黑"/>
-                          <a:ea typeface="微软雅黑"/>
-                          <a:cs typeface="微软雅黑"/>
-                        </a:rPr>
-                        <a:t/>
-                      </a:r>
-                      <a:endParaRPr sz="1125" b="1">
-                        <a:solidFill>
-                          <a:srgbClr val="08A6F6">
-                            <a:alpha val="100000"/>
-                          </a:srgbClr>
-                        </a:solidFill>
-                        <a:latin typeface="微软雅黑"/>
-                        <a:ea typeface="微软雅黑"/>
-                        <a:cs typeface="微软雅黑"/>
-                      </a:endParaRPr>
-                    </a:p>
-                  </a:txBody>
-                  <a:tcPr marL="0" marR="0" marT="0" marB="0" anchor="ctr">
-                    <a:lnL>
-                      <a:noFill/>
-                    </a:lnL>
-                    <a:lnR>
-                      <a:noFill/>
-                    </a:lnR>
-                    <a:lnT>
-                      <a:noFill/>
-                    </a:lnT>
-                    <a:lnB>
-                      <a:noFill/>
-                    </a:lnB>
-                  </a:tcPr>
-                </a:tc>
-                <a:tc>
-                  <a:txBody>
-                    <a:bodyPr wrap="square">
-                      <a:spAutoFit/>
-                    </a:bodyPr>
-                    <a:lstStyle/>
-                    <a:p>
-                      <a:pPr marL="114300" indent="0" algn="l" defTabSz="914400">
-                        <a:lnSpc>
-                          <a:spcPct val="120000"/>
-                        </a:lnSpc>
-                        <a:buNone/>
-                      </a:pPr>
-                      <a:r>
-                        <a:rPr sz="1125" b="0" i="0" u="none">
-                          <a:solidFill>
-                            <a:srgbClr val="44546A">
-                              <a:alpha val="100000"/>
-                            </a:srgbClr>
-                          </a:solidFill>
-                          <a:latin typeface="微软雅黑"/>
-                          <a:ea typeface="微软雅黑"/>
-                          <a:cs typeface="微软雅黑"/>
-                        </a:rPr>
-                        <a:t>王中杰</a:t>
-                      </a:r>
-                      <a:endParaRPr sz="1125" b="0" i="0" u="none">
-                        <a:solidFill>
-                          <a:srgbClr val="44546A">
-                            <a:alpha val="100000"/>
-                          </a:srgbClr>
-                        </a:solidFill>
-                        <a:latin typeface="微软雅黑"/>
-                        <a:ea typeface="微软雅黑"/>
-                        <a:cs typeface="微软雅黑"/>
-                      </a:endParaRPr>
-                    </a:p>
-                  </a:txBody>
-                  <a:tcPr marL="0" marR="0" marT="0" marB="0" anchor="ctr">
-                    <a:lnL>
-                      <a:noFill/>
-                    </a:lnL>
-                    <a:lnR>
-                      <a:noFill/>
-                    </a:lnR>
-                    <a:lnT>
-                      <a:noFill/>
-                    </a:lnT>
-                    <a:lnB>
-                      <a:noFill/>
-                    </a:lnB>
-                  </a:tcPr>
-                </a:tc>
-                <a:tc>
-                  <a:txBody>
-                    <a:bodyPr wrap="square">
-                      <a:spAutoFit/>
-                    </a:bodyPr>
-                    <a:lstStyle/>
-                    <a:p>
-                      <a:pPr marL="114300" marR="114300" algn="l">
-                        <a:lnSpc>
-                          <a:spcPct val="120000"/>
-                        </a:lnSpc>
-                        <a:buNone/>
-                      </a:pPr>
-                      <a:r>
-                        <a:rPr sz="1125">
-                          <a:solidFill>
-                            <a:srgbClr val="44546A"/>
-                          </a:solidFill>
-                          <a:latin typeface="微软雅黑"/>
-                          <a:ea typeface="微软雅黑"/>
-                          <a:cs typeface="微软雅黑"/>
-                        </a:rPr>
-                        <a:t>虚拟类器官预测模型研发；多模态建模、自监督预训练、因果建模；数据平台与算力架构</a:t>
-                      </a:r>
-                      <a:r>
-                        <a:rPr lang="zh-CN" altLang="en-US" sz="1125">
-                          <a:solidFill>
-                            <a:srgbClr val="44546A"/>
-                          </a:solidFill>
-                          <a:latin typeface="微软雅黑"/>
-                          <a:ea typeface="微软雅黑"/>
-                          <a:cs typeface="微软雅黑"/>
-                        </a:rPr>
-                        <a:t/>
-                      </a:r>
-                      <a:r>
-                        <a:rPr sz="1125">
-                          <a:solidFill>
-                            <a:srgbClr val="44546A"/>
-                          </a:solidFill>
-                          <a:latin typeface="微软雅黑"/>
-                          <a:ea typeface="微软雅黑"/>
-                          <a:cs typeface="微软雅黑"/>
-                        </a:rPr>
-                        <a:t/>
-                      </a:r>
-                      <a:endParaRPr sz="1125">
-                        <a:solidFill>
-                          <a:srgbClr val="44546A"/>
-                        </a:solidFill>
-                        <a:latin typeface="微软雅黑"/>
-                        <a:ea typeface="微软雅黑"/>
-                        <a:cs typeface="微软雅黑"/>
-                      </a:endParaRPr>
-                    </a:p>
-                  </a:txBody>
-                  <a:tcPr marL="0" marR="0" marT="0" marB="0" anchor="ctr">
-                    <a:lnL>
-                      <a:noFill/>
-                    </a:lnL>
-                    <a:lnR>
-                      <a:noFill/>
-                    </a:lnR>
-                    <a:lnT>
-                      <a:noFill/>
-                    </a:lnT>
-                    <a:lnB>
-                      <a:noFill/>
-                    </a:lnB>
-                  </a:tcPr>
-                </a:tc>
-              </a:tr>
-              <a:tr h="411480">
-                <a:tc>
-                  <a:txBody>
-                    <a:bodyPr wrap="square">
-                      <a:spAutoFit/>
-                    </a:bodyPr>
-                    <a:lstStyle/>
-                    <a:p>
-                      <a:pPr marL="114300" algn="l">
-                        <a:lnSpc>
-                          <a:spcPct val="120000"/>
-                        </a:lnSpc>
-                        <a:buNone/>
-                      </a:pPr>
-                      <a:r>
-                        <a:rPr sz="1125" b="1" i="0" u="none">
-                          <a:solidFill>
-                            <a:srgbClr val="061F32">
-                              <a:alpha val="100000"/>
-                            </a:srgbClr>
-                          </a:solidFill>
-                          <a:latin typeface="微软雅黑"/>
-                          <a:ea typeface="微软雅黑"/>
-                          <a:cs typeface="微软雅黑"/>
-                        </a:rPr>
-                        <a:t>COO</a:t>
-                      </a:r>
-                      <a:r>
-                        <a:rPr lang="en-US" altLang="zh-CN" sz="1125" b="1" i="0" u="none">
-                          <a:solidFill>
-                            <a:srgbClr val="061F32">
-                              <a:alpha val="100000"/>
-                            </a:srgbClr>
-                          </a:solidFill>
-                          <a:latin typeface="微软雅黑"/>
-                          <a:ea typeface="微软雅黑"/>
-                          <a:cs typeface="微软雅黑"/>
-                        </a:rPr>
-                        <a:t/>
-                      </a:r>
-                      <a:endParaRPr lang="en-US" altLang="zh-CN" sz="1125" b="1" i="0" u="none">
-                        <a:solidFill>
-                          <a:srgbClr val="061F32">
-                            <a:alpha val="100000"/>
-                          </a:srgbClr>
-                        </a:solidFill>
-                        <a:latin typeface="微软雅黑"/>
-                        <a:ea typeface="微软雅黑"/>
-                        <a:cs typeface="微软雅黑"/>
-                      </a:endParaRPr>
-                    </a:p>
-                    <a:p>
-                      <a:pPr marL="114300" algn="l">
-                        <a:lnSpc>
-                          <a:spcPct val="120000"/>
-                        </a:lnSpc>
-                        <a:buNone/>
-                      </a:pPr>
-                      <a:r>
-                        <a:rPr lang="zh-CN" altLang="en-US" sz="1125" b="1" i="0" u="none">
-                          <a:solidFill>
-                            <a:srgbClr val="061F32">
-                              <a:alpha val="100000"/>
-                            </a:srgbClr>
-                          </a:solidFill>
-                          <a:latin typeface="微软雅黑"/>
-                          <a:ea typeface="微软雅黑"/>
-                          <a:cs typeface="微软雅黑"/>
-                        </a:rPr>
-                        <a:t/>
-                      </a:r>
-                      <a:r>
-                        <a:rPr sz="1125" b="1" i="0" u="none">
-                          <a:solidFill>
-                            <a:srgbClr val="061F32">
-                              <a:alpha val="100000"/>
-                            </a:srgbClr>
-                          </a:solidFill>
-                          <a:latin typeface="微软雅黑"/>
-                          <a:ea typeface="微软雅黑"/>
-                          <a:cs typeface="微软雅黑"/>
-                        </a:rPr>
-                        <a:t/>
-                      </a:r>
-                      <a:endParaRPr sz="1125" b="1" i="0" u="none">
-                        <a:solidFill>
-                          <a:srgbClr val="061F32">
-                            <a:alpha val="100000"/>
-                          </a:srgbClr>
-                        </a:solidFill>
-                        <a:latin typeface="微软雅黑"/>
-                        <a:ea typeface="微软雅黑"/>
-                        <a:cs typeface="微软雅黑"/>
-                      </a:endParaRPr>
-                    </a:p>
-                  </a:txBody>
-                  <a:tcPr marL="0" marR="0" marT="0" marB="0" anchor="ctr">
-                    <a:lnL>
-                      <a:noFill/>
-                    </a:lnL>
-                    <a:lnR>
-                      <a:noFill/>
-                    </a:lnR>
-                    <a:lnT>
-                      <a:noFill/>
-                    </a:lnT>
-                    <a:lnB>
-                      <a:noFill/>
-                    </a:lnB>
-                  </a:tcPr>
-                </a:tc>
-                <a:tc>
-                  <a:txBody>
-                    <a:bodyPr wrap="square">
-                      <a:spAutoFit/>
-                    </a:bodyPr>
-                    <a:lstStyle/>
-                    <a:p>
-                      <a:pPr marL="114300" indent="0" algn="l" defTabSz="914400">
-                        <a:lnSpc>
-                          <a:spcPct val="120000"/>
-                        </a:lnSpc>
-                        <a:buNone/>
-                      </a:pPr>
-                      <a:r>
-                        <a:rPr sz="1125" b="0" i="0" u="none">
-                          <a:solidFill>
-                            <a:srgbClr val="44546A">
-                              <a:alpha val="100000"/>
-                            </a:srgbClr>
-                          </a:solidFill>
-                          <a:latin typeface="微软雅黑"/>
-                          <a:ea typeface="微软雅黑"/>
-                          <a:cs typeface="微软雅黑"/>
-                        </a:rPr>
-                        <a:t>兰晓静</a:t>
-                      </a:r>
-                      <a:endParaRPr sz="1125" b="0" i="0" u="none">
-                        <a:solidFill>
-                          <a:srgbClr val="44546A">
-                            <a:alpha val="100000"/>
-                          </a:srgbClr>
-                        </a:solidFill>
-                        <a:latin typeface="微软雅黑"/>
-                        <a:ea typeface="微软雅黑"/>
-                        <a:cs typeface="微软雅黑"/>
-                      </a:endParaRPr>
-                    </a:p>
-                  </a:txBody>
-                  <a:tcPr marL="0" marR="0" marT="0" marB="0" anchor="ctr">
-                    <a:lnL>
-                      <a:noFill/>
-                    </a:lnL>
-                    <a:lnR>
-                      <a:noFill/>
-                    </a:lnR>
-                    <a:lnT>
-                      <a:noFill/>
-                    </a:lnT>
-                    <a:lnB>
-                      <a:noFill/>
-                    </a:lnB>
-                  </a:tcPr>
-                </a:tc>
-                <a:tc>
-                  <a:txBody>
-                    <a:bodyPr wrap="square">
-                      <a:spAutoFit/>
-                    </a:bodyPr>
-                    <a:lstStyle/>
-                    <a:p>
-                      <a:pPr marL="114300" algn="l">
-                        <a:lnSpc>
-                          <a:spcPct val="120000"/>
-                        </a:lnSpc>
-                        <a:buNone/>
-                      </a:pPr>
-                      <a:r>
-                        <a:rPr sz="1125" b="0" i="0" u="none">
-                          <a:solidFill>
-                            <a:srgbClr val="44546A">
-                              <a:alpha val="100000"/>
-                            </a:srgbClr>
-                          </a:solidFill>
-                          <a:latin typeface="微软雅黑"/>
-                          <a:ea typeface="微软雅黑"/>
-                          <a:cs typeface="微软雅黑"/>
-                        </a:rPr>
-                        <a:t>项目</a:t>
-                      </a:r>
-                      <a:r>
-                        <a:rPr lang="zh-CN" altLang="en-US" sz="1125" b="0" i="0" u="none">
-                          <a:solidFill>
-                            <a:srgbClr val="44546A">
-                              <a:alpha val="100000"/>
-                            </a:srgbClr>
-                          </a:solidFill>
-                          <a:latin typeface="微软雅黑"/>
-                          <a:ea typeface="微软雅黑"/>
-                          <a:cs typeface="微软雅黑"/>
-                        </a:rPr>
-                        <a:t>全流程</a:t>
-                      </a:r>
-                      <a:r>
-                        <a:rPr sz="1125" b="0" i="0" u="none">
-                          <a:solidFill>
-                            <a:srgbClr val="44546A">
-                              <a:alpha val="100000"/>
-                            </a:srgbClr>
-                          </a:solidFill>
-                          <a:latin typeface="微软雅黑"/>
-                          <a:ea typeface="微软雅黑"/>
-                          <a:cs typeface="微软雅黑"/>
-                        </a:rPr>
-                        <a:t>运营</a:t>
-                      </a:r>
-                      <a:r>
-                        <a:rPr lang="zh-CN" altLang="en-US" sz="1125" b="0" i="0" u="none">
-                          <a:solidFill>
-                            <a:srgbClr val="44546A">
-                              <a:alpha val="100000"/>
-                            </a:srgbClr>
-                          </a:solidFill>
-                          <a:latin typeface="微软雅黑"/>
-                          <a:ea typeface="微软雅黑"/>
-                          <a:cs typeface="微软雅黑"/>
-                        </a:rPr>
-                        <a:t>管理；</a:t>
-                      </a:r>
-                      <a:r>
-                        <a:rPr sz="1125" b="0" i="0" u="none">
-                          <a:solidFill>
-                            <a:srgbClr val="44546A">
-                              <a:alpha val="100000"/>
-                            </a:srgbClr>
-                          </a:solidFill>
-                          <a:latin typeface="微软雅黑"/>
-                          <a:ea typeface="微软雅黑"/>
-                          <a:cs typeface="微软雅黑"/>
-                        </a:rPr>
-                        <a:t>财务</a:t>
-                      </a:r>
-                      <a:r>
-                        <a:rPr lang="zh-CN" altLang="en-US" sz="1125" b="0" i="0" u="none">
-                          <a:solidFill>
-                            <a:srgbClr val="44546A">
-                              <a:alpha val="100000"/>
-                            </a:srgbClr>
-                          </a:solidFill>
-                          <a:latin typeface="微软雅黑"/>
-                          <a:ea typeface="微软雅黑"/>
-                          <a:cs typeface="微软雅黑"/>
-                        </a:rPr>
-                        <a:t>统筹</a:t>
-                      </a:r>
-                      <a:r>
-                        <a:rPr sz="1125" b="0" i="0" u="none">
-                          <a:solidFill>
-                            <a:srgbClr val="44546A">
-                              <a:alpha val="100000"/>
-                            </a:srgbClr>
-                          </a:solidFill>
-                          <a:latin typeface="微软雅黑"/>
-                          <a:ea typeface="微软雅黑"/>
-                          <a:cs typeface="微软雅黑"/>
-                        </a:rPr>
-                        <a:t>与风控合规</a:t>
-                      </a:r>
-                      <a:r>
-                        <a:rPr lang="zh-CN" altLang="en-US" sz="1125" b="0" i="0" u="none">
-                          <a:solidFill>
-                            <a:srgbClr val="44546A">
-                              <a:alpha val="100000"/>
-                            </a:srgbClr>
-                          </a:solidFill>
-                          <a:latin typeface="微软雅黑"/>
-                          <a:ea typeface="微软雅黑"/>
-                          <a:cs typeface="微软雅黑"/>
-                        </a:rPr>
-                        <a:t>；</a:t>
-                      </a:r>
-                      <a:r>
-                        <a:rPr sz="1125" b="0" i="0" u="none">
-                          <a:solidFill>
-                            <a:srgbClr val="44546A">
-                              <a:alpha val="100000"/>
-                            </a:srgbClr>
-                          </a:solidFill>
-                          <a:latin typeface="微软雅黑"/>
-                          <a:ea typeface="微软雅黑"/>
-                          <a:cs typeface="微软雅黑"/>
-                        </a:rPr>
-                        <a:t>商务拓展与跨</a:t>
-                      </a:r>
-                      <a:r>
-                        <a:rPr lang="zh-CN" altLang="en-US" sz="1125" b="0" i="0" u="none">
-                          <a:solidFill>
-                            <a:srgbClr val="44546A">
-                              <a:alpha val="100000"/>
-                            </a:srgbClr>
-                          </a:solidFill>
-                          <a:latin typeface="微软雅黑"/>
-                          <a:ea typeface="微软雅黑"/>
-                          <a:cs typeface="微软雅黑"/>
-                        </a:rPr>
-                        <a:t>机构</a:t>
-                      </a:r>
-                      <a:r>
-                        <a:rPr sz="1125" b="0" i="0" u="none">
-                          <a:solidFill>
-                            <a:srgbClr val="44546A">
-                              <a:alpha val="100000"/>
-                            </a:srgbClr>
-                          </a:solidFill>
-                          <a:latin typeface="微软雅黑"/>
-                          <a:ea typeface="微软雅黑"/>
-                          <a:cs typeface="微软雅黑"/>
-                        </a:rPr>
-                        <a:t>合作</a:t>
-                      </a:r>
-                      <a:endParaRPr sz="1125" b="0" i="0" u="none">
-                        <a:solidFill>
-                          <a:srgbClr val="44546A">
-                            <a:alpha val="100000"/>
-                          </a:srgbClr>
-                        </a:solidFill>
-                        <a:latin typeface="微软雅黑"/>
-                        <a:ea typeface="微软雅黑"/>
-                        <a:cs typeface="微软雅黑"/>
-                      </a:endParaRPr>
-                    </a:p>
-                  </a:txBody>
-                  <a:tcPr marL="0" marR="0" marT="0" marB="0" anchor="ctr">
-                    <a:lnL>
-                      <a:noFill/>
-                    </a:lnL>
-                    <a:lnR>
-                      <a:noFill/>
-                    </a:lnR>
-                    <a:lnT>
-                      <a:noFill/>
-                    </a:lnT>
-                    <a:lnB>
-                      <a:noFill/>
-                    </a:lnB>
-                  </a:tcPr>
-                </a:tc>
-              </a:tr>
-            </a:tbl>
-          </a:graphicData>
-        </a:graphic>
-      </p:graphicFrame>
-      <p:sp>
-        <p:nvSpPr>
-          <p:cNvPr id="99" name="任意多边形 72"/>
-          <p:cNvSpPr>
-            <a:spLocks noGrp="1"/>
-          </p:cNvSpPr>
-          <p:nvPr/>
-        </p:nvSpPr>
-        <p:spPr>
-          <a:xfrm>
-            <a:off x="533400" y="5878286"/>
-            <a:ext cx="11125200" cy="420914"/>
-          </a:xfrm>
-          <a:custGeom>
-            <a:avLst/>
-            <a:gdLst/>
-            <a:ahLst/>
-            <a:cxnLst/>
-            <a:pathLst>
-              <a:path w="760" h="34">
-                <a:moveTo>
-                  <a:pt x="0" y="0"/>
-                </a:moveTo>
-                <a:lnTo>
-                  <a:pt x="4" y="0"/>
-                </a:lnTo>
-                <a:lnTo>
-                  <a:pt x="4" y="34"/>
-                </a:lnTo>
-                <a:lnTo>
-                  <a:pt x="0" y="34"/>
-                </a:lnTo>
-                <a:close/>
-              </a:path>
-            </a:pathLst>
-          </a:custGeom>
-          <a:solidFill>
-            <a:srgbClr val="08A6F6"/>
-          </a:solidFill>
-        </p:spPr>
-        <p:txBody>
-          <a:bodyPr/>
-          <a:lstStyle/>
-          <a:p/>
-        </p:txBody>
-      </p:sp>
-      <p:sp>
-        <p:nvSpPr>
-          <p:cNvPr id="100" name="文本框 73"/>
-          <p:cNvSpPr>
-            <a:spLocks noGrp="1"/>
-          </p:cNvSpPr>
-          <p:nvPr/>
-        </p:nvSpPr>
-        <p:spPr>
-          <a:xfrm>
-            <a:off x="723900" y="5917293"/>
-            <a:ext cx="10744200" cy="508000"/>
-          </a:xfrm>
-          <a:prstGeom prst="rect">
-            <a:avLst/>
-          </a:prstGeom>
-        </p:spPr>
-        <p:txBody>
-          <a:bodyPr wrap="none" lIns="0" tIns="0" rIns="0" bIns="0"/>
-          <a:lstStyle/>
-          <a:p>
-            <a:pPr>
-              <a:lnSpc>
-                <a:spcPct val="145000"/>
-              </a:lnSpc>
-              <a:buNone/>
-            </a:pPr>
-            <a:r>
-              <a:rPr sz="1275" b="1">
-                <a:solidFill>
-                  <a:srgbClr val="061F32"/>
-                </a:solidFill>
-                <a:latin typeface="微软雅黑"/>
-                <a:ea typeface="微软雅黑"/>
-                <a:cs typeface="微软雅黑"/>
-              </a:rPr>
-              <a:t>患者采样、类器官建立、数据</a:t>
-            </a:r>
-            <a:r>
-              <a:rPr sz="1275" b="1">
-                <a:solidFill>
-                  <a:srgbClr val="061F32"/>
-                </a:solidFill>
-                <a:latin typeface="微软雅黑" charset="0"/>
-                <a:ea typeface="微软雅黑" charset="0"/>
-                <a:cs typeface="微软雅黑" charset="0"/>
-              </a:rPr>
-              <a:t>构建</a:t>
-            </a:r>
-            <a:r>
-              <a:rPr sz="1275" b="1">
-                <a:solidFill>
-                  <a:srgbClr val="061F32"/>
-                </a:solidFill>
-                <a:latin typeface="微软雅黑"/>
-                <a:ea typeface="微软雅黑"/>
-                <a:cs typeface="微软雅黑"/>
-              </a:rPr>
-              <a:t>、模型迭代、前瞻</a:t>
-            </a:r>
-            <a:r>
-              <a:rPr lang="zh-CN" altLang="en-US" sz="1275" b="1">
-                <a:solidFill>
-                  <a:srgbClr val="061F32"/>
-                </a:solidFill>
-                <a:latin typeface="微软雅黑"/>
-                <a:ea typeface="微软雅黑"/>
-                <a:cs typeface="微软雅黑"/>
-              </a:rPr>
-              <a:t>性</a:t>
-            </a:r>
-            <a:r>
-              <a:rPr sz="1275" b="1">
-                <a:solidFill>
-                  <a:srgbClr val="061F32"/>
-                </a:solidFill>
-                <a:latin typeface="微软雅黑"/>
-                <a:ea typeface="微软雅黑"/>
-                <a:cs typeface="微软雅黑"/>
-              </a:rPr>
-              <a:t>验证——数据飞轮</a:t>
-            </a:r>
-            <a:r>
-              <a:rPr lang="zh-CN" altLang="en-US" sz="1275" b="1">
-                <a:solidFill>
-                  <a:srgbClr val="061F32"/>
-                </a:solidFill>
-                <a:latin typeface="微软雅黑"/>
-                <a:ea typeface="微软雅黑"/>
-                <a:cs typeface="微软雅黑"/>
-              </a:rPr>
-              <a:t>完整链路均可在</a:t>
-            </a:r>
-            <a:r>
-              <a:rPr sz="1275" b="1">
-                <a:solidFill>
-                  <a:srgbClr val="061F32"/>
-                </a:solidFill>
-                <a:latin typeface="微软雅黑"/>
-                <a:ea typeface="微软雅黑"/>
-                <a:cs typeface="微软雅黑"/>
-              </a:rPr>
-              <a:t>团队内部闭环</a:t>
-            </a:r>
-            <a:r>
-              <a:rPr lang="zh-CN" altLang="en-US" sz="1275" b="1">
-                <a:solidFill>
-                  <a:srgbClr val="061F32"/>
-                </a:solidFill>
-                <a:latin typeface="微软雅黑"/>
-                <a:ea typeface="微软雅黑"/>
-                <a:cs typeface="微软雅黑"/>
-              </a:rPr>
-              <a:t>运行。</a:t>
-            </a:r>
-            <a:endParaRPr sz="1275" b="1">
-              <a:solidFill>
-                <a:srgbClr val="061F32"/>
-              </a:solidFill>
-              <a:latin typeface="微软雅黑"/>
-              <a:ea typeface="微软雅黑"/>
-              <a:cs typeface="微软雅黑"/>
-            </a:endParaRPr>
+              <a:t>兰晓静</a:t>
+            </a:r>
+          </a:p>
+        </p:txBody>
+      </p:sp>
+      <p:sp>
+        <p:nvSpPr>
+          <p:cNvPr id="315" name="职位 4"/>
+          <p:cNvSpPr txBox="1"/>
+          <p:nvPr/>
+        </p:nvSpPr>
+        <p:spPr>
+          <a:xfrm>
+            <a:off x="9082278" y="2999232"/>
+            <a:ext cx="2576322" cy="292608"/>
+          </a:xfrm>
+          <a:prstGeom prst="rect">
+            <a:avLst/>
+          </a:prstGeom>
+          <a:noFill/>
+        </p:spPr>
+        <p:txBody>
+          <a:bodyPr wrap="square" lIns="0" tIns="0" rIns="0" bIns="0" anchor="ctr">
+            <a:noAutofit/>
+          </a:bodyPr>
+          <a:lstStyle/>
+          <a:p>
+            <a:pPr algn="ctr">
+              <a:lnSpc>
+                <a:spcPct val="115000"/>
+              </a:lnSpc>
+              <a:buNone/>
+            </a:pPr>
+            <a:r>
+              <a:rPr lang="zh-CN" altLang="en-US" sz="1300" b="1">
+                <a:solidFill>
+                  <a:srgbClr val="08A6F6"/>
+                </a:solidFill>
+                <a:latin typeface="微软雅黑"/>
+                <a:ea typeface="微软雅黑"/>
+                <a:cs typeface="微软雅黑"/>
+              </a:rPr>
+              <a:t>COO 首席运营官</a:t>
+            </a:r>
+          </a:p>
+        </p:txBody>
+      </p:sp>
+      <p:sp>
+        <p:nvSpPr>
+          <p:cNvPr id="316" name="经历 4"/>
+          <p:cNvSpPr txBox="1"/>
+          <p:nvPr/>
+        </p:nvSpPr>
+        <p:spPr>
+          <a:xfrm>
+            <a:off x="9173718" y="3474720"/>
+            <a:ext cx="2439162" cy="2788920"/>
+          </a:xfrm>
+          <a:prstGeom prst="rect">
+            <a:avLst/>
+          </a:prstGeom>
+          <a:noFill/>
+        </p:spPr>
+        <p:txBody>
+          <a:bodyPr wrap="square" lIns="0" tIns="0" rIns="0" bIns="0" anchor="t">
+            <a:noAutofit/>
+          </a:bodyPr>
+          <a:lstStyle/>
+          <a:p>
+            <a:pPr algn="l" marL="171450" indent="-171450">
+              <a:lnSpc>
+                <a:spcPct val="115000"/>
+              </a:lnSpc>
+              <a:spcAft>
+                <a:spcPts val="400"/>
+              </a:spcAft>
+              <a:buClr>
+                <a:srgbClr val="08A6F6"/>
+              </a:buClr>
+              <a:buFont typeface="Arial"/>
+              <a:buChar char="•"/>
+            </a:pPr>
+            <a:r>
+              <a:rPr lang="zh-CN" altLang="en-US" sz="1100">
+                <a:solidFill>
+                  <a:srgbClr val="44546A"/>
+                </a:solidFill>
+                <a:latin typeface="微软雅黑"/>
+                <a:ea typeface="微软雅黑"/>
+                <a:cs typeface="微软雅黑"/>
+              </a:rPr>
+              <a:t>海德堡大学经济学硕士</a:t>
+            </a:r>
+          </a:p>
+          <a:p>
+            <a:pPr algn="l" marL="171450" indent="-171450">
+              <a:lnSpc>
+                <a:spcPct val="115000"/>
+              </a:lnSpc>
+              <a:spcAft>
+                <a:spcPts val="400"/>
+              </a:spcAft>
+              <a:buClr>
+                <a:srgbClr val="08A6F6"/>
+              </a:buClr>
+              <a:buFont typeface="Arial"/>
+              <a:buChar char="•"/>
+            </a:pPr>
+            <a:r>
+              <a:rPr lang="zh-CN" altLang="en-US" sz="1100">
+                <a:solidFill>
+                  <a:srgbClr val="44546A"/>
+                </a:solidFill>
+                <a:latin typeface="微软雅黑"/>
+                <a:ea typeface="微软雅黑"/>
+                <a:cs typeface="微软雅黑"/>
+              </a:rPr>
+              <a:t>浙江大学管理学学士（竺可桢学院创业与创新管理强化班）</a:t>
+            </a:r>
+          </a:p>
+          <a:p>
+            <a:pPr algn="l" marL="171450" indent="-171450">
+              <a:lnSpc>
+                <a:spcPct val="115000"/>
+              </a:lnSpc>
+              <a:spcAft>
+                <a:spcPts val="400"/>
+              </a:spcAft>
+              <a:buClr>
+                <a:srgbClr val="08A6F6"/>
+              </a:buClr>
+              <a:buFont typeface="Arial"/>
+              <a:buChar char="•"/>
+            </a:pPr>
+            <a:r>
+              <a:rPr lang="zh-CN" altLang="en-US" sz="1100">
+                <a:solidFill>
+                  <a:srgbClr val="44546A"/>
+                </a:solidFill>
+                <a:latin typeface="微软雅黑"/>
+                <a:ea typeface="微软雅黑"/>
+                <a:cs typeface="微软雅黑"/>
+              </a:rPr>
+              <a:t>FRM 持证人</a:t>
+            </a:r>
+          </a:p>
+          <a:p>
+            <a:pPr algn="l" marL="171450" indent="-171450">
+              <a:lnSpc>
+                <a:spcPct val="115000"/>
+              </a:lnSpc>
+              <a:spcAft>
+                <a:spcPts val="400"/>
+              </a:spcAft>
+              <a:buClr>
+                <a:srgbClr val="08A6F6"/>
+              </a:buClr>
+              <a:buFont typeface="Arial"/>
+              <a:buChar char="•"/>
+            </a:pPr>
+            <a:r>
+              <a:rPr lang="zh-CN" altLang="en-US" sz="1100">
+                <a:solidFill>
+                  <a:srgbClr val="44546A"/>
+                </a:solidFill>
+                <a:latin typeface="微软雅黑"/>
+                <a:ea typeface="微软雅黑"/>
+                <a:cs typeface="微软雅黑"/>
+              </a:rPr>
+              <a:t>多年国际金融机构风控合规与跨境尽调经验</a:t>
+            </a:r>
+          </a:p>
+          <a:p>
+            <a:pPr algn="l" marL="171450" indent="-171450">
+              <a:lnSpc>
+                <a:spcPct val="115000"/>
+              </a:lnSpc>
+              <a:spcAft>
+                <a:spcPts val="400"/>
+              </a:spcAft>
+              <a:buClr>
+                <a:srgbClr val="08A6F6"/>
+              </a:buClr>
+              <a:buFont typeface="Arial"/>
+              <a:buChar char="•"/>
+            </a:pPr>
+            <a:r>
+              <a:rPr lang="zh-CN" altLang="en-US" sz="1100">
+                <a:solidFill>
+                  <a:srgbClr val="44546A"/>
+                </a:solidFill>
+                <a:latin typeface="微软雅黑"/>
+                <a:ea typeface="微软雅黑"/>
+                <a:cs typeface="微软雅黑"/>
+              </a:rPr>
+              <a:t>精通跨境财务统筹、合规体系搭建与硬科技项目运营</a:t>
+            </a:r>
           </a:p>
         </p:txBody>
       </p:sp>
@@ -3696,7 +2936,7 @@
                 <a:ea typeface="微软雅黑"/>
                 <a:cs typeface="微软雅黑"/>
               </a:rPr>
-              <a:t>Source: AIVC 商业故事 BP §5</a:t>
+              <a:t>Source: 团队成员简历</a:t>
             </a:r>
             <a:endParaRPr sz="1050">
               <a:solidFill>
@@ -3746,6 +2986,1249 @@
                 <a:cs typeface="微软雅黑"/>
               </a:rPr>
               <a:t>08 / 08</a:t>
+            </a:r>
+            <a:endParaRPr sz="1050">
+              <a:solidFill>
+                <a:srgbClr val="808080"/>
+              </a:solidFill>
+              <a:latin typeface="微软雅黑"/>
+              <a:ea typeface="微软雅黑"/>
+              <a:cs typeface="微软雅黑"/>
+            </a:endParaRPr>
+          </a:p>
+        </p:txBody>
+      </p:sp>
+    </p:spTree>
+  </p:cSld>
+  <p:clrMapOvr>
+    <a:masterClrMapping/>
+  </p:clrMapOvr>
+</p:sld>
+</file>
+
+<file path=ppt/slides/slide19.xml><?xml version="1.0" encoding="utf-8"?>
+<p:sld xmlns:a="http://schemas.openxmlformats.org/drawingml/2006/main" xmlns:r="http://schemas.openxmlformats.org/officeDocument/2006/relationships" xmlns:p="http://schemas.openxmlformats.org/presentationml/2006/main">
+  <p:cSld>
+    <p:spTree>
+      <p:nvGrpSpPr>
+        <p:cNvPr id="1" name=""/>
+        <p:cNvGrpSpPr/>
+        <p:nvPr/>
+      </p:nvGrpSpPr>
+      <p:grpSpPr/>
+      <p:sp>
+        <p:nvSpPr>
+          <p:cNvPr id="266" name="矩形 228"/>
+          <p:cNvSpPr>
+            <a:spLocks noGrp="1"/>
+          </p:cNvSpPr>
+          <p:nvPr/>
+        </p:nvSpPr>
+        <p:spPr>
+          <a:xfrm>
+            <a:off x="0" y="0"/>
+            <a:ext cx="12192000" cy="6858000"/>
+          </a:xfrm>
+          <a:prstGeom prst="rect">
+            <a:avLst/>
+          </a:prstGeom>
+          <a:solidFill>
+            <a:srgbClr val="FFFFFF"/>
+          </a:solidFill>
+        </p:spPr>
+        <p:txBody>
+          <a:bodyPr/>
+          <a:lstStyle/>
+          <a:p/>
+        </p:txBody>
+      </p:sp>
+      <p:sp>
+        <p:nvSpPr>
+          <p:cNvPr id="267" name="文本框 229"/>
+          <p:cNvSpPr>
+            <a:spLocks noGrp="1"/>
+          </p:cNvSpPr>
+          <p:nvPr/>
+        </p:nvSpPr>
+        <p:spPr>
+          <a:xfrm>
+            <a:off x="533400" y="419100"/>
+            <a:ext cx="11125200" cy="381000"/>
+          </a:xfrm>
+          <a:prstGeom prst="rect">
+            <a:avLst/>
+          </a:prstGeom>
+        </p:spPr>
+        <p:txBody>
+          <a:bodyPr wrap="none" lIns="0" tIns="0" rIns="0" bIns="0"/>
+          <a:lstStyle/>
+          <a:p>
+            <a:pPr>
+              <a:lnSpc>
+                <a:spcPct val="100000"/>
+              </a:lnSpc>
+              <a:buNone/>
+            </a:pPr>
+            <a:r>
+              <a:rPr sz="2475" b="1">
+                <a:solidFill>
+                  <a:srgbClr val="061F32"/>
+                </a:solidFill>
+                <a:latin typeface="微软雅黑"/>
+                <a:ea typeface="微软雅黑"/>
+                <a:cs typeface="微软雅黑"/>
+              </a:rPr>
+              <a:t>临床痛点：治疗选择缺少及时、患者特异性的功能证据</a:t>
+            </a:r>
+            <a:endParaRPr sz="2475" b="1">
+              <a:solidFill>
+                <a:srgbClr val="061F32"/>
+              </a:solidFill>
+              <a:latin typeface="微软雅黑"/>
+              <a:ea typeface="微软雅黑"/>
+              <a:cs typeface="微软雅黑"/>
+            </a:endParaRPr>
+          </a:p>
+        </p:txBody>
+      </p:sp>
+      <p:sp>
+        <p:nvSpPr>
+          <p:cNvPr id="268" name="矩形 230"/>
+          <p:cNvSpPr>
+            <a:spLocks noGrp="1"/>
+          </p:cNvSpPr>
+          <p:nvPr/>
+        </p:nvSpPr>
+        <p:spPr>
+          <a:xfrm>
+            <a:off x="533400" y="895350"/>
+            <a:ext cx="11125200" cy="9525"/>
+          </a:xfrm>
+          <a:prstGeom prst="rect">
+            <a:avLst/>
+          </a:prstGeom>
+          <a:solidFill>
+            <a:srgbClr val="061F32"/>
+          </a:solidFill>
+        </p:spPr>
+        <p:txBody>
+          <a:bodyPr/>
+          <a:lstStyle/>
+          <a:p/>
+        </p:txBody>
+      </p:sp>
+      <p:sp>
+        <p:nvSpPr>
+          <p:cNvPr id="269" name="任意多边形 231"/>
+          <p:cNvSpPr>
+            <a:spLocks noGrp="1"/>
+          </p:cNvSpPr>
+          <p:nvPr/>
+        </p:nvSpPr>
+        <p:spPr>
+          <a:xfrm>
+            <a:off x="533400" y="1019175"/>
+            <a:ext cx="3543300" cy="1809750"/>
+          </a:xfrm>
+          <a:custGeom>
+            <a:avLst/>
+            <a:gdLst/>
+            <a:ahLst/>
+            <a:cxnLst/>
+            <a:pathLst>
+              <a:path w="372" h="190">
+                <a:moveTo>
+                  <a:pt x="0" y="0"/>
+                </a:moveTo>
+                <a:lnTo>
+                  <a:pt x="4" y="0"/>
+                </a:lnTo>
+                <a:lnTo>
+                  <a:pt x="4" y="190"/>
+                </a:lnTo>
+                <a:lnTo>
+                  <a:pt x="0" y="190"/>
+                </a:lnTo>
+                <a:close/>
+              </a:path>
+            </a:pathLst>
+          </a:custGeom>
+          <a:solidFill>
+            <a:srgbClr val="061F32"/>
+          </a:solidFill>
+        </p:spPr>
+        <p:txBody>
+          <a:bodyPr/>
+          <a:lstStyle/>
+          <a:p/>
+        </p:txBody>
+      </p:sp>
+      <p:sp>
+        <p:nvSpPr>
+          <p:cNvPr id="270" name="文本框 232"/>
+          <p:cNvSpPr>
+            <a:spLocks noGrp="1"/>
+          </p:cNvSpPr>
+          <p:nvPr/>
+        </p:nvSpPr>
+        <p:spPr>
+          <a:xfrm>
+            <a:off x="800100" y="1190625"/>
+            <a:ext cx="3238500" cy="1009650"/>
+          </a:xfrm>
+          <a:prstGeom prst="rect">
+            <a:avLst/>
+          </a:prstGeom>
+        </p:spPr>
+        <p:txBody>
+          <a:bodyPr wrap="none" lIns="0" tIns="0" rIns="0" bIns="0"/>
+          <a:lstStyle/>
+          <a:p>
+            <a:pPr>
+              <a:lnSpc>
+                <a:spcPct val="100000"/>
+              </a:lnSpc>
+              <a:buNone/>
+            </a:pPr>
+            <a:r>
+              <a:rPr sz="6600" b="1">
+                <a:solidFill>
+                  <a:srgbClr val="061F32"/>
+                </a:solidFill>
+                <a:latin typeface="微软雅黑"/>
+                <a:ea typeface="微软雅黑"/>
+                <a:cs typeface="微软雅黑"/>
+              </a:rPr>
+              <a:t>静态</a:t>
+            </a:r>
+            <a:r>
+              <a:rPr sz="3000" b="1">
+                <a:solidFill>
+                  <a:srgbClr val="08A6F6"/>
+                </a:solidFill>
+                <a:latin typeface="微软雅黑"/>
+                <a:ea typeface="微软雅黑"/>
+                <a:cs typeface="微软雅黑"/>
+              </a:rPr>
+              <a:t/>
+            </a:r>
+            <a:r>
+              <a:rPr sz="3000" b="1">
+                <a:solidFill>
+                  <a:srgbClr val="08A6F6"/>
+                </a:solidFill>
+                <a:latin typeface="微软雅黑"/>
+                <a:ea typeface="微软雅黑"/>
+                <a:cs typeface="微软雅黑"/>
+              </a:rPr>
+              <a:t> 证据</a:t>
+            </a:r>
+            <a:endParaRPr sz="3000" b="1">
+              <a:solidFill>
+                <a:srgbClr val="08A6F6"/>
+              </a:solidFill>
+              <a:latin typeface="微软雅黑"/>
+              <a:ea typeface="微软雅黑"/>
+              <a:cs typeface="微软雅黑"/>
+            </a:endParaRPr>
+          </a:p>
+        </p:txBody>
+      </p:sp>
+      <p:sp>
+        <p:nvSpPr>
+          <p:cNvPr id="271" name="文本框 233"/>
+          <p:cNvSpPr>
+            <a:spLocks noGrp="1"/>
+          </p:cNvSpPr>
+          <p:nvPr/>
+        </p:nvSpPr>
+        <p:spPr>
+          <a:xfrm>
+            <a:off x="800100" y="2333625"/>
+            <a:ext cx="3238500" cy="323850"/>
+          </a:xfrm>
+          <a:prstGeom prst="rect">
+            <a:avLst/>
+          </a:prstGeom>
+        </p:spPr>
+        <p:txBody>
+          <a:bodyPr wrap="none" lIns="0" tIns="0" rIns="0" bIns="0"/>
+          <a:lstStyle/>
+          <a:p>
+            <a:pPr>
+              <a:lnSpc>
+                <a:spcPct val="140000"/>
+              </a:lnSpc>
+              <a:buNone/>
+            </a:pPr>
+            <a:r>
+              <a:rPr sz="1500">
+                <a:solidFill>
+                  <a:srgbClr val="44546A"/>
+                </a:solidFill>
+                <a:latin typeface="微软雅黑"/>
+                <a:ea typeface="微软雅黑"/>
+                <a:cs typeface="微软雅黑"/>
+              </a:rPr>
+              <a:t>单次检测只是采样那一刻的快照</a:t>
+            </a:r>
+            <a:endParaRPr sz="1500">
+              <a:solidFill>
+                <a:srgbClr val="44546A"/>
+              </a:solidFill>
+              <a:latin typeface="微软雅黑"/>
+              <a:ea typeface="微软雅黑"/>
+              <a:cs typeface="微软雅黑"/>
+            </a:endParaRPr>
+          </a:p>
+        </p:txBody>
+      </p:sp>
+      <p:sp>
+        <p:nvSpPr>
+          <p:cNvPr id="272" name="任意多边形 234"/>
+          <p:cNvSpPr>
+            <a:spLocks noGrp="1"/>
+          </p:cNvSpPr>
+          <p:nvPr/>
+        </p:nvSpPr>
+        <p:spPr>
+          <a:xfrm>
+            <a:off x="4343400" y="1019175"/>
+            <a:ext cx="3543300" cy="1809750"/>
+          </a:xfrm>
+          <a:custGeom>
+            <a:avLst/>
+            <a:gdLst/>
+            <a:ahLst/>
+            <a:cxnLst/>
+            <a:pathLst>
+              <a:path w="372" h="190">
+                <a:moveTo>
+                  <a:pt x="0" y="0"/>
+                </a:moveTo>
+                <a:lnTo>
+                  <a:pt x="4" y="0"/>
+                </a:lnTo>
+                <a:lnTo>
+                  <a:pt x="4" y="190"/>
+                </a:lnTo>
+                <a:lnTo>
+                  <a:pt x="0" y="190"/>
+                </a:lnTo>
+                <a:close/>
+              </a:path>
+            </a:pathLst>
+          </a:custGeom>
+          <a:solidFill>
+            <a:srgbClr val="061F32"/>
+          </a:solidFill>
+        </p:spPr>
+        <p:txBody>
+          <a:bodyPr/>
+          <a:lstStyle/>
+          <a:p/>
+        </p:txBody>
+      </p:sp>
+      <p:sp>
+        <p:nvSpPr>
+          <p:cNvPr id="273" name="文本框 235"/>
+          <p:cNvSpPr>
+            <a:spLocks noGrp="1"/>
+          </p:cNvSpPr>
+          <p:nvPr/>
+        </p:nvSpPr>
+        <p:spPr>
+          <a:xfrm>
+            <a:off x="4610100" y="1190625"/>
+            <a:ext cx="3238500" cy="1009650"/>
+          </a:xfrm>
+          <a:prstGeom prst="rect">
+            <a:avLst/>
+          </a:prstGeom>
+        </p:spPr>
+        <p:txBody>
+          <a:bodyPr wrap="none" lIns="0" tIns="0" rIns="0" bIns="0"/>
+          <a:lstStyle/>
+          <a:p>
+            <a:pPr>
+              <a:lnSpc>
+                <a:spcPct val="100000"/>
+              </a:lnSpc>
+              <a:buNone/>
+            </a:pPr>
+            <a:r>
+              <a:rPr sz="6600" b="1">
+                <a:solidFill>
+                  <a:srgbClr val="061F32"/>
+                </a:solidFill>
+                <a:latin typeface="微软雅黑"/>
+                <a:ea typeface="微软雅黑"/>
+                <a:cs typeface="微软雅黑"/>
+              </a:rPr>
+              <a:t>滞后</a:t>
+            </a:r>
+            <a:r>
+              <a:rPr sz="3000" b="1">
+                <a:solidFill>
+                  <a:srgbClr val="08A6F6"/>
+                </a:solidFill>
+                <a:latin typeface="微软雅黑"/>
+                <a:ea typeface="微软雅黑"/>
+                <a:cs typeface="微软雅黑"/>
+              </a:rPr>
+              <a:t/>
+            </a:r>
+            <a:r>
+              <a:rPr sz="3000" b="1">
+                <a:solidFill>
+                  <a:srgbClr val="08A6F6"/>
+                </a:solidFill>
+                <a:latin typeface="微软雅黑"/>
+                <a:ea typeface="微软雅黑"/>
+                <a:cs typeface="微软雅黑"/>
+              </a:rPr>
+              <a:t> 反馈</a:t>
+            </a:r>
+            <a:r>
+              <a:rPr sz="3000" b="1">
+                <a:solidFill>
+                  <a:srgbClr val="08A6F6"/>
+                </a:solidFill>
+                <a:latin typeface="微软雅黑"/>
+                <a:ea typeface="微软雅黑"/>
+                <a:cs typeface="微软雅黑"/>
+              </a:rPr>
+              <a:t/>
+            </a:r>
+            <a:endParaRPr sz="3000" b="1">
+              <a:solidFill>
+                <a:srgbClr val="08A6F6"/>
+              </a:solidFill>
+              <a:latin typeface="微软雅黑"/>
+              <a:ea typeface="微软雅黑"/>
+              <a:cs typeface="微软雅黑"/>
+            </a:endParaRPr>
+          </a:p>
+        </p:txBody>
+      </p:sp>
+      <p:sp>
+        <p:nvSpPr>
+          <p:cNvPr id="274" name="文本框 236"/>
+          <p:cNvSpPr>
+            <a:spLocks noGrp="1"/>
+          </p:cNvSpPr>
+          <p:nvPr/>
+        </p:nvSpPr>
+        <p:spPr>
+          <a:xfrm>
+            <a:off x="4610100" y="2333625"/>
+            <a:ext cx="3238500" cy="323850"/>
+          </a:xfrm>
+          <a:prstGeom prst="rect">
+            <a:avLst/>
+          </a:prstGeom>
+        </p:spPr>
+        <p:txBody>
+          <a:bodyPr wrap="none" lIns="0" tIns="0" rIns="0" bIns="0"/>
+          <a:lstStyle/>
+          <a:p>
+            <a:pPr>
+              <a:lnSpc>
+                <a:spcPct val="140000"/>
+              </a:lnSpc>
+              <a:buNone/>
+            </a:pPr>
+            <a:r>
+              <a:rPr sz="1500">
+                <a:solidFill>
+                  <a:srgbClr val="44546A"/>
+                </a:solidFill>
+                <a:latin typeface="微软雅黑"/>
+                <a:ea typeface="微软雅黑"/>
+                <a:cs typeface="微软雅黑"/>
+              </a:rPr>
+              <a:t>治疗失败后才知道耐药已发生</a:t>
+            </a:r>
+            <a:endParaRPr sz="1500">
+              <a:solidFill>
+                <a:srgbClr val="44546A"/>
+              </a:solidFill>
+              <a:latin typeface="微软雅黑"/>
+              <a:ea typeface="微软雅黑"/>
+              <a:cs typeface="微软雅黑"/>
+            </a:endParaRPr>
+          </a:p>
+        </p:txBody>
+      </p:sp>
+      <p:sp>
+        <p:nvSpPr>
+          <p:cNvPr id="275" name="任意多边形 237"/>
+          <p:cNvSpPr>
+            <a:spLocks noGrp="1"/>
+          </p:cNvSpPr>
+          <p:nvPr/>
+        </p:nvSpPr>
+        <p:spPr>
+          <a:xfrm>
+            <a:off x="8153400" y="1019175"/>
+            <a:ext cx="3543300" cy="1809750"/>
+          </a:xfrm>
+          <a:custGeom>
+            <a:avLst/>
+            <a:gdLst/>
+            <a:ahLst/>
+            <a:cxnLst/>
+            <a:pathLst>
+              <a:path w="372" h="190">
+                <a:moveTo>
+                  <a:pt x="0" y="0"/>
+                </a:moveTo>
+                <a:lnTo>
+                  <a:pt x="4" y="0"/>
+                </a:lnTo>
+                <a:lnTo>
+                  <a:pt x="4" y="190"/>
+                </a:lnTo>
+                <a:lnTo>
+                  <a:pt x="0" y="190"/>
+                </a:lnTo>
+                <a:close/>
+              </a:path>
+            </a:pathLst>
+          </a:custGeom>
+          <a:solidFill>
+            <a:srgbClr val="5A0E13"/>
+          </a:solidFill>
+        </p:spPr>
+        <p:txBody>
+          <a:bodyPr/>
+          <a:lstStyle/>
+          <a:p/>
+        </p:txBody>
+      </p:sp>
+      <p:sp>
+        <p:nvSpPr>
+          <p:cNvPr id="276" name="文本框 238"/>
+          <p:cNvSpPr>
+            <a:spLocks noGrp="1"/>
+          </p:cNvSpPr>
+          <p:nvPr/>
+        </p:nvSpPr>
+        <p:spPr>
+          <a:xfrm>
+            <a:off x="8420100" y="1028700"/>
+            <a:ext cx="3238500" cy="1009650"/>
+          </a:xfrm>
+          <a:prstGeom prst="rect">
+            <a:avLst/>
+          </a:prstGeom>
+        </p:spPr>
+        <p:txBody>
+          <a:bodyPr wrap="none" lIns="0" tIns="0" rIns="0" bIns="0"/>
+          <a:lstStyle/>
+          <a:p>
+            <a:pPr>
+              <a:lnSpc>
+                <a:spcPct val="100000"/>
+              </a:lnSpc>
+              <a:buNone/>
+            </a:pPr>
+            <a:r>
+              <a:rPr sz="6600" b="1">
+                <a:solidFill>
+                  <a:srgbClr val="5A0E13"/>
+                </a:solidFill>
+                <a:latin typeface="微软雅黑"/>
+                <a:ea typeface="微软雅黑"/>
+                <a:cs typeface="微软雅黑"/>
+              </a:rPr>
+              <a:t>割裂</a:t>
+            </a:r>
+            <a:endParaRPr sz="6600" b="1">
+              <a:solidFill>
+                <a:srgbClr val="5A0E13"/>
+              </a:solidFill>
+              <a:latin typeface="微软雅黑"/>
+              <a:ea typeface="微软雅黑"/>
+              <a:cs typeface="微软雅黑"/>
+            </a:endParaRPr>
+          </a:p>
+        </p:txBody>
+      </p:sp>
+      <p:sp>
+        <p:nvSpPr>
+          <p:cNvPr id="277" name="文本框 239"/>
+          <p:cNvSpPr>
+            <a:spLocks noGrp="1"/>
+          </p:cNvSpPr>
+          <p:nvPr/>
+        </p:nvSpPr>
+        <p:spPr>
+          <a:xfrm>
+            <a:off x="8420100" y="2171700"/>
+            <a:ext cx="3238500" cy="647700"/>
+          </a:xfrm>
+          <a:prstGeom prst="rect">
+            <a:avLst/>
+          </a:prstGeom>
+        </p:spPr>
+        <p:txBody>
+          <a:bodyPr wrap="square" lIns="0" tIns="0" rIns="0" bIns="0">
+            <a:normAutofit/>
+          </a:bodyPr>
+          <a:lstStyle/>
+          <a:p>
+            <a:pPr>
+              <a:lnSpc>
+                <a:spcPct val="140000"/>
+              </a:lnSpc>
+              <a:buNone/>
+            </a:pPr>
+            <a:r>
+              <a:rPr sz="1500">
+                <a:solidFill>
+                  <a:srgbClr val="44546A"/>
+                </a:solidFill>
+                <a:latin typeface="微软雅黑"/>
+                <a:ea typeface="微软雅黑"/>
+                <a:cs typeface="微软雅黑"/>
+              </a:rPr>
+              <a:t>药筛止于「敏感性」，未转化为纵向校准的患者预测</a:t>
+            </a:r>
+            <a:endParaRPr sz="1500">
+              <a:solidFill>
+                <a:srgbClr val="44546A"/>
+              </a:solidFill>
+              <a:latin typeface="微软雅黑"/>
+              <a:ea typeface="微软雅黑"/>
+              <a:cs typeface="微软雅黑"/>
+            </a:endParaRPr>
+          </a:p>
+        </p:txBody>
+      </p:sp>
+      <p:sp>
+        <p:nvSpPr>
+          <p:cNvPr id="278" name="矩形 240"/>
+          <p:cNvSpPr>
+            <a:spLocks noGrp="1"/>
+          </p:cNvSpPr>
+          <p:nvPr/>
+        </p:nvSpPr>
+        <p:spPr>
+          <a:xfrm>
+            <a:off x="533400" y="3038475"/>
+            <a:ext cx="11125200" cy="1257300"/>
+          </a:xfrm>
+          <a:prstGeom prst="rect">
+            <a:avLst/>
+          </a:prstGeom>
+          <a:solidFill>
+            <a:srgbClr val="F5F5F5"/>
+          </a:solidFill>
+        </p:spPr>
+        <p:txBody>
+          <a:bodyPr/>
+          <a:lstStyle/>
+          <a:p/>
+        </p:txBody>
+      </p:sp>
+      <p:sp>
+        <p:nvSpPr>
+          <p:cNvPr id="279" name="文本框 241"/>
+          <p:cNvSpPr>
+            <a:spLocks noGrp="1"/>
+          </p:cNvSpPr>
+          <p:nvPr/>
+        </p:nvSpPr>
+        <p:spPr>
+          <a:xfrm>
+            <a:off x="800100" y="3248025"/>
+            <a:ext cx="10591800" cy="209550"/>
+          </a:xfrm>
+          <a:prstGeom prst="rect">
+            <a:avLst/>
+          </a:prstGeom>
+        </p:spPr>
+        <p:txBody>
+          <a:bodyPr wrap="none" lIns="0" tIns="0" rIns="0" bIns="0"/>
+          <a:lstStyle/>
+          <a:p>
+            <a:pPr>
+              <a:lnSpc>
+                <a:spcPct val="100000"/>
+              </a:lnSpc>
+              <a:buNone/>
+            </a:pPr>
+            <a:r>
+              <a:rPr sz="1350">
+                <a:solidFill>
+                  <a:srgbClr val="44546A"/>
+                </a:solidFill>
+                <a:latin typeface="微软雅黑"/>
+                <a:ea typeface="微软雅黑"/>
+                <a:cs typeface="微软雅黑"/>
+              </a:rPr>
+              <a:t>结果：治疗方案只能凭经验选择，答案要等到下一次复查才揭晓：</a:t>
+            </a:r>
+            <a:endParaRPr sz="1350">
+              <a:solidFill>
+                <a:srgbClr val="44546A"/>
+              </a:solidFill>
+              <a:latin typeface="微软雅黑"/>
+              <a:ea typeface="微软雅黑"/>
+              <a:cs typeface="微软雅黑"/>
+            </a:endParaRPr>
+          </a:p>
+        </p:txBody>
+      </p:sp>
+      <p:sp>
+        <p:nvSpPr>
+          <p:cNvPr id="280" name="矩形 242"/>
+          <p:cNvSpPr>
+            <a:spLocks noGrp="1"/>
+          </p:cNvSpPr>
+          <p:nvPr/>
+        </p:nvSpPr>
+        <p:spPr>
+          <a:xfrm>
+            <a:off x="800100" y="3590925"/>
+            <a:ext cx="2952750" cy="495300"/>
+          </a:xfrm>
+          <a:prstGeom prst="rect">
+            <a:avLst/>
+          </a:prstGeom>
+          <a:solidFill>
+            <a:srgbClr val="FFFFFF"/>
+          </a:solidFill>
+          <a:ln w="12700">
+            <a:solidFill>
+              <a:srgbClr val="E7E6E6"/>
+            </a:solidFill>
+            <a:prstDash val="solid"/>
+          </a:ln>
+        </p:spPr>
+        <p:txBody>
+          <a:bodyPr/>
+          <a:lstStyle/>
+          <a:p/>
+        </p:txBody>
+      </p:sp>
+      <p:sp>
+        <p:nvSpPr>
+          <p:cNvPr id="281" name="文本框 243"/>
+          <p:cNvSpPr>
+            <a:spLocks noGrp="1"/>
+          </p:cNvSpPr>
+          <p:nvPr/>
+        </p:nvSpPr>
+        <p:spPr>
+          <a:xfrm>
+            <a:off x="971550" y="3724275"/>
+            <a:ext cx="2609850" cy="228600"/>
+          </a:xfrm>
+          <a:prstGeom prst="rect">
+            <a:avLst/>
+          </a:prstGeom>
+        </p:spPr>
+        <p:txBody>
+          <a:bodyPr wrap="none" lIns="0" tIns="0" rIns="0" bIns="0"/>
+          <a:lstStyle/>
+          <a:p>
+            <a:pPr>
+              <a:lnSpc>
+                <a:spcPct val="100000"/>
+              </a:lnSpc>
+              <a:buNone/>
+            </a:pPr>
+            <a:r>
+              <a:rPr sz="1500" b="1">
+                <a:solidFill>
+                  <a:srgbClr val="061F32"/>
+                </a:solidFill>
+                <a:latin typeface="微软雅黑"/>
+                <a:ea typeface="微软雅黑"/>
+                <a:cs typeface="微软雅黑"/>
+              </a:rPr>
+              <a:t>采样：一次性快照</a:t>
+            </a:r>
+            <a:endParaRPr sz="1500" b="1">
+              <a:solidFill>
+                <a:srgbClr val="061F32"/>
+              </a:solidFill>
+              <a:latin typeface="微软雅黑"/>
+              <a:ea typeface="微软雅黑"/>
+              <a:cs typeface="微软雅黑"/>
+            </a:endParaRPr>
+          </a:p>
+        </p:txBody>
+      </p:sp>
+      <p:pic>
+        <p:nvPicPr>
+          <p:cNvPr id="311" name="图片 244"/>
+          <p:cNvPicPr>
+            <a:picLocks noChangeAspect="1"/>
+          </p:cNvPicPr>
+          <p:nvPr/>
+        </p:nvPicPr>
+        <p:blipFill>
+          <a:blip r:embed="rId1">
+            <a:extLst>
+              <a:ext uri="{96DAC541-7B7A-43D3-8B79-37D633B846F1}">
+                <asvg:svgBlip xmlns:asvg="http://schemas.microsoft.com/office/drawing/2016/SVG/main" r:embed="rId2"/>
+              </a:ext>
+            </a:extLst>
+          </a:blip>
+          <a:stretch>
+            <a:fillRect/>
+          </a:stretch>
+        </p:blipFill>
+        <p:spPr>
+          <a:xfrm>
+            <a:off x="3905250" y="3743325"/>
+            <a:ext cx="266700" cy="190500"/>
+          </a:xfrm>
+          <a:prstGeom prst="rect">
+            <a:avLst/>
+          </a:prstGeom>
+        </p:spPr>
+      </p:pic>
+      <p:sp>
+        <p:nvSpPr>
+          <p:cNvPr id="283" name="矩形 245"/>
+          <p:cNvSpPr>
+            <a:spLocks noGrp="1"/>
+          </p:cNvSpPr>
+          <p:nvPr/>
+        </p:nvSpPr>
+        <p:spPr>
+          <a:xfrm>
+            <a:off x="4324350" y="3590925"/>
+            <a:ext cx="2952750" cy="495300"/>
+          </a:xfrm>
+          <a:prstGeom prst="rect">
+            <a:avLst/>
+          </a:prstGeom>
+          <a:solidFill>
+            <a:srgbClr val="FFFFFF"/>
+          </a:solidFill>
+          <a:ln w="12700">
+            <a:solidFill>
+              <a:srgbClr val="E7E6E6"/>
+            </a:solidFill>
+            <a:prstDash val="solid"/>
+          </a:ln>
+        </p:spPr>
+        <p:txBody>
+          <a:bodyPr/>
+          <a:lstStyle/>
+          <a:p/>
+        </p:txBody>
+      </p:sp>
+      <p:sp>
+        <p:nvSpPr>
+          <p:cNvPr id="284" name="文本框 246"/>
+          <p:cNvSpPr>
+            <a:spLocks noGrp="1"/>
+          </p:cNvSpPr>
+          <p:nvPr/>
+        </p:nvSpPr>
+        <p:spPr>
+          <a:xfrm>
+            <a:off x="4495800" y="3724275"/>
+            <a:ext cx="2609850" cy="228600"/>
+          </a:xfrm>
+          <a:prstGeom prst="rect">
+            <a:avLst/>
+          </a:prstGeom>
+        </p:spPr>
+        <p:txBody>
+          <a:bodyPr wrap="none" lIns="0" tIns="0" rIns="0" bIns="0"/>
+          <a:lstStyle/>
+          <a:p>
+            <a:pPr>
+              <a:lnSpc>
+                <a:spcPct val="100000"/>
+              </a:lnSpc>
+              <a:buNone/>
+            </a:pPr>
+            <a:r>
+              <a:rPr sz="1500" b="1">
+                <a:solidFill>
+                  <a:srgbClr val="061F32"/>
+                </a:solidFill>
+                <a:latin typeface="微软雅黑"/>
+                <a:ea typeface="微软雅黑"/>
+                <a:cs typeface="微软雅黑"/>
+              </a:rPr>
+              <a:t>用药：凭经验选择</a:t>
+            </a:r>
+            <a:endParaRPr sz="1500" b="1">
+              <a:solidFill>
+                <a:srgbClr val="061F32"/>
+              </a:solidFill>
+              <a:latin typeface="微软雅黑"/>
+              <a:ea typeface="微软雅黑"/>
+              <a:cs typeface="微软雅黑"/>
+            </a:endParaRPr>
+          </a:p>
+        </p:txBody>
+      </p:sp>
+      <p:pic>
+        <p:nvPicPr>
+          <p:cNvPr id="314" name="图片 247"/>
+          <p:cNvPicPr>
+            <a:picLocks noChangeAspect="1"/>
+          </p:cNvPicPr>
+          <p:nvPr/>
+        </p:nvPicPr>
+        <p:blipFill>
+          <a:blip r:embed="rId1">
+            <a:extLst>
+              <a:ext uri="{96DAC541-7B7A-43D3-8B79-37D633B846F1}">
+                <asvg:svgBlip xmlns:asvg="http://schemas.microsoft.com/office/drawing/2016/SVG/main" r:embed="rId2"/>
+              </a:ext>
+            </a:extLst>
+          </a:blip>
+          <a:stretch>
+            <a:fillRect/>
+          </a:stretch>
+        </p:blipFill>
+        <p:spPr>
+          <a:xfrm>
+            <a:off x="7429500" y="3743325"/>
+            <a:ext cx="266700" cy="190500"/>
+          </a:xfrm>
+          <a:prstGeom prst="rect">
+            <a:avLst/>
+          </a:prstGeom>
+        </p:spPr>
+      </p:pic>
+      <p:sp>
+        <p:nvSpPr>
+          <p:cNvPr id="286" name="矩形 248"/>
+          <p:cNvSpPr>
+            <a:spLocks noGrp="1"/>
+          </p:cNvSpPr>
+          <p:nvPr/>
+        </p:nvSpPr>
+        <p:spPr>
+          <a:xfrm>
+            <a:off x="7848600" y="3590925"/>
+            <a:ext cx="3543300" cy="495300"/>
+          </a:xfrm>
+          <a:prstGeom prst="rect">
+            <a:avLst/>
+          </a:prstGeom>
+          <a:solidFill>
+            <a:srgbClr val="FFFFFF"/>
+          </a:solidFill>
+          <a:ln w="19050">
+            <a:solidFill>
+              <a:srgbClr val="5A0E13"/>
+            </a:solidFill>
+            <a:prstDash val="solid"/>
+          </a:ln>
+        </p:spPr>
+        <p:txBody>
+          <a:bodyPr/>
+          <a:lstStyle/>
+          <a:p/>
+        </p:txBody>
+      </p:sp>
+      <p:sp>
+        <p:nvSpPr>
+          <p:cNvPr id="287" name="文本框 249"/>
+          <p:cNvSpPr>
+            <a:spLocks noGrp="1"/>
+          </p:cNvSpPr>
+          <p:nvPr/>
+        </p:nvSpPr>
+        <p:spPr>
+          <a:xfrm>
+            <a:off x="8020050" y="3724275"/>
+            <a:ext cx="3200400" cy="228600"/>
+          </a:xfrm>
+          <a:prstGeom prst="rect">
+            <a:avLst/>
+          </a:prstGeom>
+        </p:spPr>
+        <p:txBody>
+          <a:bodyPr wrap="none" lIns="0" tIns="0" rIns="0" bIns="0"/>
+          <a:lstStyle/>
+          <a:p>
+            <a:pPr>
+              <a:lnSpc>
+                <a:spcPct val="100000"/>
+              </a:lnSpc>
+              <a:buNone/>
+            </a:pPr>
+            <a:r>
+              <a:rPr sz="1500" b="1">
+                <a:solidFill>
+                  <a:srgbClr val="5A0E13"/>
+                </a:solidFill>
+                <a:latin typeface="微软雅黑"/>
+                <a:ea typeface="微软雅黑"/>
+                <a:cs typeface="微软雅黑"/>
+              </a:rPr>
+              <a:t>结局：失败后才知道</a:t>
+            </a:r>
+            <a:endParaRPr sz="1500" b="1">
+              <a:solidFill>
+                <a:srgbClr val="5A0E13"/>
+              </a:solidFill>
+              <a:latin typeface="微软雅黑"/>
+              <a:ea typeface="微软雅黑"/>
+              <a:cs typeface="微软雅黑"/>
+            </a:endParaRPr>
+          </a:p>
+        </p:txBody>
+      </p:sp>
+      <p:sp>
+        <p:nvSpPr>
+          <p:cNvPr id="288" name="矩形 250"/>
+          <p:cNvSpPr>
+            <a:spLocks noGrp="1"/>
+          </p:cNvSpPr>
+          <p:nvPr/>
+        </p:nvSpPr>
+        <p:spPr>
+          <a:xfrm>
+            <a:off x="533400" y="4505325"/>
+            <a:ext cx="11125200" cy="1733550"/>
+          </a:xfrm>
+          <a:prstGeom prst="rect">
+            <a:avLst/>
+          </a:prstGeom>
+          <a:solidFill>
+            <a:srgbClr val="061F32"/>
+          </a:solidFill>
+        </p:spPr>
+        <p:txBody>
+          <a:bodyPr/>
+          <a:lstStyle/>
+          <a:p/>
+        </p:txBody>
+      </p:sp>
+      <p:sp>
+        <p:nvSpPr>
+          <p:cNvPr id="289" name="文本框 251"/>
+          <p:cNvSpPr>
+            <a:spLocks noGrp="1"/>
+          </p:cNvSpPr>
+          <p:nvPr/>
+        </p:nvSpPr>
+        <p:spPr>
+          <a:xfrm>
+            <a:off x="800100" y="4867275"/>
+            <a:ext cx="10591800" cy="209550"/>
+          </a:xfrm>
+          <a:prstGeom prst="rect">
+            <a:avLst/>
+          </a:prstGeom>
+        </p:spPr>
+        <p:txBody>
+          <a:bodyPr wrap="none" lIns="0" tIns="0" rIns="0" bIns="0"/>
+          <a:lstStyle/>
+          <a:p>
+            <a:pPr>
+              <a:lnSpc>
+                <a:spcPct val="100000"/>
+              </a:lnSpc>
+              <a:buNone/>
+            </a:pPr>
+            <a:r>
+              <a:rPr sz="1350" b="1" spc="150">
+                <a:solidFill>
+                  <a:srgbClr val="08A6F6"/>
+                </a:solidFill>
+                <a:latin typeface="微软雅黑"/>
+                <a:ea typeface="微软雅黑"/>
+                <a:cs typeface="微软雅黑"/>
+              </a:rPr>
+              <a:t>方向</a:t>
+            </a:r>
+            <a:endParaRPr sz="1350" b="1" spc="150">
+              <a:solidFill>
+                <a:srgbClr val="08A6F6"/>
+              </a:solidFill>
+              <a:latin typeface="微软雅黑"/>
+              <a:ea typeface="微软雅黑"/>
+              <a:cs typeface="微软雅黑"/>
+            </a:endParaRPr>
+          </a:p>
+        </p:txBody>
+      </p:sp>
+      <p:sp>
+        <p:nvSpPr>
+          <p:cNvPr id="290" name="文本框 252"/>
+          <p:cNvSpPr>
+            <a:spLocks noGrp="1"/>
+          </p:cNvSpPr>
+          <p:nvPr/>
+        </p:nvSpPr>
+        <p:spPr>
+          <a:xfrm>
+            <a:off x="800100" y="5153025"/>
+            <a:ext cx="10591800" cy="723900"/>
+          </a:xfrm>
+          <a:prstGeom prst="rect">
+            <a:avLst/>
+          </a:prstGeom>
+        </p:spPr>
+        <p:txBody>
+          <a:bodyPr wrap="square" lIns="0" tIns="0" rIns="0" bIns="0">
+            <a:normAutofit/>
+          </a:bodyPr>
+          <a:lstStyle/>
+          <a:p>
+            <a:pPr>
+              <a:lnSpc>
+                <a:spcPct val="150000"/>
+              </a:lnSpc>
+              <a:buNone/>
+            </a:pPr>
+            <a:r>
+              <a:rPr sz="1575">
+                <a:solidFill>
+                  <a:srgbClr val="FFFFFF"/>
+                </a:solidFill>
+                <a:latin typeface="微软雅黑"/>
+                <a:ea typeface="微软雅黑"/>
+                <a:cs typeface="微软雅黑"/>
+              </a:rPr>
+              <a:t>在临床决策窗口期输出患者特异性预测，并用真实临床结局持续校准模型。外部证据：Peng et al., Cell Stem Cell 2025——患者来源脑肿瘤类器官（IPTO）在前瞻性研究中预测患者治疗响应（PFS / OS，p = 0.034 / 0.033）。</a:t>
+            </a:r>
+            <a:endParaRPr sz="1575">
+              <a:solidFill>
+                <a:srgbClr val="FFFFFF"/>
+              </a:solidFill>
+              <a:latin typeface="微软雅黑"/>
+              <a:ea typeface="微软雅黑"/>
+              <a:cs typeface="微软雅黑"/>
+            </a:endParaRPr>
+          </a:p>
+        </p:txBody>
+      </p:sp>
+      <p:sp>
+        <p:nvSpPr>
+          <p:cNvPr id="291" name="文本框 253"/>
+          <p:cNvSpPr>
+            <a:spLocks noGrp="1"/>
+          </p:cNvSpPr>
+          <p:nvPr/>
+        </p:nvSpPr>
+        <p:spPr>
+          <a:xfrm>
+            <a:off x="533400" y="6381750"/>
+            <a:ext cx="2828925" cy="161925"/>
+          </a:xfrm>
+          <a:prstGeom prst="rect">
+            <a:avLst/>
+          </a:prstGeom>
+        </p:spPr>
+        <p:txBody>
+          <a:bodyPr wrap="none" lIns="0" tIns="0" rIns="0" bIns="0"/>
+          <a:lstStyle/>
+          <a:p>
+            <a:pPr>
+              <a:lnSpc>
+                <a:spcPct val="100000"/>
+              </a:lnSpc>
+              <a:buNone/>
+            </a:pPr>
+            <a:r>
+              <a:rPr sz="1050">
+                <a:solidFill>
+                  <a:srgbClr val="808080"/>
+                </a:solidFill>
+                <a:latin typeface="微软雅黑"/>
+                <a:ea typeface="微软雅黑"/>
+                <a:cs typeface="微软雅黑"/>
+              </a:rPr>
+              <a:t>Source: AIVC 商业故事 BP §2.2；Peng et al., Cell Stem Cell 32, 652–669 (2025)</a:t>
+            </a:r>
+            <a:r>
+              <a:rPr sz="1050">
+                <a:solidFill>
+                  <a:srgbClr val="808080"/>
+                </a:solidFill>
+                <a:latin typeface="微软雅黑"/>
+                <a:ea typeface="微软雅黑"/>
+                <a:cs typeface="微软雅黑"/>
+              </a:rPr>
+              <a:t/>
+            </a:r>
+            <a:r>
+              <a:rPr sz="1050">
+                <a:solidFill>
+                  <a:srgbClr val="808080"/>
+                </a:solidFill>
+                <a:latin typeface="微软雅黑"/>
+                <a:ea typeface="微软雅黑"/>
+                <a:cs typeface="微软雅黑"/>
+              </a:rPr>
+              <a:t/>
+            </a:r>
+            <a:r>
+              <a:rPr sz="1050">
+                <a:solidFill>
+                  <a:srgbClr val="808080"/>
+                </a:solidFill>
+                <a:latin typeface="微软雅黑"/>
+                <a:ea typeface="微软雅黑"/>
+                <a:cs typeface="微软雅黑"/>
+              </a:rPr>
+              <a:t/>
+            </a:r>
+            <a:endParaRPr sz="1050">
+              <a:solidFill>
+                <a:srgbClr val="808080"/>
+              </a:solidFill>
+              <a:latin typeface="微软雅黑"/>
+              <a:ea typeface="微软雅黑"/>
+              <a:cs typeface="微软雅黑"/>
+            </a:endParaRPr>
+          </a:p>
+        </p:txBody>
+      </p:sp>
+      <p:sp>
+        <p:nvSpPr>
+          <p:cNvPr id="292" name="文本框 254"/>
+          <p:cNvSpPr>
+            <a:spLocks noGrp="1"/>
+          </p:cNvSpPr>
+          <p:nvPr/>
+        </p:nvSpPr>
+        <p:spPr>
+          <a:xfrm>
+            <a:off x="11201400" y="6381750"/>
+            <a:ext cx="457200" cy="161925"/>
+          </a:xfrm>
+          <a:prstGeom prst="rect">
+            <a:avLst/>
+          </a:prstGeom>
+        </p:spPr>
+        <p:txBody>
+          <a:bodyPr wrap="none" lIns="0" tIns="0" rIns="0" bIns="0"/>
+          <a:lstStyle/>
+          <a:p>
+            <a:pPr>
+              <a:lnSpc>
+                <a:spcPct val="100000"/>
+              </a:lnSpc>
+              <a:buNone/>
+            </a:pPr>
+            <a:r>
+              <a:rPr sz="1050">
+                <a:solidFill>
+                  <a:srgbClr val="808080"/>
+                </a:solidFill>
+                <a:latin typeface="微软雅黑"/>
+                <a:ea typeface="微软雅黑"/>
+                <a:cs typeface="微软雅黑"/>
+              </a:rPr>
+              <a:t>05 / 08</a:t>
             </a:r>
             <a:endParaRPr sz="1050">
               <a:solidFill>
@@ -3887,8 +4370,8 @@
         </p:nvSpPr>
         <p:spPr>
           <a:xfrm>
-            <a:off x="533400" y="1095375"/>
-            <a:ext cx="5448300" cy="2466975"/>
+            <a:off x="533400" y="2009775"/>
+            <a:ext cx="3557016" cy="2466975"/>
           </a:xfrm>
           <a:custGeom>
             <a:avLst/>
@@ -3933,8 +4416,8 @@
         </p:nvSpPr>
         <p:spPr>
           <a:xfrm>
-            <a:off x="533400" y="1314450"/>
-            <a:ext cx="5448300" cy="504825"/>
+            <a:off x="533400" y="2231136"/>
+            <a:ext cx="3557016" cy="504825"/>
           </a:xfrm>
           <a:prstGeom prst="rect">
             <a:avLst/>
@@ -3982,8 +4465,8 @@
         </p:nvSpPr>
         <p:spPr>
           <a:xfrm>
-            <a:off x="533400" y="1895475"/>
-            <a:ext cx="5448300" cy="304800"/>
+            <a:off x="533400" y="2807207"/>
+            <a:ext cx="3557016" cy="365760"/>
           </a:xfrm>
           <a:prstGeom prst="rect">
             <a:avLst/>
@@ -4008,7 +4491,7 @@
                 <a:ea typeface="微软雅黑"/>
                 <a:cs typeface="微软雅黑"/>
               </a:rPr>
-              <a:t>为什么要做</a:t>
+              <a:t>需求与时机</a:t>
             </a:r>
             <a:endParaRPr sz="1950" b="1">
               <a:solidFill>
@@ -4031,8 +4514,8 @@
         </p:nvSpPr>
         <p:spPr>
           <a:xfrm>
-            <a:off x="533400" y="2314575"/>
-            <a:ext cx="5448300" cy="590550"/>
+            <a:off x="533400" y="3291840"/>
+            <a:ext cx="3557016" cy="3291840"/>
           </a:xfrm>
           <a:prstGeom prst="rect">
             <a:avLst/>
@@ -4059,7 +4542,7 @@
                 <a:ea typeface="微软雅黑"/>
                 <a:cs typeface="微软雅黑"/>
               </a:rPr>
-              <a:t>药物研发的「试错」正变得不可承受；治疗决策缺少患者特异性的功能证据；四项技术条件已同步成熟</a:t>
+              <a:t>研发「试错」代价高企；临床治疗决策缺少患者特异性的功能证据；类器官、多模态测量、算力与 AI 四项条件已同步成熟</a:t>
             </a:r>
             <a:endParaRPr sz="1275">
               <a:solidFill>
@@ -4082,8 +4565,8 @@
         </p:nvSpPr>
         <p:spPr>
           <a:xfrm>
-            <a:off x="6210300" y="1095375"/>
-            <a:ext cx="5448300" cy="2466975"/>
+            <a:off x="4319016" y="2009775"/>
+            <a:ext cx="3557016" cy="2466975"/>
           </a:xfrm>
           <a:custGeom>
             <a:avLst/>
@@ -4128,8 +4611,8 @@
         </p:nvSpPr>
         <p:spPr>
           <a:xfrm>
-            <a:off x="6210300" y="1314450"/>
-            <a:ext cx="5448300" cy="504825"/>
+            <a:off x="4319016" y="2231136"/>
+            <a:ext cx="3557016" cy="504825"/>
           </a:xfrm>
           <a:prstGeom prst="rect">
             <a:avLst/>
@@ -4177,8 +4660,8 @@
         </p:nvSpPr>
         <p:spPr>
           <a:xfrm>
-            <a:off x="6210300" y="1895475"/>
-            <a:ext cx="5448300" cy="304800"/>
+            <a:off x="4319016" y="2807207"/>
+            <a:ext cx="3557016" cy="365760"/>
           </a:xfrm>
           <a:prstGeom prst="rect">
             <a:avLst/>
@@ -4203,7 +4686,7 @@
                 <a:ea typeface="微软雅黑"/>
                 <a:cs typeface="微软雅黑"/>
               </a:rPr>
-              <a:t>为什么我们能做成</a:t>
+              <a:t>技术壁垒与团队</a:t>
             </a:r>
             <a:endParaRPr sz="1950" b="1">
               <a:solidFill>
@@ -4226,8 +4709,8 @@
         </p:nvSpPr>
         <p:spPr>
           <a:xfrm>
-            <a:off x="6210300" y="2314575"/>
-            <a:ext cx="5448300" cy="590550"/>
+            <a:off x="4319016" y="3291840"/>
+            <a:ext cx="3557016" cy="3291840"/>
           </a:xfrm>
           <a:prstGeom prst="rect">
             <a:avLst/>
@@ -4254,7 +4737,7 @@
                 <a:ea typeface="微软雅黑"/>
                 <a:cs typeface="微软雅黑"/>
               </a:rPr>
-              <a:t>行业缺的不是算法，而是对的数据；患者与类器官两条时间轨迹互相校准；数据飞轮让模型越用越准</a:t>
+              <a:t>患者 × 类器官双轨校准，学习干预后的状态转移；数据飞轮与四道护城河；科学 × 数据 × 模型 × 运营团队实现能力闭环</a:t>
             </a:r>
             <a:endParaRPr sz="1275">
               <a:solidFill>
@@ -4277,8 +4760,8 @@
         </p:nvSpPr>
         <p:spPr>
           <a:xfrm>
-            <a:off x="533400" y="3762375"/>
-            <a:ext cx="5448300" cy="2466975"/>
+            <a:off x="8104632" y="2009775"/>
+            <a:ext cx="3557016" cy="2466975"/>
           </a:xfrm>
           <a:custGeom>
             <a:avLst/>
@@ -4323,8 +4806,8 @@
         </p:nvSpPr>
         <p:spPr>
           <a:xfrm>
-            <a:off x="533400" y="3981450"/>
-            <a:ext cx="5448300" cy="504825"/>
+            <a:off x="8104632" y="2231136"/>
+            <a:ext cx="3557016" cy="504825"/>
           </a:xfrm>
           <a:prstGeom prst="rect">
             <a:avLst/>
@@ -4372,8 +4855,8 @@
         </p:nvSpPr>
         <p:spPr>
           <a:xfrm>
-            <a:off x="533400" y="4562475"/>
-            <a:ext cx="5448300" cy="304800"/>
+            <a:off x="8104632" y="2807207"/>
+            <a:ext cx="3557016" cy="365760"/>
           </a:xfrm>
           <a:prstGeom prst="rect">
             <a:avLst/>
@@ -4398,7 +4881,7 @@
                 <a:ea typeface="微软雅黑"/>
                 <a:cs typeface="微软雅黑"/>
               </a:rPr>
-              <a:t>团队</a:t>
+              <a:t>商业价值与回报</a:t>
             </a:r>
             <a:endParaRPr sz="1950" b="1">
               <a:solidFill>
@@ -4421,8 +4904,8 @@
         </p:nvSpPr>
         <p:spPr>
           <a:xfrm>
-            <a:off x="533400" y="4981575"/>
-            <a:ext cx="5448300" cy="590550"/>
+            <a:off x="8104632" y="3291840"/>
+            <a:ext cx="3557016" cy="3291840"/>
           </a:xfrm>
           <a:prstGeom prst="rect">
             <a:avLst/>
@@ -4451,252 +4934,13 @@
                 <a:ea typeface="微软雅黑"/>
                 <a:cs typeface="微软雅黑"/>
               </a:rPr>
-              <a:t>科学 × 数据 × 模型 × 运营：从患者采样到前瞻验证，核心能力在团队内部实现自持闭环</a:t>
+              <a:t>分阶段商业模式与合作路径；5000 万元 / 12 个月预算与 Plan B 准备金；里程碑与投资回报</a:t>
             </a:r>
             <a:endParaRPr sz="1275">
               <a:solidFill>
                 <a:srgbClr val="44546A">
                   <a:alpha val="100000"/>
                 </a:srgbClr>
-              </a:solidFill>
-              <a:latin typeface="微软雅黑"/>
-              <a:ea typeface="微软雅黑"/>
-              <a:cs typeface="微软雅黑"/>
-            </a:endParaRPr>
-          </a:p>
-        </p:txBody>
-      </p:sp>
-      <p:sp>
-        <p:nvSpPr>
-          <p:cNvPr id="254" name="任意多边形 216"/>
-          <p:cNvSpPr>
-            <a:spLocks noGrp="1"/>
-          </p:cNvSpPr>
-          <p:nvPr/>
-        </p:nvSpPr>
-        <p:spPr>
-          <a:xfrm>
-            <a:off x="6210300" y="3762375"/>
-            <a:ext cx="5448300" cy="2466975"/>
-          </a:xfrm>
-          <a:custGeom>
-            <a:avLst/>
-            <a:gdLst/>
-            <a:ahLst/>
-            <a:cxnLst/>
-            <a:pathLst>
-              <a:path w="572" h="259">
-                <a:moveTo>
-                  <a:pt x="0" y="0"/>
-                </a:moveTo>
-                <a:lnTo>
-                  <a:pt x="572" y="0"/>
-                </a:lnTo>
-                <a:lnTo>
-                  <a:pt x="572" y="3"/>
-                </a:lnTo>
-                <a:lnTo>
-                  <a:pt x="0" y="3"/>
-                </a:lnTo>
-                <a:close/>
-              </a:path>
-            </a:pathLst>
-          </a:custGeom>
-          <a:solidFill>
-            <a:srgbClr val="061F32"/>
-          </a:solidFill>
-        </p:spPr>
-        <p:txBody>
-          <a:bodyPr/>
-          <a:lstStyle/>
-          <a:p/>
-        </p:txBody>
-      </p:sp>
-      <p:sp>
-        <p:nvSpPr>
-          <p:cNvPr id="255" name="文本框 217"/>
-          <p:cNvSpPr>
-            <a:spLocks noGrp="1"/>
-          </p:cNvSpPr>
-          <p:nvPr/>
-        </p:nvSpPr>
-        <p:spPr>
-          <a:xfrm>
-            <a:off x="6210300" y="3981450"/>
-            <a:ext cx="5448300" cy="504825"/>
-          </a:xfrm>
-          <a:prstGeom prst="rect">
-            <a:avLst/>
-          </a:prstGeom>
-        </p:spPr>
-        <p:txBody>
-          <a:bodyPr wrap="none" lIns="0" tIns="0" rIns="0" bIns="0"/>
-          <a:lstStyle/>
-          <a:p>
-            <a:pPr>
-              <a:lnSpc>
-                <a:spcPct val="100000"/>
-              </a:lnSpc>
-              <a:buNone/>
-            </a:pPr>
-            <a:r>
-              <a:rPr sz="3300" b="1">
-                <a:solidFill>
-                  <a:srgbClr val="99BDED"/>
-                </a:solidFill>
-                <a:latin typeface="微软雅黑"/>
-                <a:ea typeface="微软雅黑"/>
-                <a:cs typeface="微软雅黑"/>
-              </a:rPr>
-              <a:t>04</a:t>
-            </a:r>
-            <a:endParaRPr sz="3300" b="1">
-              <a:solidFill>
-                <a:srgbClr val="99BDED"/>
-              </a:solidFill>
-              <a:latin typeface="微软雅黑"/>
-              <a:ea typeface="微软雅黑"/>
-              <a:cs typeface="微软雅黑"/>
-            </a:endParaRPr>
-          </a:p>
-        </p:txBody>
-      </p:sp>
-      <p:sp>
-        <p:nvSpPr>
-          <p:cNvPr id="256" name="文本框 218"/>
-          <p:cNvSpPr>
-            <a:spLocks noGrp="1"/>
-          </p:cNvSpPr>
-          <p:nvPr/>
-        </p:nvSpPr>
-        <p:spPr>
-          <a:xfrm>
-            <a:off x="6210300" y="4562475"/>
-            <a:ext cx="5448300" cy="304800"/>
-          </a:xfrm>
-          <a:prstGeom prst="rect">
-            <a:avLst/>
-          </a:prstGeom>
-        </p:spPr>
-        <p:txBody>
-          <a:bodyPr wrap="none" lIns="0" tIns="0" rIns="0" bIns="0"/>
-          <a:lstStyle/>
-          <a:p>
-            <a:pPr>
-              <a:lnSpc>
-                <a:spcPct val="100000"/>
-              </a:lnSpc>
-              <a:buNone/>
-            </a:pPr>
-            <a:r>
-              <a:rPr sz="1950" b="1">
-                <a:solidFill>
-                  <a:srgbClr val="061F32"/>
-                </a:solidFill>
-                <a:latin typeface="微软雅黑"/>
-                <a:ea typeface="微软雅黑"/>
-                <a:cs typeface="微软雅黑"/>
-              </a:rPr>
-              <a:t>做成之后</a:t>
-            </a:r>
-            <a:endParaRPr sz="1950" b="1">
-              <a:solidFill>
-                <a:srgbClr val="061F32"/>
-              </a:solidFill>
-              <a:latin typeface="微软雅黑"/>
-              <a:ea typeface="微软雅黑"/>
-              <a:cs typeface="微软雅黑"/>
-            </a:endParaRPr>
-          </a:p>
-        </p:txBody>
-      </p:sp>
-      <p:sp>
-        <p:nvSpPr>
-          <p:cNvPr id="257" name="文本框 219"/>
-          <p:cNvSpPr>
-            <a:spLocks noGrp="1"/>
-          </p:cNvSpPr>
-          <p:nvPr/>
-        </p:nvSpPr>
-        <p:spPr>
-          <a:xfrm>
-            <a:off x="6210300" y="4981575"/>
-            <a:ext cx="5448300" cy="590550"/>
-          </a:xfrm>
-          <a:prstGeom prst="rect">
-            <a:avLst/>
-          </a:prstGeom>
-        </p:spPr>
-        <p:txBody>
-          <a:bodyPr wrap="square" lIns="0" tIns="0" rIns="0" bIns="0">
-            <a:normAutofit/>
-          </a:bodyPr>
-          <a:lstStyle/>
-          <a:p>
-            <a:pPr>
-              <a:lnSpc>
-                <a:spcPct val="150000"/>
-              </a:lnSpc>
-              <a:buNone/>
-            </a:pPr>
-            <a:r>
-              <a:rPr sz="1275">
-                <a:solidFill>
-                  <a:srgbClr val="44546A"/>
-                </a:solidFill>
-                <a:latin typeface="微软雅黑"/>
-                <a:ea typeface="微软雅黑"/>
-                <a:cs typeface="微软雅黑"/>
-              </a:rPr>
-              <a:t>社会价值与商业模式；</a:t>
-            </a:r>
-            <a:r>
-              <a:rPr sz="1275">
-                <a:solidFill>
-                  <a:srgbClr val="44546A"/>
-                </a:solidFill>
-                <a:latin typeface="微软雅黑"/>
-                <a:ea typeface="微软雅黑"/>
-                <a:cs typeface="微软雅黑"/>
-              </a:rPr>
-              <a:t>5000 </a:t>
-            </a:r>
-            <a:r>
-              <a:rPr sz="1275">
-                <a:solidFill>
-                  <a:srgbClr val="44546A"/>
-                </a:solidFill>
-                <a:latin typeface="微软雅黑"/>
-                <a:ea typeface="微软雅黑"/>
-                <a:cs typeface="微软雅黑"/>
-              </a:rPr>
-              <a:t>万元</a:t>
-            </a:r>
-            <a:r>
-              <a:rPr sz="1275">
-                <a:solidFill>
-                  <a:srgbClr val="44546A"/>
-                </a:solidFill>
-                <a:latin typeface="微软雅黑"/>
-                <a:ea typeface="微软雅黑"/>
-                <a:cs typeface="微软雅黑"/>
-              </a:rPr>
-              <a:t> / 12 </a:t>
-            </a:r>
-            <a:r>
-              <a:rPr sz="1275">
-                <a:solidFill>
-                  <a:srgbClr val="44546A"/>
-                </a:solidFill>
-                <a:latin typeface="微软雅黑"/>
-                <a:ea typeface="微软雅黑"/>
-                <a:cs typeface="微软雅黑"/>
-              </a:rPr>
-              <a:t>个月的预算、Plan B 准备金与投资回报</a:t>
-            </a:r>
-            <a:endParaRPr sz="1275">
-              <a:solidFill>
-                <a:srgbClr val="44546A"/>
               </a:solidFill>
               <a:latin typeface="微软雅黑"/>
               <a:ea typeface="微软雅黑"/>
@@ -4916,7 +5160,7 @@
                 <a:ea typeface="微软雅黑"/>
                 <a:cs typeface="微软雅黑"/>
               </a:rPr>
-              <a:t>为什么要做</a:t>
+              <a:t>需求与时机</a:t>
             </a:r>
             <a:endParaRPr sz="3450" b="1">
               <a:solidFill>
@@ -4965,7 +5209,7 @@
                 <a:ea typeface="微软雅黑"/>
                 <a:cs typeface="微软雅黑"/>
               </a:rPr>
-              <a:t>WHY IT MATTERS</a:t>
+              <a:t>THE NEED &amp; WHY NOW</a:t>
             </a:r>
             <a:endParaRPr sz="1500" spc="225">
               <a:solidFill>
@@ -6282,1635 +6526,6 @@
 </p:sld>
 </file>
 
-<file path=ppt/slides/slide5.xml><?xml version="1.0" encoding="utf-8"?>
-<p:sld xmlns:a="http://schemas.openxmlformats.org/drawingml/2006/main" xmlns:r="http://schemas.openxmlformats.org/officeDocument/2006/relationships" xmlns:p="http://schemas.openxmlformats.org/presentationml/2006/main">
-  <p:cSld>
-    <p:spTree>
-      <p:nvGrpSpPr>
-        <p:cNvPr id="1" name=""/>
-        <p:cNvGrpSpPr/>
-        <p:nvPr/>
-      </p:nvGrpSpPr>
-      <p:grpSpPr/>
-      <p:sp>
-        <p:nvSpPr>
-          <p:cNvPr id="294" name="矩形 256"/>
-          <p:cNvSpPr>
-            <a:spLocks noGrp="1"/>
-          </p:cNvSpPr>
-          <p:nvPr/>
-        </p:nvSpPr>
-        <p:spPr>
-          <a:xfrm>
-            <a:off x="0" y="0"/>
-            <a:ext cx="12192000" cy="6858000"/>
-          </a:xfrm>
-          <a:prstGeom prst="rect">
-            <a:avLst/>
-          </a:prstGeom>
-          <a:solidFill>
-            <a:srgbClr val="FFFFFF"/>
-          </a:solidFill>
-        </p:spPr>
-        <p:txBody>
-          <a:bodyPr/>
-          <a:lstStyle/>
-          <a:p/>
-        </p:txBody>
-      </p:sp>
-      <p:sp>
-        <p:nvSpPr>
-          <p:cNvPr id="295" name="文本框 257"/>
-          <p:cNvSpPr>
-            <a:spLocks noGrp="1"/>
-          </p:cNvSpPr>
-          <p:nvPr/>
-        </p:nvSpPr>
-        <p:spPr>
-          <a:xfrm>
-            <a:off x="533400" y="419100"/>
-            <a:ext cx="11125200" cy="381000"/>
-          </a:xfrm>
-          <a:prstGeom prst="rect">
-            <a:avLst/>
-          </a:prstGeom>
-        </p:spPr>
-        <p:txBody>
-          <a:bodyPr wrap="none" lIns="0" tIns="0" rIns="0" bIns="0"/>
-          <a:lstStyle/>
-          <a:p>
-            <a:pPr>
-              <a:lnSpc>
-                <a:spcPct val="100000"/>
-              </a:lnSpc>
-              <a:buNone/>
-            </a:pPr>
-            <a:r>
-              <a:rPr sz="2475" b="1">
-                <a:solidFill>
-                  <a:srgbClr val="061F32"/>
-                </a:solidFill>
-                <a:latin typeface="微软雅黑"/>
-                <a:ea typeface="微软雅黑"/>
-                <a:cs typeface="微软雅黑"/>
-              </a:rPr>
-              <a:t>临床痛点：治疗选择缺少及时、患者特异性的功能证据</a:t>
-            </a:r>
-            <a:endParaRPr sz="2475" b="1">
-              <a:solidFill>
-                <a:srgbClr val="061F32"/>
-              </a:solidFill>
-              <a:latin typeface="微软雅黑"/>
-              <a:ea typeface="微软雅黑"/>
-              <a:cs typeface="微软雅黑"/>
-            </a:endParaRPr>
-          </a:p>
-        </p:txBody>
-      </p:sp>
-      <p:sp>
-        <p:nvSpPr>
-          <p:cNvPr id="296" name="矩形 258"/>
-          <p:cNvSpPr>
-            <a:spLocks noGrp="1"/>
-          </p:cNvSpPr>
-          <p:nvPr/>
-        </p:nvSpPr>
-        <p:spPr>
-          <a:xfrm>
-            <a:off x="533400" y="895350"/>
-            <a:ext cx="11125200" cy="9525"/>
-          </a:xfrm>
-          <a:prstGeom prst="rect">
-            <a:avLst/>
-          </a:prstGeom>
-          <a:solidFill>
-            <a:srgbClr val="061F32"/>
-          </a:solidFill>
-        </p:spPr>
-        <p:txBody>
-          <a:bodyPr/>
-          <a:lstStyle/>
-          <a:p/>
-        </p:txBody>
-      </p:sp>
-      <p:sp>
-        <p:nvSpPr>
-          <p:cNvPr id="297" name="矩形 259"/>
-          <p:cNvSpPr>
-            <a:spLocks noGrp="1"/>
-          </p:cNvSpPr>
-          <p:nvPr/>
-        </p:nvSpPr>
-        <p:spPr>
-          <a:xfrm>
-            <a:off x="533400" y="1019175"/>
-            <a:ext cx="4000500" cy="4305300"/>
-          </a:xfrm>
-          <a:prstGeom prst="rect">
-            <a:avLst/>
-          </a:prstGeom>
-          <a:solidFill>
-            <a:srgbClr val="FFFFFF"/>
-          </a:solidFill>
-          <a:ln w="12700">
-            <a:solidFill>
-              <a:srgbClr val="E7E6E6"/>
-            </a:solidFill>
-            <a:prstDash val="solid"/>
-          </a:ln>
-        </p:spPr>
-        <p:txBody>
-          <a:bodyPr/>
-          <a:lstStyle/>
-          <a:p/>
-        </p:txBody>
-      </p:sp>
-      <p:pic>
-        <p:nvPicPr>
-          <p:cNvPr id="322" name="图片 260"/>
-          <p:cNvPicPr>
-            <a:picLocks noChangeAspect="1"/>
-          </p:cNvPicPr>
-          <p:nvPr/>
-        </p:nvPicPr>
-        <p:blipFill>
-          <a:blip r:embed="rId1"/>
-          <a:srcRect t="8263" b="8263"/>
-          <a:stretch>
-            <a:fillRect/>
-          </a:stretch>
-        </p:blipFill>
-        <p:spPr>
-          <a:xfrm>
-            <a:off x="590550" y="1076325"/>
-            <a:ext cx="3867150" cy="4191000"/>
-          </a:xfrm>
-          <a:prstGeom prst="rect">
-            <a:avLst/>
-          </a:prstGeom>
-        </p:spPr>
-      </p:pic>
-      <p:sp>
-        <p:nvSpPr>
-          <p:cNvPr id="299" name="文本框 261"/>
-          <p:cNvSpPr>
-            <a:spLocks noGrp="1"/>
-          </p:cNvSpPr>
-          <p:nvPr/>
-        </p:nvSpPr>
-        <p:spPr>
-          <a:xfrm>
-            <a:off x="533400" y="5419725"/>
-            <a:ext cx="4000500" cy="704850"/>
-          </a:xfrm>
-          <a:prstGeom prst="rect">
-            <a:avLst/>
-          </a:prstGeom>
-        </p:spPr>
-        <p:txBody>
-          <a:bodyPr wrap="square" lIns="0" tIns="0" rIns="0" bIns="0">
-            <a:normAutofit/>
-          </a:bodyPr>
-          <a:lstStyle/>
-          <a:p>
-            <a:pPr>
-              <a:lnSpc>
-                <a:spcPct val="145000"/>
-              </a:lnSpc>
-              <a:buNone/>
-            </a:pPr>
-            <a:r>
-              <a:rPr sz="1050">
-                <a:solidFill>
-                  <a:srgbClr val="808080"/>
-                </a:solidFill>
-                <a:latin typeface="微软雅黑"/>
-                <a:ea typeface="微软雅黑"/>
-                <a:cs typeface="微软雅黑"/>
-              </a:rPr>
-              <a:t>证据：</a:t>
-            </a:r>
-            <a:r>
-              <a:rPr sz="1050">
-                <a:solidFill>
-                  <a:srgbClr val="808080"/>
-                </a:solidFill>
-                <a:latin typeface="微软雅黑"/>
-                <a:ea typeface="微软雅黑"/>
-                <a:cs typeface="微软雅黑"/>
-              </a:rPr>
-              <a:t>Peng et al., </a:t>
-            </a:r>
-            <a:r>
-              <a:rPr sz="1050" b="1">
-                <a:solidFill>
-                  <a:srgbClr val="44546A"/>
-                </a:solidFill>
-                <a:latin typeface="微软雅黑"/>
-                <a:ea typeface="微软雅黑"/>
-                <a:cs typeface="微软雅黑"/>
-              </a:rPr>
-              <a:t>Cell Stem Cell 2025</a:t>
-            </a:r>
-            <a:r>
-              <a:rPr sz="1050">
-                <a:solidFill>
-                  <a:srgbClr val="808080"/>
-                </a:solidFill>
-                <a:latin typeface="微软雅黑"/>
-                <a:ea typeface="微软雅黑"/>
-                <a:cs typeface="微软雅黑"/>
-              </a:rPr>
-              <a:t>——患者来源脑肿瘤类器官（</a:t>
-            </a:r>
-            <a:r>
-              <a:rPr sz="1050">
-                <a:solidFill>
-                  <a:srgbClr val="808080"/>
-                </a:solidFill>
-                <a:latin typeface="微软雅黑"/>
-                <a:ea typeface="微软雅黑"/>
-                <a:cs typeface="微软雅黑"/>
-              </a:rPr>
-              <a:t>IPTO</a:t>
-            </a:r>
-            <a:r>
-              <a:rPr sz="1050">
-                <a:solidFill>
-                  <a:srgbClr val="808080"/>
-                </a:solidFill>
-                <a:latin typeface="微软雅黑"/>
-                <a:ea typeface="微软雅黑"/>
-                <a:cs typeface="微软雅黑"/>
-              </a:rPr>
-              <a:t>）高保真保留肿瘤生态系统，并在前瞻性临床研究中预测患者治疗响应</a:t>
-            </a:r>
-            <a:endParaRPr sz="1050">
-              <a:solidFill>
-                <a:srgbClr val="808080"/>
-              </a:solidFill>
-              <a:latin typeface="微软雅黑"/>
-              <a:ea typeface="微软雅黑"/>
-              <a:cs typeface="微软雅黑"/>
-            </a:endParaRPr>
-          </a:p>
-        </p:txBody>
-      </p:sp>
-      <p:sp>
-        <p:nvSpPr>
-          <p:cNvPr id="300" name="文本框 262"/>
-          <p:cNvSpPr>
-            <a:spLocks noGrp="1"/>
-          </p:cNvSpPr>
-          <p:nvPr/>
-        </p:nvSpPr>
-        <p:spPr>
-          <a:xfrm>
-            <a:off x="4838700" y="1019175"/>
-            <a:ext cx="6819900" cy="1015352"/>
-          </a:xfrm>
-          <a:prstGeom prst="rect">
-            <a:avLst/>
-          </a:prstGeom>
-        </p:spPr>
-        <p:txBody>
-          <a:bodyPr wrap="square" lIns="0" tIns="0" rIns="0" bIns="0">
-            <a:normAutofit fontScale="77019"/>
-          </a:bodyPr>
-          <a:lstStyle/>
-          <a:p>
-            <a:pPr>
-              <a:lnSpc>
-                <a:spcPct val="150000"/>
-              </a:lnSpc>
-              <a:buNone/>
-            </a:pPr>
-            <a:r>
-              <a:rPr sz="1575">
-                <a:solidFill>
-                  <a:srgbClr val="44546A"/>
-                </a:solidFill>
-                <a:latin typeface="微软雅黑"/>
-                <a:ea typeface="微软雅黑"/>
-                <a:cs typeface="微软雅黑"/>
-              </a:rPr>
-              <a:t>即便进入临床，治疗决策仍缺少</a:t>
-            </a:r>
-            <a:r>
-              <a:rPr lang="zh-CN" altLang="en-US" sz="1575">
-                <a:solidFill>
-                  <a:srgbClr val="44546A"/>
-                </a:solidFill>
-                <a:latin typeface="微软雅黑"/>
-                <a:ea typeface="微软雅黑"/>
-                <a:cs typeface="微软雅黑"/>
-              </a:rPr>
-              <a:t>对应这名患者，对应病程当下节点的</a:t>
-            </a:r>
-            <a:r>
-              <a:rPr sz="1575">
-                <a:solidFill>
-                  <a:srgbClr val="44546A"/>
-                </a:solidFill>
-                <a:latin typeface="微软雅黑"/>
-                <a:ea typeface="微软雅黑"/>
-                <a:cs typeface="微软雅黑"/>
-              </a:rPr>
-              <a:t>功能证据。</a:t>
-            </a:r>
-            <a:r>
-              <a:rPr lang="zh-CN" altLang="en-US" sz="1575">
-                <a:solidFill>
-                  <a:srgbClr val="44546A"/>
-                </a:solidFill>
-                <a:latin typeface="微软雅黑"/>
-                <a:ea typeface="微软雅黑"/>
-                <a:cs typeface="微软雅黑"/>
-              </a:rPr>
-              <a:t>常规单次</a:t>
-            </a:r>
-            <a:r>
-              <a:rPr sz="1575">
-                <a:solidFill>
-                  <a:srgbClr val="44546A"/>
-                </a:solidFill>
-                <a:latin typeface="微软雅黑"/>
-                <a:ea typeface="微软雅黑"/>
-                <a:cs typeface="微软雅黑"/>
-              </a:rPr>
-              <a:t>分子检测</a:t>
-            </a:r>
-            <a:r>
-              <a:rPr lang="zh-CN" altLang="en-US" sz="1575">
-                <a:solidFill>
-                  <a:srgbClr val="44546A"/>
-                </a:solidFill>
-                <a:latin typeface="微软雅黑"/>
-                <a:ea typeface="微软雅黑"/>
-                <a:cs typeface="微软雅黑"/>
-              </a:rPr>
-              <a:t>只能提供采样时点的</a:t>
-            </a:r>
-            <a:r>
-              <a:rPr sz="1575">
-                <a:solidFill>
-                  <a:srgbClr val="44546A"/>
-                </a:solidFill>
-                <a:latin typeface="微软雅黑"/>
-                <a:ea typeface="微软雅黑"/>
-                <a:cs typeface="微软雅黑"/>
-              </a:rPr>
-              <a:t>静态</a:t>
-            </a:r>
-            <a:r>
-              <a:rPr lang="zh-CN" altLang="en-US" sz="1575">
-                <a:solidFill>
-                  <a:srgbClr val="44546A"/>
-                </a:solidFill>
-                <a:latin typeface="微软雅黑"/>
-                <a:ea typeface="微软雅黑"/>
-                <a:cs typeface="微软雅黑"/>
-              </a:rPr>
-              <a:t>信息</a:t>
-            </a:r>
-            <a:r>
-              <a:rPr sz="1575">
-                <a:solidFill>
-                  <a:srgbClr val="44546A"/>
-                </a:solidFill>
-                <a:latin typeface="微软雅黑"/>
-                <a:ea typeface="微软雅黑"/>
-                <a:cs typeface="微软雅黑"/>
-              </a:rPr>
-              <a:t>，影像与</a:t>
-            </a:r>
-            <a:r>
-              <a:rPr lang="zh-CN" altLang="en-US" sz="1575">
-                <a:solidFill>
-                  <a:srgbClr val="44546A"/>
-                </a:solidFill>
-                <a:latin typeface="微软雅黑"/>
-                <a:ea typeface="微软雅黑"/>
-                <a:cs typeface="微软雅黑"/>
-              </a:rPr>
-              <a:t>临床</a:t>
-            </a:r>
-            <a:r>
-              <a:rPr sz="1575">
-                <a:solidFill>
-                  <a:srgbClr val="44546A"/>
-                </a:solidFill>
-                <a:latin typeface="微软雅黑"/>
-                <a:ea typeface="微软雅黑"/>
-                <a:cs typeface="微软雅黑"/>
-              </a:rPr>
-              <a:t>结局反馈滞后，常规类器官药筛很少进入纵向校准。三个缺口指向同一件事：把患者特异性的功能实验</a:t>
-            </a:r>
-            <a:r>
-              <a:rPr lang="zh-CN" altLang="en-US" sz="1575">
-                <a:solidFill>
-                  <a:srgbClr val="44546A"/>
-                </a:solidFill>
-                <a:latin typeface="微软雅黑"/>
-                <a:ea typeface="微软雅黑"/>
-                <a:cs typeface="微软雅黑"/>
-              </a:rPr>
-              <a:t>转化成</a:t>
-            </a:r>
-            <a:r>
-              <a:rPr sz="1575">
-                <a:solidFill>
-                  <a:srgbClr val="44546A"/>
-                </a:solidFill>
-                <a:latin typeface="微软雅黑"/>
-                <a:ea typeface="微软雅黑"/>
-                <a:cs typeface="微软雅黑"/>
-              </a:rPr>
-              <a:t>可交付、可</a:t>
-            </a:r>
-            <a:r>
-              <a:rPr lang="zh-CN" altLang="en-US" sz="1575">
-                <a:solidFill>
-                  <a:srgbClr val="44546A"/>
-                </a:solidFill>
-                <a:latin typeface="微软雅黑"/>
-                <a:ea typeface="微软雅黑"/>
-                <a:cs typeface="微软雅黑"/>
-              </a:rPr>
-              <a:t>量化</a:t>
-            </a:r>
-            <a:r>
-              <a:rPr sz="1575">
-                <a:solidFill>
-                  <a:srgbClr val="44546A"/>
-                </a:solidFill>
-                <a:latin typeface="微软雅黑"/>
-                <a:ea typeface="微软雅黑"/>
-                <a:cs typeface="微软雅黑"/>
-              </a:rPr>
-              <a:t>评分、可</a:t>
-            </a:r>
-            <a:r>
-              <a:rPr lang="zh-CN" altLang="en-US" sz="1575">
-                <a:solidFill>
-                  <a:srgbClr val="44546A"/>
-                </a:solidFill>
-                <a:latin typeface="微软雅黑"/>
-                <a:ea typeface="微软雅黑"/>
-                <a:cs typeface="微软雅黑"/>
-              </a:rPr>
-              <a:t>持续</a:t>
-            </a:r>
-            <a:r>
-              <a:rPr sz="1575">
-                <a:solidFill>
-                  <a:srgbClr val="44546A"/>
-                </a:solidFill>
-                <a:latin typeface="微软雅黑"/>
-                <a:ea typeface="微软雅黑"/>
-                <a:cs typeface="微软雅黑"/>
-              </a:rPr>
-              <a:t>更新的</a:t>
-            </a:r>
-            <a:r>
-              <a:rPr lang="zh-CN" altLang="en-US" sz="1575">
-                <a:solidFill>
-                  <a:srgbClr val="44546A"/>
-                </a:solidFill>
-                <a:latin typeface="微软雅黑"/>
-                <a:ea typeface="微软雅黑"/>
-                <a:cs typeface="微软雅黑"/>
-              </a:rPr>
-              <a:t>动态</a:t>
-            </a:r>
-            <a:r>
-              <a:rPr sz="1575">
-                <a:solidFill>
-                  <a:srgbClr val="44546A"/>
-                </a:solidFill>
-                <a:latin typeface="微软雅黑"/>
-                <a:ea typeface="微软雅黑"/>
-                <a:cs typeface="微软雅黑"/>
-              </a:rPr>
-              <a:t>预测</a:t>
-            </a:r>
-            <a:r>
-              <a:rPr lang="zh-CN" altLang="en-US" sz="1575">
-                <a:solidFill>
-                  <a:srgbClr val="44546A"/>
-                </a:solidFill>
-                <a:latin typeface="微软雅黑"/>
-                <a:ea typeface="微软雅黑"/>
-                <a:cs typeface="微软雅黑"/>
-              </a:rPr>
-              <a:t>体系</a:t>
-            </a:r>
-            <a:r>
-              <a:rPr sz="1575">
-                <a:solidFill>
-                  <a:srgbClr val="44546A"/>
-                </a:solidFill>
-                <a:latin typeface="微软雅黑"/>
-                <a:ea typeface="微软雅黑"/>
-                <a:cs typeface="微软雅黑"/>
-              </a:rPr>
-              <a:t>。</a:t>
-            </a:r>
-            <a:endParaRPr sz="1575">
-              <a:solidFill>
-                <a:srgbClr val="44546A"/>
-              </a:solidFill>
-              <a:latin typeface="微软雅黑"/>
-              <a:ea typeface="微软雅黑"/>
-              <a:cs typeface="微软雅黑"/>
-            </a:endParaRPr>
-          </a:p>
-        </p:txBody>
-      </p:sp>
-      <p:sp>
-        <p:nvSpPr>
-          <p:cNvPr id="301" name="任意多边形 263"/>
-          <p:cNvSpPr>
-            <a:spLocks noGrp="1"/>
-          </p:cNvSpPr>
-          <p:nvPr/>
-        </p:nvSpPr>
-        <p:spPr>
-          <a:xfrm>
-            <a:off x="4838733" y="2495371"/>
-            <a:ext cx="2171700" cy="2049303"/>
-          </a:xfrm>
-          <a:custGeom>
-            <a:avLst/>
-            <a:gdLst/>
-            <a:ahLst/>
-            <a:cxnLst/>
-            <a:pathLst>
-              <a:path w="228" h="395">
-                <a:moveTo>
-                  <a:pt x="0" y="0"/>
-                </a:moveTo>
-                <a:lnTo>
-                  <a:pt x="228" y="0"/>
-                </a:lnTo>
-                <a:lnTo>
-                  <a:pt x="228" y="3"/>
-                </a:lnTo>
-                <a:lnTo>
-                  <a:pt x="0" y="3"/>
-                </a:lnTo>
-                <a:close/>
-              </a:path>
-            </a:pathLst>
-          </a:custGeom>
-          <a:solidFill>
-            <a:srgbClr val="061F32"/>
-          </a:solidFill>
-        </p:spPr>
-        <p:txBody>
-          <a:bodyPr/>
-          <a:lstStyle/>
-          <a:p/>
-        </p:txBody>
-      </p:sp>
-      <p:sp>
-        <p:nvSpPr>
-          <p:cNvPr id="302" name="文本框 264"/>
-          <p:cNvSpPr>
-            <a:spLocks noGrp="1"/>
-          </p:cNvSpPr>
-          <p:nvPr/>
-        </p:nvSpPr>
-        <p:spPr>
-          <a:xfrm>
-            <a:off x="4838700" y="2604706"/>
-            <a:ext cx="2171700" cy="342900"/>
-          </a:xfrm>
-          <a:prstGeom prst="rect">
-            <a:avLst/>
-          </a:prstGeom>
-        </p:spPr>
-        <p:txBody>
-          <a:bodyPr wrap="none" lIns="0" tIns="0" rIns="0" bIns="0"/>
-          <a:lstStyle/>
-          <a:p>
-            <a:pPr>
-              <a:lnSpc>
-                <a:spcPct val="100000"/>
-              </a:lnSpc>
-              <a:buNone/>
-            </a:pPr>
-            <a:r>
-              <a:rPr sz="2250" b="1">
-                <a:solidFill>
-                  <a:srgbClr val="99BDED"/>
-                </a:solidFill>
-                <a:latin typeface="微软雅黑"/>
-                <a:ea typeface="微软雅黑"/>
-                <a:cs typeface="微软雅黑"/>
-              </a:rPr>
-              <a:t>1</a:t>
-            </a:r>
-            <a:endParaRPr sz="2250" b="1">
-              <a:solidFill>
-                <a:srgbClr val="99BDED"/>
-              </a:solidFill>
-              <a:latin typeface="微软雅黑"/>
-              <a:ea typeface="微软雅黑"/>
-              <a:cs typeface="微软雅黑"/>
-            </a:endParaRPr>
-          </a:p>
-        </p:txBody>
-      </p:sp>
-      <p:sp>
-        <p:nvSpPr>
-          <p:cNvPr id="303" name="文本框 265"/>
-          <p:cNvSpPr>
-            <a:spLocks noGrp="1"/>
-          </p:cNvSpPr>
-          <p:nvPr/>
-        </p:nvSpPr>
-        <p:spPr>
-          <a:xfrm>
-            <a:off x="4838700" y="3004756"/>
-            <a:ext cx="2171700" cy="247650"/>
-          </a:xfrm>
-          <a:prstGeom prst="rect">
-            <a:avLst/>
-          </a:prstGeom>
-        </p:spPr>
-        <p:txBody>
-          <a:bodyPr wrap="none" lIns="0" tIns="0" rIns="0" bIns="0"/>
-          <a:lstStyle/>
-          <a:p>
-            <a:pPr>
-              <a:lnSpc>
-                <a:spcPct val="100000"/>
-              </a:lnSpc>
-              <a:buNone/>
-            </a:pPr>
-            <a:r>
-              <a:rPr sz="1575" b="1">
-                <a:solidFill>
-                  <a:srgbClr val="061F32"/>
-                </a:solidFill>
-                <a:latin typeface="微软雅黑"/>
-                <a:ea typeface="微软雅黑"/>
-                <a:cs typeface="微软雅黑"/>
-              </a:rPr>
-              <a:t>分子图谱不完整</a:t>
-            </a:r>
-            <a:endParaRPr sz="1575" b="1">
-              <a:solidFill>
-                <a:srgbClr val="061F32"/>
-              </a:solidFill>
-              <a:latin typeface="微软雅黑"/>
-              <a:ea typeface="微软雅黑"/>
-              <a:cs typeface="微软雅黑"/>
-            </a:endParaRPr>
-          </a:p>
-        </p:txBody>
-      </p:sp>
-      <p:sp>
-        <p:nvSpPr>
-          <p:cNvPr id="304" name="文本框 266"/>
-          <p:cNvSpPr>
-            <a:spLocks noGrp="1"/>
-          </p:cNvSpPr>
-          <p:nvPr/>
-        </p:nvSpPr>
-        <p:spPr>
-          <a:xfrm>
-            <a:off x="4838700" y="3328606"/>
-            <a:ext cx="2171700" cy="590550"/>
-          </a:xfrm>
-          <a:prstGeom prst="rect">
-            <a:avLst/>
-          </a:prstGeom>
-        </p:spPr>
-        <p:txBody>
-          <a:bodyPr wrap="square" lIns="0" tIns="0" rIns="0" bIns="0">
-            <a:normAutofit/>
-          </a:bodyPr>
-          <a:lstStyle/>
-          <a:p>
-            <a:pPr>
-              <a:lnSpc>
-                <a:spcPct val="150000"/>
-              </a:lnSpc>
-              <a:buNone/>
-            </a:pPr>
-            <a:r>
-              <a:rPr sz="1275">
-                <a:solidFill>
-                  <a:srgbClr val="44546A"/>
-                </a:solidFill>
-                <a:latin typeface="微软雅黑"/>
-                <a:ea typeface="微软雅黑"/>
-                <a:cs typeface="微软雅黑"/>
-              </a:rPr>
-              <a:t>基因组能提示脆弱性，但疗效还取决于细胞状态、生态与治疗史</a:t>
-            </a:r>
-            <a:endParaRPr sz="1275">
-              <a:solidFill>
-                <a:srgbClr val="44546A"/>
-              </a:solidFill>
-              <a:latin typeface="微软雅黑"/>
-              <a:ea typeface="微软雅黑"/>
-              <a:cs typeface="微软雅黑"/>
-            </a:endParaRPr>
-          </a:p>
-        </p:txBody>
-      </p:sp>
-      <p:sp>
-        <p:nvSpPr>
-          <p:cNvPr id="305" name="任意多边形 267"/>
-          <p:cNvSpPr>
-            <a:spLocks noGrp="1"/>
-          </p:cNvSpPr>
-          <p:nvPr/>
-        </p:nvSpPr>
-        <p:spPr>
-          <a:xfrm>
-            <a:off x="7162800" y="2495371"/>
-            <a:ext cx="2171700" cy="1751594"/>
-          </a:xfrm>
-          <a:custGeom>
-            <a:avLst/>
-            <a:gdLst/>
-            <a:ahLst/>
-            <a:cxnLst/>
-            <a:pathLst>
-              <a:path w="228" h="395">
-                <a:moveTo>
-                  <a:pt x="0" y="0"/>
-                </a:moveTo>
-                <a:lnTo>
-                  <a:pt x="228" y="0"/>
-                </a:lnTo>
-                <a:lnTo>
-                  <a:pt x="228" y="3"/>
-                </a:lnTo>
-                <a:lnTo>
-                  <a:pt x="0" y="3"/>
-                </a:lnTo>
-                <a:close/>
-              </a:path>
-            </a:pathLst>
-          </a:custGeom>
-          <a:solidFill>
-            <a:srgbClr val="061F32"/>
-          </a:solidFill>
-        </p:spPr>
-        <p:txBody>
-          <a:bodyPr/>
-          <a:lstStyle/>
-          <a:p/>
-        </p:txBody>
-      </p:sp>
-      <p:sp>
-        <p:nvSpPr>
-          <p:cNvPr id="306" name="文本框 268"/>
-          <p:cNvSpPr>
-            <a:spLocks noGrp="1"/>
-          </p:cNvSpPr>
-          <p:nvPr/>
-        </p:nvSpPr>
-        <p:spPr>
-          <a:xfrm>
-            <a:off x="7162800" y="2604706"/>
-            <a:ext cx="2171700" cy="342900"/>
-          </a:xfrm>
-          <a:prstGeom prst="rect">
-            <a:avLst/>
-          </a:prstGeom>
-        </p:spPr>
-        <p:txBody>
-          <a:bodyPr wrap="none" lIns="0" tIns="0" rIns="0" bIns="0"/>
-          <a:lstStyle/>
-          <a:p>
-            <a:pPr>
-              <a:lnSpc>
-                <a:spcPct val="100000"/>
-              </a:lnSpc>
-              <a:buNone/>
-            </a:pPr>
-            <a:r>
-              <a:rPr sz="2250" b="1">
-                <a:solidFill>
-                  <a:srgbClr val="99BDED"/>
-                </a:solidFill>
-                <a:latin typeface="微软雅黑"/>
-                <a:ea typeface="微软雅黑"/>
-                <a:cs typeface="微软雅黑"/>
-              </a:rPr>
-              <a:t>2</a:t>
-            </a:r>
-            <a:endParaRPr sz="2250" b="1">
-              <a:solidFill>
-                <a:srgbClr val="99BDED"/>
-              </a:solidFill>
-              <a:latin typeface="微软雅黑"/>
-              <a:ea typeface="微软雅黑"/>
-              <a:cs typeface="微软雅黑"/>
-            </a:endParaRPr>
-          </a:p>
-        </p:txBody>
-      </p:sp>
-      <p:sp>
-        <p:nvSpPr>
-          <p:cNvPr id="307" name="文本框 269"/>
-          <p:cNvSpPr>
-            <a:spLocks noGrp="1"/>
-          </p:cNvSpPr>
-          <p:nvPr/>
-        </p:nvSpPr>
-        <p:spPr>
-          <a:xfrm>
-            <a:off x="7162800" y="3004756"/>
-            <a:ext cx="2171700" cy="247650"/>
-          </a:xfrm>
-          <a:prstGeom prst="rect">
-            <a:avLst/>
-          </a:prstGeom>
-        </p:spPr>
-        <p:txBody>
-          <a:bodyPr wrap="none" lIns="0" tIns="0" rIns="0" bIns="0"/>
-          <a:lstStyle/>
-          <a:p>
-            <a:pPr>
-              <a:lnSpc>
-                <a:spcPct val="100000"/>
-              </a:lnSpc>
-              <a:buNone/>
-            </a:pPr>
-            <a:r>
-              <a:rPr sz="1575" b="1">
-                <a:solidFill>
-                  <a:srgbClr val="061F32"/>
-                </a:solidFill>
-                <a:latin typeface="微软雅黑"/>
-                <a:ea typeface="微软雅黑"/>
-                <a:cs typeface="微软雅黑"/>
-              </a:rPr>
-              <a:t>反馈滞后</a:t>
-            </a:r>
-            <a:endParaRPr sz="1575" b="1">
-              <a:solidFill>
-                <a:srgbClr val="061F32"/>
-              </a:solidFill>
-              <a:latin typeface="微软雅黑"/>
-              <a:ea typeface="微软雅黑"/>
-              <a:cs typeface="微软雅黑"/>
-            </a:endParaRPr>
-          </a:p>
-        </p:txBody>
-      </p:sp>
-      <p:sp>
-        <p:nvSpPr>
-          <p:cNvPr id="308" name="文本框 270"/>
-          <p:cNvSpPr>
-            <a:spLocks noGrp="1"/>
-          </p:cNvSpPr>
-          <p:nvPr/>
-        </p:nvSpPr>
-        <p:spPr>
-          <a:xfrm>
-            <a:off x="7162800" y="3328606"/>
-            <a:ext cx="2171700" cy="876300"/>
-          </a:xfrm>
-          <a:prstGeom prst="rect">
-            <a:avLst/>
-          </a:prstGeom>
-        </p:spPr>
-        <p:txBody>
-          <a:bodyPr wrap="square" lIns="0" tIns="0" rIns="0" bIns="0">
-            <a:normAutofit/>
-          </a:bodyPr>
-          <a:lstStyle/>
-          <a:p>
-            <a:pPr>
-              <a:lnSpc>
-                <a:spcPct val="150000"/>
-              </a:lnSpc>
-              <a:buNone/>
-            </a:pPr>
-            <a:r>
-              <a:rPr sz="1275">
-                <a:solidFill>
-                  <a:srgbClr val="44546A"/>
-                </a:solidFill>
-                <a:latin typeface="微软雅黑"/>
-                <a:ea typeface="微软雅黑"/>
-                <a:cs typeface="微软雅黑"/>
-              </a:rPr>
-              <a:t>影像与结局只在治疗失败后说明发生了什么，耐药总是后知后觉</a:t>
-            </a:r>
-            <a:endParaRPr sz="1275">
-              <a:solidFill>
-                <a:srgbClr val="44546A"/>
-              </a:solidFill>
-              <a:latin typeface="微软雅黑"/>
-              <a:ea typeface="微软雅黑"/>
-              <a:cs typeface="微软雅黑"/>
-            </a:endParaRPr>
-          </a:p>
-        </p:txBody>
-      </p:sp>
-      <p:sp>
-        <p:nvSpPr>
-          <p:cNvPr id="309" name="任意多边形 271"/>
-          <p:cNvSpPr>
-            <a:spLocks noGrp="1"/>
-          </p:cNvSpPr>
-          <p:nvPr/>
-        </p:nvSpPr>
-        <p:spPr>
-          <a:xfrm>
-            <a:off x="9486900" y="2495371"/>
-            <a:ext cx="2171700" cy="1877853"/>
-          </a:xfrm>
-          <a:custGeom>
-            <a:avLst/>
-            <a:gdLst/>
-            <a:ahLst/>
-            <a:cxnLst/>
-            <a:pathLst>
-              <a:path w="228" h="395">
-                <a:moveTo>
-                  <a:pt x="0" y="0"/>
-                </a:moveTo>
-                <a:lnTo>
-                  <a:pt x="228" y="0"/>
-                </a:lnTo>
-                <a:lnTo>
-                  <a:pt x="228" y="3"/>
-                </a:lnTo>
-                <a:lnTo>
-                  <a:pt x="0" y="3"/>
-                </a:lnTo>
-                <a:close/>
-              </a:path>
-            </a:pathLst>
-          </a:custGeom>
-          <a:solidFill>
-            <a:srgbClr val="08A6F6"/>
-          </a:solidFill>
-        </p:spPr>
-        <p:txBody>
-          <a:bodyPr/>
-          <a:lstStyle/>
-          <a:p/>
-        </p:txBody>
-      </p:sp>
-      <p:sp>
-        <p:nvSpPr>
-          <p:cNvPr id="310" name="文本框 272"/>
-          <p:cNvSpPr>
-            <a:spLocks noGrp="1"/>
-          </p:cNvSpPr>
-          <p:nvPr/>
-        </p:nvSpPr>
-        <p:spPr>
-          <a:xfrm>
-            <a:off x="9486900" y="2604706"/>
-            <a:ext cx="2171700" cy="342900"/>
-          </a:xfrm>
-          <a:prstGeom prst="rect">
-            <a:avLst/>
-          </a:prstGeom>
-        </p:spPr>
-        <p:txBody>
-          <a:bodyPr wrap="none" lIns="0" tIns="0" rIns="0" bIns="0"/>
-          <a:lstStyle/>
-          <a:p>
-            <a:pPr>
-              <a:lnSpc>
-                <a:spcPct val="100000"/>
-              </a:lnSpc>
-              <a:buNone/>
-            </a:pPr>
-            <a:r>
-              <a:rPr sz="2250" b="1">
-                <a:solidFill>
-                  <a:srgbClr val="08A6F6"/>
-                </a:solidFill>
-                <a:latin typeface="微软雅黑"/>
-                <a:ea typeface="微软雅黑"/>
-                <a:cs typeface="微软雅黑"/>
-              </a:rPr>
-              <a:t>3</a:t>
-            </a:r>
-            <a:endParaRPr sz="2250" b="1">
-              <a:solidFill>
-                <a:srgbClr val="08A6F6"/>
-              </a:solidFill>
-              <a:latin typeface="微软雅黑"/>
-              <a:ea typeface="微软雅黑"/>
-              <a:cs typeface="微软雅黑"/>
-            </a:endParaRPr>
-          </a:p>
-        </p:txBody>
-      </p:sp>
-      <p:sp>
-        <p:nvSpPr>
-          <p:cNvPr id="311" name="文本框 273"/>
-          <p:cNvSpPr>
-            <a:spLocks noGrp="1"/>
-          </p:cNvSpPr>
-          <p:nvPr/>
-        </p:nvSpPr>
-        <p:spPr>
-          <a:xfrm>
-            <a:off x="9486900" y="3004756"/>
-            <a:ext cx="2171700" cy="247650"/>
-          </a:xfrm>
-          <a:prstGeom prst="rect">
-            <a:avLst/>
-          </a:prstGeom>
-        </p:spPr>
-        <p:txBody>
-          <a:bodyPr wrap="none" lIns="0" tIns="0" rIns="0" bIns="0"/>
-          <a:lstStyle/>
-          <a:p>
-            <a:pPr>
-              <a:lnSpc>
-                <a:spcPct val="100000"/>
-              </a:lnSpc>
-              <a:buNone/>
-            </a:pPr>
-            <a:r>
-              <a:rPr sz="1575" b="1">
-                <a:solidFill>
-                  <a:srgbClr val="061F32"/>
-                </a:solidFill>
-                <a:latin typeface="微软雅黑"/>
-                <a:ea typeface="微软雅黑"/>
-                <a:cs typeface="微软雅黑"/>
-              </a:rPr>
-              <a:t>工具割裂</a:t>
-            </a:r>
-            <a:endParaRPr sz="1575" b="1">
-              <a:solidFill>
-                <a:srgbClr val="061F32"/>
-              </a:solidFill>
-              <a:latin typeface="微软雅黑"/>
-              <a:ea typeface="微软雅黑"/>
-              <a:cs typeface="微软雅黑"/>
-            </a:endParaRPr>
-          </a:p>
-        </p:txBody>
-      </p:sp>
-      <p:sp>
-        <p:nvSpPr>
-          <p:cNvPr id="312" name="文本框 274"/>
-          <p:cNvSpPr>
-            <a:spLocks noGrp="1"/>
-          </p:cNvSpPr>
-          <p:nvPr/>
-        </p:nvSpPr>
-        <p:spPr>
-          <a:xfrm>
-            <a:off x="9486900" y="3328606"/>
-            <a:ext cx="2171700" cy="876300"/>
-          </a:xfrm>
-          <a:prstGeom prst="rect">
-            <a:avLst/>
-          </a:prstGeom>
-        </p:spPr>
-        <p:txBody>
-          <a:bodyPr wrap="square" lIns="0" tIns="0" rIns="0" bIns="0">
-            <a:normAutofit/>
-          </a:bodyPr>
-          <a:lstStyle/>
-          <a:p>
-            <a:pPr>
-              <a:lnSpc>
-                <a:spcPct val="150000"/>
-              </a:lnSpc>
-              <a:buNone/>
-            </a:pPr>
-            <a:r>
-              <a:rPr sz="1275">
-                <a:solidFill>
-                  <a:srgbClr val="44546A"/>
-                </a:solidFill>
-                <a:latin typeface="微软雅黑"/>
-                <a:ea typeface="微软雅黑"/>
-                <a:cs typeface="微软雅黑"/>
-              </a:rPr>
-              <a:t>类器官药筛止于「敏感性」，很少转化为纵向校准的患者预测</a:t>
-            </a:r>
-            <a:endParaRPr sz="1275">
-              <a:solidFill>
-                <a:srgbClr val="44546A"/>
-              </a:solidFill>
-              <a:latin typeface="微软雅黑"/>
-              <a:ea typeface="微软雅黑"/>
-              <a:cs typeface="微软雅黑"/>
-            </a:endParaRPr>
-          </a:p>
-        </p:txBody>
-      </p:sp>
-      <p:sp>
-        <p:nvSpPr>
-          <p:cNvPr id="313" name="任意多边形 275"/>
-          <p:cNvSpPr>
-            <a:spLocks noGrp="1"/>
-          </p:cNvSpPr>
-          <p:nvPr/>
-        </p:nvSpPr>
-        <p:spPr>
-          <a:xfrm>
-            <a:off x="4838733" y="4747971"/>
-            <a:ext cx="6858000" cy="944432"/>
-          </a:xfrm>
-          <a:custGeom>
-            <a:avLst/>
-            <a:gdLst/>
-            <a:ahLst/>
-            <a:cxnLst/>
-            <a:pathLst>
-              <a:path w="720" h="44">
-                <a:moveTo>
-                  <a:pt x="0" y="0"/>
-                </a:moveTo>
-                <a:lnTo>
-                  <a:pt x="4" y="0"/>
-                </a:lnTo>
-                <a:lnTo>
-                  <a:pt x="4" y="44"/>
-                </a:lnTo>
-                <a:lnTo>
-                  <a:pt x="0" y="44"/>
-                </a:lnTo>
-                <a:close/>
-              </a:path>
-            </a:pathLst>
-          </a:custGeom>
-          <a:solidFill>
-            <a:srgbClr val="08A6F6"/>
-          </a:solidFill>
-        </p:spPr>
-        <p:txBody>
-          <a:bodyPr/>
-          <a:lstStyle/>
-          <a:p/>
-        </p:txBody>
-      </p:sp>
-      <p:sp>
-        <p:nvSpPr>
-          <p:cNvPr id="314" name="文本框 276"/>
-          <p:cNvSpPr>
-            <a:spLocks noGrp="1"/>
-          </p:cNvSpPr>
-          <p:nvPr/>
-        </p:nvSpPr>
-        <p:spPr>
-          <a:xfrm>
-            <a:off x="4962576" y="4663076"/>
-            <a:ext cx="6610350" cy="342900"/>
-          </a:xfrm>
-          <a:prstGeom prst="rect">
-            <a:avLst/>
-          </a:prstGeom>
-        </p:spPr>
-        <p:txBody>
-          <a:bodyPr wrap="none" lIns="0" tIns="0" rIns="0" bIns="0"/>
-          <a:lstStyle/>
-          <a:p>
-            <a:pPr>
-              <a:lnSpc>
-                <a:spcPct val="150000"/>
-              </a:lnSpc>
-              <a:buNone/>
-            </a:pPr>
-            <a:r>
-              <a:rPr sz="1500" b="1">
-                <a:solidFill>
-                  <a:srgbClr val="061F32">
-                    <a:alpha val="100000"/>
-                  </a:srgbClr>
-                </a:solidFill>
-                <a:latin typeface="微软雅黑"/>
-                <a:ea typeface="微软雅黑"/>
-                <a:cs typeface="微软雅黑"/>
-              </a:rPr>
-              <a:t>方向：</a:t>
-            </a:r>
-            <a:endParaRPr sz="1500" b="1">
-              <a:solidFill>
-                <a:srgbClr val="061F32">
-                  <a:alpha val="100000"/>
-                </a:srgbClr>
-              </a:solidFill>
-              <a:latin typeface="微软雅黑"/>
-              <a:ea typeface="微软雅黑"/>
-              <a:cs typeface="微软雅黑"/>
-            </a:endParaRPr>
-          </a:p>
-          <a:p>
-            <a:pPr>
-              <a:lnSpc>
-                <a:spcPct val="150000"/>
-              </a:lnSpc>
-              <a:buNone/>
-            </a:pPr>
-            <a:r>
-              <a:rPr sz="1500" b="1">
-                <a:solidFill>
-                  <a:srgbClr val="061F32">
-                    <a:alpha val="100000"/>
-                  </a:srgbClr>
-                </a:solidFill>
-                <a:latin typeface="微软雅黑"/>
-                <a:ea typeface="微软雅黑"/>
-                <a:cs typeface="微软雅黑"/>
-              </a:rPr>
-              <a:t>在</a:t>
-            </a:r>
-            <a:r>
-              <a:rPr lang="zh-CN" altLang="en-US" sz="1500" b="1">
-                <a:solidFill>
-                  <a:srgbClr val="061F32">
-                    <a:alpha val="100000"/>
-                  </a:srgbClr>
-                </a:solidFill>
-                <a:latin typeface="微软雅黑"/>
-                <a:ea typeface="微软雅黑"/>
-                <a:cs typeface="微软雅黑"/>
-              </a:rPr>
-              <a:t>临床</a:t>
-            </a:r>
-            <a:r>
-              <a:rPr sz="1500" b="1">
-                <a:solidFill>
-                  <a:srgbClr val="061F32">
-                    <a:alpha val="100000"/>
-                  </a:srgbClr>
-                </a:solidFill>
-                <a:latin typeface="微软雅黑"/>
-                <a:ea typeface="微软雅黑"/>
-                <a:cs typeface="微软雅黑"/>
-              </a:rPr>
-              <a:t>决策窗口</a:t>
-            </a:r>
-            <a:r>
-              <a:rPr lang="zh-CN" altLang="en-US" sz="1500" b="1">
-                <a:solidFill>
-                  <a:srgbClr val="061F32">
-                    <a:alpha val="100000"/>
-                  </a:srgbClr>
-                </a:solidFill>
-                <a:latin typeface="微软雅黑"/>
-                <a:ea typeface="微软雅黑"/>
-                <a:cs typeface="微软雅黑"/>
-              </a:rPr>
-              <a:t>期输出</a:t>
-            </a:r>
-            <a:r>
-              <a:rPr sz="1500" b="1">
-                <a:solidFill>
-                  <a:srgbClr val="061F32">
-                    <a:alpha val="100000"/>
-                  </a:srgbClr>
-                </a:solidFill>
-                <a:latin typeface="微软雅黑"/>
-                <a:ea typeface="微软雅黑"/>
-                <a:cs typeface="微软雅黑"/>
-              </a:rPr>
-              <a:t>患者特异性预测</a:t>
-            </a:r>
-            <a:r>
-              <a:rPr lang="zh-CN" altLang="en-US" sz="1500" b="1">
-                <a:solidFill>
-                  <a:srgbClr val="061F32">
-                    <a:alpha val="100000"/>
-                  </a:srgbClr>
-                </a:solidFill>
-                <a:latin typeface="微软雅黑"/>
-                <a:ea typeface="微软雅黑"/>
-                <a:cs typeface="微软雅黑"/>
-              </a:rPr>
-              <a:t>结果</a:t>
-            </a:r>
-            <a:r>
-              <a:rPr sz="1500" b="1">
-                <a:solidFill>
-                  <a:srgbClr val="061F32">
-                    <a:alpha val="100000"/>
-                  </a:srgbClr>
-                </a:solidFill>
-                <a:latin typeface="微软雅黑"/>
-                <a:ea typeface="微软雅黑"/>
-                <a:cs typeface="微软雅黑"/>
-              </a:rPr>
-              <a:t>，</a:t>
-            </a:r>
-            <a:endParaRPr sz="1500" b="1">
-              <a:solidFill>
-                <a:srgbClr val="061F32">
-                  <a:alpha val="100000"/>
-                </a:srgbClr>
-              </a:solidFill>
-              <a:latin typeface="微软雅黑"/>
-              <a:ea typeface="微软雅黑"/>
-              <a:cs typeface="微软雅黑"/>
-            </a:endParaRPr>
-          </a:p>
-          <a:p>
-            <a:pPr>
-              <a:lnSpc>
-                <a:spcPct val="150000"/>
-              </a:lnSpc>
-              <a:buNone/>
-            </a:pPr>
-            <a:r>
-              <a:rPr lang="zh-CN" altLang="en-US" sz="1500" b="1">
-                <a:solidFill>
-                  <a:srgbClr val="061F32">
-                    <a:alpha val="100000"/>
-                  </a:srgbClr>
-                </a:solidFill>
-                <a:latin typeface="微软雅黑"/>
-                <a:ea typeface="微软雅黑"/>
-                <a:cs typeface="微软雅黑"/>
-              </a:rPr>
-              <a:t>依托</a:t>
-            </a:r>
-            <a:r>
-              <a:rPr sz="1500" b="1">
-                <a:solidFill>
-                  <a:srgbClr val="061F32">
-                    <a:alpha val="100000"/>
-                  </a:srgbClr>
-                </a:solidFill>
-                <a:latin typeface="微软雅黑"/>
-                <a:ea typeface="微软雅黑"/>
-                <a:cs typeface="微软雅黑"/>
-              </a:rPr>
-              <a:t>真实</a:t>
-            </a:r>
-            <a:r>
-              <a:rPr lang="zh-CN" altLang="en-US" sz="1500" b="1">
-                <a:solidFill>
-                  <a:srgbClr val="061F32">
-                    <a:alpha val="100000"/>
-                  </a:srgbClr>
-                </a:solidFill>
-                <a:latin typeface="微软雅黑"/>
-                <a:ea typeface="微软雅黑"/>
-                <a:cs typeface="微软雅黑"/>
-              </a:rPr>
-              <a:t>临床</a:t>
-            </a:r>
-            <a:r>
-              <a:rPr sz="1500" b="1">
-                <a:solidFill>
-                  <a:srgbClr val="061F32">
-                    <a:alpha val="100000"/>
-                  </a:srgbClr>
-                </a:solidFill>
-                <a:latin typeface="微软雅黑"/>
-                <a:ea typeface="微软雅黑"/>
-                <a:cs typeface="微软雅黑"/>
-              </a:rPr>
-              <a:t>结局</a:t>
-            </a:r>
-            <a:r>
-              <a:rPr lang="zh-CN" altLang="en-US" sz="1500" b="1">
-                <a:solidFill>
-                  <a:srgbClr val="061F32">
-                    <a:alpha val="100000"/>
-                  </a:srgbClr>
-                </a:solidFill>
-                <a:latin typeface="微软雅黑"/>
-                <a:ea typeface="微软雅黑"/>
-                <a:cs typeface="微软雅黑"/>
-              </a:rPr>
-              <a:t>对模型</a:t>
-            </a:r>
-            <a:r>
-              <a:rPr sz="1500" b="1">
-                <a:solidFill>
-                  <a:srgbClr val="061F32">
-                    <a:alpha val="100000"/>
-                  </a:srgbClr>
-                </a:solidFill>
-                <a:latin typeface="微软雅黑"/>
-                <a:ea typeface="微软雅黑"/>
-                <a:cs typeface="微软雅黑"/>
-              </a:rPr>
-              <a:t>持续校准</a:t>
-            </a:r>
-            <a:r>
-              <a:rPr lang="zh-CN" altLang="en-US" sz="1500" b="1">
-                <a:solidFill>
-                  <a:srgbClr val="061F32">
-                    <a:alpha val="100000"/>
-                  </a:srgbClr>
-                </a:solidFill>
-                <a:latin typeface="微软雅黑"/>
-                <a:ea typeface="微软雅黑"/>
-                <a:cs typeface="微软雅黑"/>
-              </a:rPr>
-              <a:t>迭代</a:t>
-            </a:r>
-            <a:r>
-              <a:rPr sz="1500" b="1">
-                <a:solidFill>
-                  <a:srgbClr val="061F32">
-                    <a:alpha val="100000"/>
-                  </a:srgbClr>
-                </a:solidFill>
-                <a:latin typeface="微软雅黑"/>
-                <a:ea typeface="微软雅黑"/>
-                <a:cs typeface="微软雅黑"/>
-              </a:rPr>
-              <a:t>。
-</a:t>
-            </a:r>
-            <a:endParaRPr sz="1500" b="1">
-              <a:solidFill>
-                <a:srgbClr val="061F32">
-                  <a:alpha val="100000"/>
-                </a:srgbClr>
-              </a:solidFill>
-              <a:latin typeface="微软雅黑"/>
-              <a:ea typeface="微软雅黑"/>
-              <a:cs typeface="微软雅黑"/>
-            </a:endParaRPr>
-          </a:p>
-          <a:p>
-            <a:pPr>
-              <a:lnSpc>
-                <a:spcPct val="150000"/>
-              </a:lnSpc>
-              <a:buNone/>
-            </a:pPr>
-            <a:endParaRPr sz="1500" b="1">
-              <a:solidFill>
-                <a:srgbClr val="061F32">
-                  <a:alpha val="100000"/>
-                </a:srgbClr>
-              </a:solidFill>
-              <a:latin typeface="微软雅黑"/>
-              <a:ea typeface="微软雅黑"/>
-              <a:cs typeface="微软雅黑"/>
-            </a:endParaRPr>
-          </a:p>
-        </p:txBody>
-      </p:sp>
-      <p:sp>
-        <p:nvSpPr>
-          <p:cNvPr id="315" name="文本框 277"/>
-          <p:cNvSpPr>
-            <a:spLocks noGrp="1"/>
-          </p:cNvSpPr>
-          <p:nvPr/>
-        </p:nvSpPr>
-        <p:spPr>
-          <a:xfrm>
-            <a:off x="533400" y="6381750"/>
-            <a:ext cx="4886325" cy="161925"/>
-          </a:xfrm>
-          <a:prstGeom prst="rect">
-            <a:avLst/>
-          </a:prstGeom>
-        </p:spPr>
-        <p:txBody>
-          <a:bodyPr wrap="none" lIns="0" tIns="0" rIns="0" bIns="0"/>
-          <a:lstStyle/>
-          <a:p>
-            <a:pPr>
-              <a:lnSpc>
-                <a:spcPct val="100000"/>
-              </a:lnSpc>
-              <a:buNone/>
-            </a:pPr>
-            <a:r>
-              <a:rPr sz="1050">
-                <a:solidFill>
-                  <a:srgbClr val="808080"/>
-                </a:solidFill>
-                <a:latin typeface="微软雅黑"/>
-                <a:ea typeface="微软雅黑"/>
-                <a:cs typeface="微软雅黑"/>
-              </a:rPr>
-              <a:t>Source: AIVC </a:t>
-            </a:r>
-            <a:r>
-              <a:rPr sz="1050">
-                <a:solidFill>
-                  <a:srgbClr val="808080"/>
-                </a:solidFill>
-                <a:latin typeface="微软雅黑"/>
-                <a:ea typeface="微软雅黑"/>
-                <a:cs typeface="微软雅黑"/>
-              </a:rPr>
-              <a:t>商业故事</a:t>
-            </a:r>
-            <a:r>
-              <a:rPr sz="1050">
-                <a:solidFill>
-                  <a:srgbClr val="808080"/>
-                </a:solidFill>
-                <a:latin typeface="微软雅黑"/>
-                <a:ea typeface="微软雅黑"/>
-                <a:cs typeface="微软雅黑"/>
-              </a:rPr>
-              <a:t> BP §2.2</a:t>
-            </a:r>
-            <a:r>
-              <a:rPr sz="1050">
-                <a:solidFill>
-                  <a:srgbClr val="808080"/>
-                </a:solidFill>
-                <a:latin typeface="微软雅黑"/>
-                <a:ea typeface="微软雅黑"/>
-                <a:cs typeface="微软雅黑"/>
-              </a:rPr>
-              <a:t>；</a:t>
-            </a:r>
-            <a:r>
-              <a:rPr sz="1050">
-                <a:solidFill>
-                  <a:srgbClr val="808080"/>
-                </a:solidFill>
-                <a:latin typeface="微软雅黑"/>
-                <a:ea typeface="微软雅黑"/>
-                <a:cs typeface="微软雅黑"/>
-              </a:rPr>
-              <a:t>Peng et al., Cell Stem Cell 32, 652–669 (2025)</a:t>
-            </a:r>
-            <a:endParaRPr sz="1050">
-              <a:solidFill>
-                <a:srgbClr val="808080"/>
-              </a:solidFill>
-              <a:latin typeface="微软雅黑"/>
-              <a:ea typeface="微软雅黑"/>
-              <a:cs typeface="微软雅黑"/>
-            </a:endParaRPr>
-          </a:p>
-        </p:txBody>
-      </p:sp>
-      <p:sp>
-        <p:nvSpPr>
-          <p:cNvPr id="316" name="文本框 278"/>
-          <p:cNvSpPr>
-            <a:spLocks noGrp="1"/>
-          </p:cNvSpPr>
-          <p:nvPr/>
-        </p:nvSpPr>
-        <p:spPr>
-          <a:xfrm>
-            <a:off x="11201400" y="6381750"/>
-            <a:ext cx="457200" cy="161925"/>
-          </a:xfrm>
-          <a:prstGeom prst="rect">
-            <a:avLst/>
-          </a:prstGeom>
-        </p:spPr>
-        <p:txBody>
-          <a:bodyPr wrap="none" lIns="0" tIns="0" rIns="0" bIns="0"/>
-          <a:lstStyle/>
-          <a:p>
-            <a:pPr>
-              <a:lnSpc>
-                <a:spcPct val="100000"/>
-              </a:lnSpc>
-              <a:buNone/>
-            </a:pPr>
-            <a:r>
-              <a:rPr sz="1050">
-                <a:solidFill>
-                  <a:srgbClr val="808080"/>
-                </a:solidFill>
-                <a:latin typeface="微软雅黑"/>
-                <a:ea typeface="微软雅黑"/>
-                <a:cs typeface="微软雅黑"/>
-              </a:rPr>
-              <a:t>05 / 08</a:t>
-            </a:r>
-            <a:endParaRPr sz="1050">
-              <a:solidFill>
-                <a:srgbClr val="808080"/>
-              </a:solidFill>
-              <a:latin typeface="微软雅黑"/>
-              <a:ea typeface="微软雅黑"/>
-              <a:cs typeface="微软雅黑"/>
-            </a:endParaRPr>
-          </a:p>
-        </p:txBody>
-      </p:sp>
-    </p:spTree>
-  </p:cSld>
-  <p:clrMapOvr>
-    <a:masterClrMapping/>
-  </p:clrMapOvr>
-</p:sld>
-</file>
-
 <file path=ppt/slides/slide7.xml><?xml version="1.0" encoding="utf-8"?>
 <p:sld xmlns:a="http://schemas.openxmlformats.org/drawingml/2006/main" xmlns:r="http://schemas.openxmlformats.org/officeDocument/2006/relationships" xmlns:p="http://schemas.openxmlformats.org/presentationml/2006/main">
   <p:cSld>
@@ -9631,6 +8246,201 @@
             <a:endParaRPr sz="1050">
               <a:solidFill>
                 <a:srgbClr val="808080"/>
+              </a:solidFill>
+              <a:latin typeface="微软雅黑"/>
+              <a:ea typeface="微软雅黑"/>
+              <a:cs typeface="微软雅黑"/>
+            </a:endParaRPr>
+          </a:p>
+        </p:txBody>
+      </p:sp>
+    </p:spTree>
+  </p:cSld>
+  <p:clrMapOvr>
+    <a:masterClrMapping/>
+  </p:clrMapOvr>
+</p:sld>
+</file>
+
+<file path=ppt/slides/slide8.xml><?xml version="1.0" encoding="utf-8"?>
+<p:sld xmlns:a="http://schemas.openxmlformats.org/drawingml/2006/main" xmlns:r="http://schemas.openxmlformats.org/officeDocument/2006/relationships" xmlns:p="http://schemas.openxmlformats.org/presentationml/2006/main">
+  <p:cSld>
+    <p:spTree>
+      <p:nvGrpSpPr>
+        <p:cNvPr id="1" name=""/>
+        <p:cNvGrpSpPr/>
+        <p:nvPr/>
+      </p:nvGrpSpPr>
+      <p:grpSpPr/>
+      <p:sp>
+        <p:nvSpPr>
+          <p:cNvPr id="374" name="矩形 308"/>
+          <p:cNvSpPr>
+            <a:spLocks noGrp="1"/>
+          </p:cNvSpPr>
+          <p:nvPr/>
+        </p:nvSpPr>
+        <p:spPr>
+          <a:xfrm>
+            <a:off x="0" y="0"/>
+            <a:ext cx="12192000" cy="6858000"/>
+          </a:xfrm>
+          <a:prstGeom prst="rect">
+            <a:avLst/>
+          </a:prstGeom>
+          <a:solidFill>
+            <a:srgbClr val="062032"/>
+          </a:solidFill>
+        </p:spPr>
+        <p:txBody>
+          <a:bodyPr/>
+          <a:lstStyle/>
+          <a:p/>
+        </p:txBody>
+      </p:sp>
+      <p:sp>
+        <p:nvSpPr>
+          <p:cNvPr id="375" name="文本框 309"/>
+          <p:cNvSpPr>
+            <a:spLocks noGrp="1"/>
+          </p:cNvSpPr>
+          <p:nvPr/>
+        </p:nvSpPr>
+        <p:spPr>
+          <a:xfrm>
+            <a:off x="4429125" y="2981325"/>
+            <a:ext cx="2447925" cy="533400"/>
+          </a:xfrm>
+          <a:prstGeom prst="rect">
+            <a:avLst/>
+          </a:prstGeom>
+        </p:spPr>
+        <p:txBody>
+          <a:bodyPr wrap="none" lIns="0" tIns="0" rIns="0" bIns="0"/>
+          <a:lstStyle/>
+          <a:p>
+            <a:pPr>
+              <a:lnSpc>
+                <a:spcPct val="100000"/>
+              </a:lnSpc>
+              <a:buNone/>
+            </a:pPr>
+            <a:r>
+              <a:rPr sz="3450" b="1">
+                <a:solidFill>
+                  <a:srgbClr val="FFFFFF"/>
+                </a:solidFill>
+                <a:latin typeface="微软雅黑"/>
+                <a:ea typeface="微软雅黑"/>
+                <a:cs typeface="微软雅黑"/>
+              </a:rPr>
+              <a:t>技术壁垒与团队</a:t>
+            </a:r>
+            <a:endParaRPr sz="3450" b="1">
+              <a:solidFill>
+                <a:srgbClr val="FFFFFF"/>
+              </a:solidFill>
+              <a:latin typeface="微软雅黑"/>
+              <a:ea typeface="微软雅黑"/>
+              <a:cs typeface="微软雅黑"/>
+            </a:endParaRPr>
+          </a:p>
+        </p:txBody>
+      </p:sp>
+      <p:sp>
+        <p:nvSpPr>
+          <p:cNvPr id="376" name="文本框 310"/>
+          <p:cNvSpPr>
+            <a:spLocks noGrp="1"/>
+          </p:cNvSpPr>
+          <p:nvPr/>
+        </p:nvSpPr>
+        <p:spPr>
+          <a:xfrm>
+            <a:off x="4429125" y="3648075"/>
+            <a:ext cx="2447925" cy="228600"/>
+          </a:xfrm>
+          <a:prstGeom prst="rect">
+            <a:avLst/>
+          </a:prstGeom>
+        </p:spPr>
+        <p:txBody>
+          <a:bodyPr wrap="none" lIns="0" tIns="0" rIns="0" bIns="0"/>
+          <a:lstStyle/>
+          <a:p>
+            <a:pPr>
+              <a:lnSpc>
+                <a:spcPct val="100000"/>
+              </a:lnSpc>
+              <a:buNone/>
+            </a:pPr>
+            <a:r>
+              <a:rPr sz="1500" spc="225">
+                <a:solidFill>
+                  <a:srgbClr val="99BDED"/>
+                </a:solidFill>
+                <a:latin typeface="微软雅黑"/>
+                <a:ea typeface="微软雅黑"/>
+                <a:cs typeface="微软雅黑"/>
+              </a:rPr>
+              <a:t>WHY WE CAN WIN</a:t>
+            </a:r>
+            <a:endParaRPr sz="1500" spc="225">
+              <a:solidFill>
+                <a:srgbClr val="99BDED"/>
+              </a:solidFill>
+              <a:latin typeface="微软雅黑"/>
+              <a:ea typeface="微软雅黑"/>
+              <a:cs typeface="微软雅黑"/>
+            </a:endParaRPr>
+          </a:p>
+        </p:txBody>
+      </p:sp>
+      <p:sp>
+        <p:nvSpPr>
+          <p:cNvPr id="377" name="文本框 311"/>
+          <p:cNvSpPr>
+            <a:spLocks noGrp="1"/>
+          </p:cNvSpPr>
+          <p:nvPr/>
+        </p:nvSpPr>
+        <p:spPr>
+          <a:xfrm>
+            <a:off x="685800" y="1943100"/>
+            <a:ext cx="3057525" cy="2971800"/>
+          </a:xfrm>
+          <a:prstGeom prst="rect">
+            <a:avLst/>
+          </a:prstGeom>
+        </p:spPr>
+        <p:txBody>
+          <a:bodyPr wrap="none" lIns="0" tIns="0" rIns="0" bIns="0"/>
+          <a:lstStyle/>
+          <a:p>
+            <a:pPr>
+              <a:lnSpc>
+                <a:spcPct val="100000"/>
+              </a:lnSpc>
+              <a:buNone/>
+            </a:pPr>
+            <a:r>
+              <a:rPr sz="19500" b="1">
+                <a:solidFill>
+                  <a:srgbClr val="FFFFFF">
+                    <a:alpha val="12000"/>
+                  </a:srgbClr>
+                </a:solidFill>
+                <a:latin typeface="微软雅黑"/>
+                <a:ea typeface="微软雅黑"/>
+                <a:cs typeface="微软雅黑"/>
+              </a:rPr>
+              <a:t>02</a:t>
+            </a:r>
+            <a:endParaRPr sz="19500" b="1">
+              <a:solidFill>
+                <a:srgbClr val="FFFFFF">
+                  <a:alpha val="12000"/>
+                </a:srgbClr>
               </a:solidFill>
               <a:latin typeface="微软雅黑"/>
               <a:ea typeface="微软雅黑"/>

--- a/slides/Vitoma_BP_part1_team.pptx
+++ b/slides/Vitoma_BP_part1_team.pptx
@@ -1746,8 +1746,8 @@
         </p:nvSpPr>
         <p:spPr>
           <a:xfrm>
-            <a:off x="1109853" y="1097280"/>
-            <a:ext cx="1417320" cy="1417320"/>
+            <a:off x="1247013" y="1024128"/>
+            <a:ext cx="1143000" cy="1143000"/>
           </a:xfrm>
           <a:prstGeom prst="ellipse">
             <a:avLst/>
@@ -1767,7 +1767,7 @@
           <a:p>
             <a:pPr algn="ctr">
               <a:lnSpc>
-                <a:spcPct val="115000"/>
+                <a:spcPct val="112000"/>
               </a:lnSpc>
               <a:buNone/>
             </a:pPr>
@@ -1793,8 +1793,8 @@
         </p:nvSpPr>
         <p:spPr>
           <a:xfrm>
-            <a:off x="530352" y="2651760"/>
-            <a:ext cx="2576322" cy="347472"/>
+            <a:off x="530352" y="2240280"/>
+            <a:ext cx="2576322" cy="329184"/>
           </a:xfrm>
           <a:prstGeom prst="rect">
             <a:avLst/>
@@ -1809,7 +1809,7 @@
           <a:p>
             <a:pPr algn="ctr">
               <a:lnSpc>
-                <a:spcPct val="115000"/>
+                <a:spcPct val="112000"/>
               </a:lnSpc>
               <a:buNone/>
             </a:pPr>
@@ -1835,8 +1835,8 @@
         </p:nvSpPr>
         <p:spPr>
           <a:xfrm>
-            <a:off x="530352" y="2999232"/>
-            <a:ext cx="2576322" cy="292608"/>
+            <a:off x="530352" y="2560320"/>
+            <a:ext cx="2576322" cy="274320"/>
           </a:xfrm>
           <a:prstGeom prst="rect">
             <a:avLst/>
@@ -1851,7 +1851,7 @@
           <a:p>
             <a:pPr algn="ctr">
               <a:lnSpc>
-                <a:spcPct val="115000"/>
+                <a:spcPct val="112000"/>
               </a:lnSpc>
               <a:buNone/>
             </a:pPr>
@@ -1871,14 +1871,56 @@
       </p:sp>
       <p:sp>
         <p:nvSpPr>
-          <p:cNvPr id="304" name="经历 1"/>
+          <p:cNvPr id="304" name="亮点 1"/>
           <p:cNvSpPr txBox="1"/>
           <p:nvPr/>
         </p:nvSpPr>
         <p:spPr>
           <a:xfrm>
-            <a:off x="621792" y="3474720"/>
-            <a:ext cx="2439162" cy="2788920"/>
+            <a:off x="530352" y="2852928"/>
+            <a:ext cx="2576322" cy="256032"/>
+          </a:xfrm>
+          <a:prstGeom prst="rect">
+            <a:avLst/>
+          </a:prstGeom>
+          <a:noFill/>
+        </p:spPr>
+        <p:txBody>
+          <a:bodyPr wrap="square" lIns="0" tIns="0" rIns="0" bIns="0" anchor="ctr">
+            <a:noAutofit/>
+          </a:bodyPr>
+          <a:lstStyle/>
+          <a:p>
+            <a:pPr algn="ctr">
+              <a:lnSpc>
+                <a:spcPct val="112000"/>
+              </a:lnSpc>
+              <a:buNone/>
+            </a:pPr>
+            <a:r>
+              <a:rPr lang="zh-CN" altLang="en-US" sz="1050">
+                <a:solidFill>
+                  <a:srgbClr val="44546A"/>
+                </a:solidFill>
+                <a:latin typeface="微软雅黑"/>
+                <a:ea typeface="微软雅黑"/>
+                <a:cs typeface="微软雅黑"/>
+              </a:rPr>
+              <a:t>湿实验 × 数据 × AI，全链路打通</a:t>
+            </a:r>
+          </a:p>
+        </p:txBody>
+      </p:sp>
+      <p:sp>
+        <p:nvSpPr>
+          <p:cNvPr id="305" name="经历 1"/>
+          <p:cNvSpPr txBox="1"/>
+          <p:nvPr/>
+        </p:nvSpPr>
+        <p:spPr>
+          <a:xfrm>
+            <a:off x="603504" y="3246120"/>
+            <a:ext cx="2484882" cy="3063240"/>
           </a:xfrm>
           <a:prstGeom prst="rect">
             <a:avLst/>
@@ -1893,10 +1935,10 @@
           <a:p>
             <a:pPr algn="l" marL="171450" indent="-171450">
               <a:lnSpc>
-                <a:spcPct val="115000"/>
+                <a:spcPct val="112000"/>
               </a:lnSpc>
               <a:spcAft>
-                <a:spcPts val="400"/>
+                <a:spcPts val="300"/>
               </a:spcAft>
               <a:buClr>
                 <a:srgbClr val="08A6F6"/>
@@ -1905,7 +1947,18 @@
               <a:buChar char="•"/>
             </a:pPr>
             <a:r>
-              <a:rPr lang="zh-CN" altLang="en-US" sz="1100">
+              <a:rPr lang="zh-CN" altLang="en-US" sz="1000" b="1">
+                <a:solidFill>
+                  <a:srgbClr val="061F32"/>
+                </a:solidFill>
+                <a:latin typeface="微软雅黑"/>
+                <a:ea typeface="微软雅黑"/>
+                <a:cs typeface="微软雅黑"/>
+              </a:rPr>
+              <a:t>Verqura 实验室管理系统创始人</a:t>
+            </a:r>
+            <a:r>
+              <a:rPr lang="zh-CN" altLang="en-US" sz="1000">
                 <a:solidFill>
                   <a:srgbClr val="44546A"/>
                 </a:solidFill>
@@ -1913,16 +1966,16 @@
                 <a:ea typeface="微软雅黑"/>
                 <a:cs typeface="微软雅黑"/>
               </a:rPr>
-              <a:t>海德堡大学/DKFZ 发育生物学博士</a:t>
+              <a:t>：打通样本、实验与数据管理</a:t>
             </a:r>
           </a:p>
           <a:p>
             <a:pPr algn="l" marL="171450" indent="-171450">
               <a:lnSpc>
-                <a:spcPct val="115000"/>
+                <a:spcPct val="112000"/>
               </a:lnSpc>
               <a:spcAft>
-                <a:spcPts val="400"/>
+                <a:spcPts val="300"/>
               </a:spcAft>
               <a:buClr>
                 <a:srgbClr val="08A6F6"/>
@@ -1931,7 +1984,18 @@
               <a:buChar char="•"/>
             </a:pPr>
             <a:r>
-              <a:rPr lang="zh-CN" altLang="en-US" sz="1100">
+              <a:rPr lang="zh-CN" altLang="en-US" sz="1000" b="1">
+                <a:solidFill>
+                  <a:srgbClr val="061F32"/>
+                </a:solidFill>
+                <a:latin typeface="微软雅黑"/>
+                <a:ea typeface="微软雅黑"/>
+                <a:cs typeface="微软雅黑"/>
+              </a:rPr>
+              <a:t>Cell Stem Cell 2025、npj Precision Oncology 2024 作者</a:t>
+            </a:r>
+            <a:r>
+              <a:rPr lang="zh-CN" altLang="en-US" sz="1000">
                 <a:solidFill>
                   <a:srgbClr val="44546A"/>
                 </a:solidFill>
@@ -1939,16 +2003,16 @@
                 <a:ea typeface="微软雅黑"/>
                 <a:cs typeface="微软雅黑"/>
               </a:rPr>
-              <a:t>密歇根大学安娜堡分校学士</a:t>
+              <a:t>（类器官预测患者治疗响应）</a:t>
             </a:r>
           </a:p>
           <a:p>
             <a:pPr algn="l" marL="171450" indent="-171450">
               <a:lnSpc>
-                <a:spcPct val="115000"/>
+                <a:spcPct val="112000"/>
               </a:lnSpc>
               <a:spcAft>
-                <a:spcPts val="400"/>
+                <a:spcPts val="300"/>
               </a:spcAft>
               <a:buClr>
                 <a:srgbClr val="08A6F6"/>
@@ -1957,7 +2021,18 @@
               <a:buChar char="•"/>
             </a:pPr>
             <a:r>
-              <a:rPr lang="zh-CN" altLang="en-US" sz="1100">
+              <a:rPr lang="zh-CN" altLang="en-US" sz="1000" b="1">
+                <a:solidFill>
+                  <a:srgbClr val="061F32"/>
+                </a:solidFill>
+                <a:latin typeface="微软雅黑"/>
+                <a:ea typeface="微软雅黑"/>
+                <a:cs typeface="微软雅黑"/>
+              </a:rPr>
+              <a:t>精通 iPSC 脑类器官构建</a:t>
+            </a:r>
+            <a:r>
+              <a:rPr lang="zh-CN" altLang="en-US" sz="1000">
                 <a:solidFill>
                   <a:srgbClr val="44546A"/>
                 </a:solidFill>
@@ -1965,16 +2040,16 @@
                 <a:ea typeface="微软雅黑"/>
                 <a:cs typeface="微软雅黑"/>
               </a:rPr>
-              <a:t>Verqura 实验室管理系统创始人</a:t>
+              <a:t>，引进 Pașca 团队分化方案；CRISPR 基因组编辑</a:t>
             </a:r>
           </a:p>
           <a:p>
             <a:pPr algn="l" marL="171450" indent="-171450">
               <a:lnSpc>
-                <a:spcPct val="115000"/>
+                <a:spcPct val="112000"/>
               </a:lnSpc>
               <a:spcAft>
-                <a:spcPts val="400"/>
+                <a:spcPts val="300"/>
               </a:spcAft>
               <a:buClr>
                 <a:srgbClr val="08A6F6"/>
@@ -1983,7 +2058,18 @@
               <a:buChar char="•"/>
             </a:pPr>
             <a:r>
-              <a:rPr lang="zh-CN" altLang="en-US" sz="1100">
+              <a:rPr lang="zh-CN" altLang="en-US" sz="1000" b="1">
+                <a:solidFill>
+                  <a:srgbClr val="061F32"/>
+                </a:solidFill>
+                <a:latin typeface="微软雅黑"/>
+                <a:ea typeface="微软雅黑"/>
+                <a:cs typeface="微软雅黑"/>
+              </a:rPr>
+              <a:t>单细胞 RNA / ATAC 测序分析</a:t>
+            </a:r>
+            <a:r>
+              <a:rPr lang="zh-CN" altLang="en-US" sz="1000">
                 <a:solidFill>
                   <a:srgbClr val="44546A"/>
                 </a:solidFill>
@@ -1991,16 +2077,16 @@
                 <a:ea typeface="微软雅黑"/>
                 <a:cs typeface="微软雅黑"/>
               </a:rPr>
-              <a:t>精通 iPSC 脑类器官构建、CRISPR 基因组编辑与标记</a:t>
+              <a:t>；训练 YOLO / Cellpose 图像 AI 模型</a:t>
             </a:r>
           </a:p>
           <a:p>
             <a:pPr algn="l" marL="171450" indent="-171450">
               <a:lnSpc>
-                <a:spcPct val="115000"/>
+                <a:spcPct val="112000"/>
               </a:lnSpc>
               <a:spcAft>
-                <a:spcPts val="400"/>
+                <a:spcPts val="300"/>
               </a:spcAft>
               <a:buClr>
                 <a:srgbClr val="08A6F6"/>
@@ -2009,7 +2095,18 @@
               <a:buChar char="•"/>
             </a:pPr>
             <a:r>
-              <a:rPr lang="zh-CN" altLang="en-US" sz="1100">
+              <a:rPr lang="zh-CN" altLang="en-US" sz="1000" b="1">
+                <a:solidFill>
+                  <a:srgbClr val="061F32"/>
+                </a:solidFill>
+                <a:latin typeface="微软雅黑"/>
+                <a:ea typeface="微软雅黑"/>
+                <a:cs typeface="微软雅黑"/>
+              </a:rPr>
+              <a:t>海德堡大学 / DKFZ 发育生物学博士</a:t>
+            </a:r>
+            <a:r>
+              <a:rPr lang="zh-CN" altLang="en-US" sz="1000">
                 <a:solidFill>
                   <a:srgbClr val="44546A"/>
                 </a:solidFill>
@@ -2017,47 +2114,21 @@
                 <a:ea typeface="微软雅黑"/>
                 <a:cs typeface="微软雅黑"/>
               </a:rPr>
-              <a:t>单细胞测序与 AI 图像分析（YOLO / Cellpose）</a:t>
-            </a:r>
-          </a:p>
-          <a:p>
-            <a:pPr algn="l" marL="171450" indent="-171450">
-              <a:lnSpc>
-                <a:spcPct val="115000"/>
-              </a:lnSpc>
-              <a:spcAft>
-                <a:spcPts val="400"/>
-              </a:spcAft>
-              <a:buClr>
-                <a:srgbClr val="08A6F6"/>
-              </a:buClr>
-              <a:buFont typeface="Arial"/>
-              <a:buChar char="•"/>
-            </a:pPr>
-            <a:r>
-              <a:rPr lang="zh-CN" altLang="en-US" sz="1100">
-                <a:solidFill>
-                  <a:srgbClr val="44546A"/>
-                </a:solidFill>
-                <a:latin typeface="微软雅黑"/>
-                <a:ea typeface="微软雅黑"/>
-                <a:cs typeface="微软雅黑"/>
-              </a:rPr>
-              <a:t>Cell Stem Cell 2025、npj Precision Oncology 2024 作者</a:t>
-            </a:r>
-          </a:p>
-        </p:txBody>
-      </p:sp>
-      <p:sp>
-        <p:nvSpPr>
-          <p:cNvPr id="305" name="照片 2"/>
+              <a:t>；密歇根大学安娜堡分校学士；亥姆霍兹研究生院奖学金</a:t>
+            </a:r>
+          </a:p>
+        </p:txBody>
+      </p:sp>
+      <p:sp>
+        <p:nvSpPr>
+          <p:cNvPr id="306" name="照片 2"/>
           <p:cNvSpPr/>
           <p:nvPr/>
         </p:nvSpPr>
         <p:spPr>
           <a:xfrm>
-            <a:off x="3960495" y="1097280"/>
-            <a:ext cx="1417320" cy="1417320"/>
+            <a:off x="4097655" y="1024128"/>
+            <a:ext cx="1143000" cy="1143000"/>
           </a:xfrm>
           <a:prstGeom prst="ellipse">
             <a:avLst/>
@@ -2077,7 +2148,7 @@
           <a:p>
             <a:pPr algn="ctr">
               <a:lnSpc>
-                <a:spcPct val="115000"/>
+                <a:spcPct val="112000"/>
               </a:lnSpc>
               <a:buNone/>
             </a:pPr>
@@ -2097,14 +2168,14 @@
       </p:sp>
       <p:sp>
         <p:nvSpPr>
-          <p:cNvPr id="306" name="姓名 2"/>
+          <p:cNvPr id="307" name="姓名 2"/>
           <p:cNvSpPr txBox="1"/>
           <p:nvPr/>
         </p:nvSpPr>
         <p:spPr>
           <a:xfrm>
-            <a:off x="3380994" y="2651760"/>
-            <a:ext cx="2576322" cy="347472"/>
+            <a:off x="3380994" y="2240280"/>
+            <a:ext cx="2576322" cy="329184"/>
           </a:xfrm>
           <a:prstGeom prst="rect">
             <a:avLst/>
@@ -2119,7 +2190,7 @@
           <a:p>
             <a:pPr algn="ctr">
               <a:lnSpc>
-                <a:spcPct val="115000"/>
+                <a:spcPct val="112000"/>
               </a:lnSpc>
               <a:buNone/>
             </a:pPr>
@@ -2139,14 +2210,14 @@
       </p:sp>
       <p:sp>
         <p:nvSpPr>
-          <p:cNvPr id="307" name="职位 2"/>
+          <p:cNvPr id="308" name="职位 2"/>
           <p:cNvSpPr txBox="1"/>
           <p:nvPr/>
         </p:nvSpPr>
         <p:spPr>
           <a:xfrm>
-            <a:off x="3380994" y="2999232"/>
-            <a:ext cx="2576322" cy="292608"/>
+            <a:off x="3380994" y="2560320"/>
+            <a:ext cx="2576322" cy="274320"/>
           </a:xfrm>
           <a:prstGeom prst="rect">
             <a:avLst/>
@@ -2161,7 +2232,7 @@
           <a:p>
             <a:pPr algn="ctr">
               <a:lnSpc>
-                <a:spcPct val="115000"/>
+                <a:spcPct val="112000"/>
               </a:lnSpc>
               <a:buNone/>
             </a:pPr>
@@ -2181,14 +2252,56 @@
       </p:sp>
       <p:sp>
         <p:nvSpPr>
-          <p:cNvPr id="308" name="经历 2"/>
+          <p:cNvPr id="309" name="亮点 2"/>
           <p:cNvSpPr txBox="1"/>
           <p:nvPr/>
         </p:nvSpPr>
         <p:spPr>
           <a:xfrm>
-            <a:off x="3472434" y="3474720"/>
-            <a:ext cx="2439162" cy="2788920"/>
+            <a:off x="3380994" y="2852928"/>
+            <a:ext cx="2576322" cy="256032"/>
+          </a:xfrm>
+          <a:prstGeom prst="rect">
+            <a:avLst/>
+          </a:prstGeom>
+          <a:noFill/>
+        </p:spPr>
+        <p:txBody>
+          <a:bodyPr wrap="square" lIns="0" tIns="0" rIns="0" bIns="0" anchor="ctr">
+            <a:noAutofit/>
+          </a:bodyPr>
+          <a:lstStyle/>
+          <a:p>
+            <a:pPr algn="ctr">
+              <a:lnSpc>
+                <a:spcPct val="112000"/>
+              </a:lnSpc>
+              <a:buNone/>
+            </a:pPr>
+            <a:r>
+              <a:rPr lang="zh-CN" altLang="en-US" sz="1050">
+                <a:solidFill>
+                  <a:srgbClr val="44546A"/>
+                </a:solidFill>
+                <a:latin typeface="微软雅黑"/>
+                <a:ea typeface="微软雅黑"/>
+                <a:cs typeface="微软雅黑"/>
+              </a:rPr>
+              <a:t>神经科学 × 脑类器官 × 产业转化</a:t>
+            </a:r>
+          </a:p>
+        </p:txBody>
+      </p:sp>
+      <p:sp>
+        <p:nvSpPr>
+          <p:cNvPr id="310" name="经历 2"/>
+          <p:cNvSpPr txBox="1"/>
+          <p:nvPr/>
+        </p:nvSpPr>
+        <p:spPr>
+          <a:xfrm>
+            <a:off x="3454146" y="3246120"/>
+            <a:ext cx="2484882" cy="3063240"/>
           </a:xfrm>
           <a:prstGeom prst="rect">
             <a:avLst/>
@@ -2203,10 +2316,10 @@
           <a:p>
             <a:pPr algn="l" marL="171450" indent="-171450">
               <a:lnSpc>
-                <a:spcPct val="115000"/>
+                <a:spcPct val="112000"/>
               </a:lnSpc>
               <a:spcAft>
-                <a:spcPts val="400"/>
+                <a:spcPts val="300"/>
               </a:spcAft>
               <a:buClr>
                 <a:srgbClr val="08A6F6"/>
@@ -2215,7 +2328,18 @@
               <a:buChar char="•"/>
             </a:pPr>
             <a:r>
-              <a:rPr lang="zh-CN" altLang="en-US" sz="1100">
+              <a:rPr lang="zh-CN" altLang="en-US" sz="1000" b="1">
+                <a:solidFill>
+                  <a:srgbClr val="061F32"/>
+                </a:solidFill>
+                <a:latin typeface="微软雅黑"/>
+                <a:ea typeface="微软雅黑"/>
+                <a:cs typeface="微软雅黑"/>
+              </a:rPr>
+              <a:t>霍英东杰出青年学者</a:t>
+            </a:r>
+            <a:r>
+              <a:rPr lang="zh-CN" altLang="en-US" sz="1000">
                 <a:solidFill>
                   <a:srgbClr val="44546A"/>
                 </a:solidFill>
@@ -2223,16 +2347,16 @@
                 <a:ea typeface="微软雅黑"/>
                 <a:cs typeface="微软雅黑"/>
               </a:rPr>
-              <a:t>DKFZ / 海德堡大学分子神经遗传学资深科学家</a:t>
+              <a:t>；中山大学香港高等研究所研究员</a:t>
             </a:r>
           </a:p>
           <a:p>
             <a:pPr algn="l" marL="171450" indent="-171450">
               <a:lnSpc>
-                <a:spcPct val="115000"/>
+                <a:spcPct val="112000"/>
               </a:lnSpc>
               <a:spcAft>
-                <a:spcPts val="400"/>
+                <a:spcPts val="300"/>
               </a:spcAft>
               <a:buClr>
                 <a:srgbClr val="08A6F6"/>
@@ -2241,7 +2365,18 @@
               <a:buChar char="•"/>
             </a:pPr>
             <a:r>
-              <a:rPr lang="zh-CN" altLang="en-US" sz="1100">
+              <a:rPr lang="zh-CN" altLang="en-US" sz="1000" b="1">
+                <a:solidFill>
+                  <a:srgbClr val="061F32"/>
+                </a:solidFill>
+                <a:latin typeface="微软雅黑"/>
+                <a:ea typeface="微软雅黑"/>
+                <a:cs typeface="微软雅黑"/>
+              </a:rPr>
+              <a:t>DKFZ 资深科学家、课题负责人</a:t>
+            </a:r>
+            <a:r>
+              <a:rPr lang="zh-CN" altLang="en-US" sz="1000">
                 <a:solidFill>
                   <a:srgbClr val="44546A"/>
                 </a:solidFill>
@@ -2249,16 +2384,16 @@
                 <a:ea typeface="微软雅黑"/>
                 <a:cs typeface="微软雅黑"/>
               </a:rPr>
-              <a:t>霍英东杰出青年学者</a:t>
+              <a:t>；海德堡大学医院开展患者来源肿瘤类器官指导的个体化胶质母细胞瘤治疗研究</a:t>
             </a:r>
           </a:p>
           <a:p>
             <a:pPr algn="l" marL="171450" indent="-171450">
               <a:lnSpc>
-                <a:spcPct val="115000"/>
+                <a:spcPct val="112000"/>
               </a:lnSpc>
               <a:spcAft>
-                <a:spcPts val="400"/>
+                <a:spcPts val="300"/>
               </a:spcAft>
               <a:buClr>
                 <a:srgbClr val="08A6F6"/>
@@ -2267,7 +2402,18 @@
               <a:buChar char="•"/>
             </a:pPr>
             <a:r>
-              <a:rPr lang="zh-CN" altLang="en-US" sz="1100">
+              <a:rPr lang="zh-CN" altLang="en-US" sz="1000" b="1">
+                <a:solidFill>
+                  <a:srgbClr val="061F32"/>
+                </a:solidFill>
+                <a:latin typeface="微软雅黑"/>
+                <a:ea typeface="微软雅黑"/>
+                <a:cs typeface="微软雅黑"/>
+              </a:rPr>
+              <a:t>第一作者成果 Science（修回中）、Cell（投稿中）</a:t>
+            </a:r>
+            <a:r>
+              <a:rPr lang="zh-CN" altLang="en-US" sz="1000">
                 <a:solidFill>
                   <a:srgbClr val="44546A"/>
                 </a:solidFill>
@@ -2275,16 +2421,16 @@
                 <a:ea typeface="微软雅黑"/>
                 <a:cs typeface="微软雅黑"/>
               </a:rPr>
-              <a:t>主持欧中重大科研项目</a:t>
+              <a:t>；Cell Stem Cell 2025 等 19 篇论文</a:t>
             </a:r>
           </a:p>
           <a:p>
             <a:pPr algn="l" marL="171450" indent="-171450">
               <a:lnSpc>
-                <a:spcPct val="115000"/>
+                <a:spcPct val="112000"/>
               </a:lnSpc>
               <a:spcAft>
-                <a:spcPts val="400"/>
+                <a:spcPts val="300"/>
               </a:spcAft>
               <a:buClr>
                 <a:srgbClr val="08A6F6"/>
@@ -2293,7 +2439,18 @@
               <a:buChar char="•"/>
             </a:pPr>
             <a:r>
-              <a:rPr lang="zh-CN" altLang="en-US" sz="1100">
+              <a:rPr lang="zh-CN" altLang="en-US" sz="1000" b="1">
+                <a:solidFill>
+                  <a:srgbClr val="061F32"/>
+                </a:solidFill>
+                <a:latin typeface="微软雅黑"/>
+                <a:ea typeface="微软雅黑"/>
+                <a:cs typeface="微软雅黑"/>
+              </a:rPr>
+              <a:t>参与 ERC、DFG、HFSP、NIH BRAIN Initiative</a:t>
+            </a:r>
+            <a:r>
+              <a:rPr lang="zh-CN" altLang="en-US" sz="1000">
                 <a:solidFill>
                   <a:srgbClr val="44546A"/>
                 </a:solidFill>
@@ -2301,16 +2458,16 @@
                 <a:ea typeface="微软雅黑"/>
                 <a:cs typeface="微软雅黑"/>
               </a:rPr>
-              <a:t>深耕神经调控与脑类器官方向，长期研究胶质母细胞瘤复发与耐药</a:t>
+              <a:t>及国家 973 / 863 等重大项目</a:t>
             </a:r>
           </a:p>
           <a:p>
             <a:pPr algn="l" marL="171450" indent="-171450">
               <a:lnSpc>
-                <a:spcPct val="115000"/>
+                <a:spcPct val="112000"/>
               </a:lnSpc>
               <a:spcAft>
-                <a:spcPts val="400"/>
+                <a:spcPts val="300"/>
               </a:spcAft>
               <a:buClr>
                 <a:srgbClr val="08A6F6"/>
@@ -2319,7 +2476,18 @@
               <a:buChar char="•"/>
             </a:pPr>
             <a:r>
-              <a:rPr lang="zh-CN" altLang="en-US" sz="1100">
+              <a:rPr lang="zh-CN" altLang="en-US" sz="1000" b="1">
+                <a:solidFill>
+                  <a:srgbClr val="061F32"/>
+                </a:solidFill>
+                <a:latin typeface="微软雅黑"/>
+                <a:ea typeface="微软雅黑"/>
+                <a:cs typeface="微软雅黑"/>
+              </a:rPr>
+              <a:t>Neusician 首席神经科学官</a:t>
+            </a:r>
+            <a:r>
+              <a:rPr lang="zh-CN" altLang="en-US" sz="1000">
                 <a:solidFill>
                   <a:srgbClr val="44546A"/>
                 </a:solidFill>
@@ -2327,21 +2495,21 @@
                 <a:ea typeface="微软雅黑"/>
                 <a:cs typeface="微软雅黑"/>
               </a:rPr>
-              <a:t>Cell Stem Cell 2025、npj Precision Oncology 2024 核心成员</a:t>
-            </a:r>
-          </a:p>
-        </p:txBody>
-      </p:sp>
-      <p:sp>
-        <p:nvSpPr>
-          <p:cNvPr id="309" name="照片 3"/>
+              <a:t>；慕尼黑大学 / 亥姆霍兹中心神经生物学博士</a:t>
+            </a:r>
+          </a:p>
+        </p:txBody>
+      </p:sp>
+      <p:sp>
+        <p:nvSpPr>
+          <p:cNvPr id="311" name="照片 3"/>
           <p:cNvSpPr/>
           <p:nvPr/>
         </p:nvSpPr>
         <p:spPr>
           <a:xfrm>
-            <a:off x="6811137" y="1097280"/>
-            <a:ext cx="1417320" cy="1417320"/>
+            <a:off x="6948297" y="1024128"/>
+            <a:ext cx="1143000" cy="1143000"/>
           </a:xfrm>
           <a:prstGeom prst="ellipse">
             <a:avLst/>
@@ -2361,7 +2529,7 @@
           <a:p>
             <a:pPr algn="ctr">
               <a:lnSpc>
-                <a:spcPct val="115000"/>
+                <a:spcPct val="112000"/>
               </a:lnSpc>
               <a:buNone/>
             </a:pPr>
@@ -2381,14 +2549,14 @@
       </p:sp>
       <p:sp>
         <p:nvSpPr>
-          <p:cNvPr id="310" name="姓名 3"/>
+          <p:cNvPr id="312" name="姓名 3"/>
           <p:cNvSpPr txBox="1"/>
           <p:nvPr/>
         </p:nvSpPr>
         <p:spPr>
           <a:xfrm>
-            <a:off x="6231636" y="2651760"/>
-            <a:ext cx="2576322" cy="347472"/>
+            <a:off x="6231636" y="2240280"/>
+            <a:ext cx="2576322" cy="329184"/>
           </a:xfrm>
           <a:prstGeom prst="rect">
             <a:avLst/>
@@ -2403,7 +2571,7 @@
           <a:p>
             <a:pPr algn="ctr">
               <a:lnSpc>
-                <a:spcPct val="115000"/>
+                <a:spcPct val="112000"/>
               </a:lnSpc>
               <a:buNone/>
             </a:pPr>
@@ -2423,14 +2591,14 @@
       </p:sp>
       <p:sp>
         <p:nvSpPr>
-          <p:cNvPr id="311" name="职位 3"/>
+          <p:cNvPr id="313" name="职位 3"/>
           <p:cNvSpPr txBox="1"/>
           <p:nvPr/>
         </p:nvSpPr>
         <p:spPr>
           <a:xfrm>
-            <a:off x="6231636" y="2999232"/>
-            <a:ext cx="2576322" cy="292608"/>
+            <a:off x="6231636" y="2560320"/>
+            <a:ext cx="2576322" cy="274320"/>
           </a:xfrm>
           <a:prstGeom prst="rect">
             <a:avLst/>
@@ -2445,7 +2613,7 @@
           <a:p>
             <a:pPr algn="ctr">
               <a:lnSpc>
-                <a:spcPct val="115000"/>
+                <a:spcPct val="112000"/>
               </a:lnSpc>
               <a:buNone/>
             </a:pPr>
@@ -2465,14 +2633,56 @@
       </p:sp>
       <p:sp>
         <p:nvSpPr>
-          <p:cNvPr id="312" name="经历 3"/>
+          <p:cNvPr id="314" name="亮点 3"/>
           <p:cNvSpPr txBox="1"/>
           <p:nvPr/>
         </p:nvSpPr>
         <p:spPr>
           <a:xfrm>
-            <a:off x="6323076" y="3474720"/>
-            <a:ext cx="2439162" cy="2788920"/>
+            <a:off x="6231636" y="2852928"/>
+            <a:ext cx="2576322" cy="256032"/>
+          </a:xfrm>
+          <a:prstGeom prst="rect">
+            <a:avLst/>
+          </a:prstGeom>
+          <a:noFill/>
+        </p:spPr>
+        <p:txBody>
+          <a:bodyPr wrap="square" lIns="0" tIns="0" rIns="0" bIns="0" anchor="ctr">
+            <a:noAutofit/>
+          </a:bodyPr>
+          <a:lstStyle/>
+          <a:p>
+            <a:pPr algn="ctr">
+              <a:lnSpc>
+                <a:spcPct val="112000"/>
+              </a:lnSpc>
+              <a:buNone/>
+            </a:pPr>
+            <a:r>
+              <a:rPr lang="zh-CN" altLang="en-US" sz="1050">
+                <a:solidFill>
+                  <a:srgbClr val="44546A"/>
+                </a:solidFill>
+                <a:latin typeface="微软雅黑"/>
+                <a:ea typeface="微软雅黑"/>
+                <a:cs typeface="微软雅黑"/>
+              </a:rPr>
+              <a:t>生物信息 × 机器学习预测建模</a:t>
+            </a:r>
+          </a:p>
+        </p:txBody>
+      </p:sp>
+      <p:sp>
+        <p:nvSpPr>
+          <p:cNvPr id="315" name="经历 3"/>
+          <p:cNvSpPr txBox="1"/>
+          <p:nvPr/>
+        </p:nvSpPr>
+        <p:spPr>
+          <a:xfrm>
+            <a:off x="6304788" y="3246120"/>
+            <a:ext cx="2484882" cy="3063240"/>
           </a:xfrm>
           <a:prstGeom prst="rect">
             <a:avLst/>
@@ -2487,10 +2697,10 @@
           <a:p>
             <a:pPr algn="l" marL="171450" indent="-171450">
               <a:lnSpc>
-                <a:spcPct val="115000"/>
+                <a:spcPct val="112000"/>
               </a:lnSpc>
               <a:spcAft>
-                <a:spcPts val="400"/>
+                <a:spcPts val="300"/>
               </a:spcAft>
               <a:buClr>
                 <a:srgbClr val="08A6F6"/>
@@ -2499,7 +2709,18 @@
               <a:buChar char="•"/>
             </a:pPr>
             <a:r>
-              <a:rPr lang="zh-CN" altLang="en-US" sz="1100">
+              <a:rPr lang="zh-CN" altLang="en-US" sz="1000" b="1">
+                <a:solidFill>
+                  <a:srgbClr val="061F32"/>
+                </a:solidFill>
+                <a:latin typeface="微软雅黑"/>
+                <a:ea typeface="微软雅黑"/>
+                <a:cs typeface="微软雅黑"/>
+              </a:rPr>
+              <a:t>慕尼黑工业大学 / 慕尼黑亥姆霍兹中心生物信息学博士</a:t>
+            </a:r>
+            <a:r>
+              <a:rPr lang="zh-CN" altLang="en-US" sz="1000">
                 <a:solidFill>
                   <a:srgbClr val="44546A"/>
                 </a:solidFill>
@@ -2507,16 +2728,16 @@
                 <a:ea typeface="微软雅黑"/>
                 <a:cs typeface="微软雅黑"/>
               </a:rPr>
-              <a:t>慕尼黑大学博士</a:t>
+              <a:t>；厦门大学硕士</a:t>
             </a:r>
           </a:p>
           <a:p>
             <a:pPr algn="l" marL="171450" indent="-171450">
               <a:lnSpc>
-                <a:spcPct val="115000"/>
+                <a:spcPct val="112000"/>
               </a:lnSpc>
               <a:spcAft>
-                <a:spcPts val="400"/>
+                <a:spcPts val="300"/>
               </a:spcAft>
               <a:buClr>
                 <a:srgbClr val="08A6F6"/>
@@ -2525,7 +2746,18 @@
               <a:buChar char="•"/>
             </a:pPr>
             <a:r>
-              <a:rPr lang="zh-CN" altLang="en-US" sz="1100">
+              <a:rPr lang="zh-CN" altLang="en-US" sz="1000" b="1">
+                <a:solidFill>
+                  <a:srgbClr val="061F32"/>
+                </a:solidFill>
+                <a:latin typeface="微软雅黑"/>
+                <a:ea typeface="微软雅黑"/>
+                <a:cs typeface="微软雅黑"/>
+              </a:rPr>
+              <a:t>约 10 年生物信息与多组学分析经验</a:t>
+            </a:r>
+            <a:r>
+              <a:rPr lang="zh-CN" altLang="en-US" sz="1000">
                 <a:solidFill>
                   <a:srgbClr val="44546A"/>
                 </a:solidFill>
@@ -2533,16 +2765,16 @@
                 <a:ea typeface="微软雅黑"/>
                 <a:cs typeface="微软雅黑"/>
               </a:rPr>
-              <a:t>曾任职哈佛医学院</a:t>
+              <a:t>；曾任职哈佛医学院，负责临床试验数据与多组学预测建模</a:t>
             </a:r>
           </a:p>
           <a:p>
             <a:pPr algn="l" marL="171450" indent="-171450">
               <a:lnSpc>
-                <a:spcPct val="115000"/>
+                <a:spcPct val="112000"/>
               </a:lnSpc>
               <a:spcAft>
-                <a:spcPts val="400"/>
+                <a:spcPts val="300"/>
               </a:spcAft>
               <a:buClr>
                 <a:srgbClr val="08A6F6"/>
@@ -2551,7 +2783,18 @@
               <a:buChar char="•"/>
             </a:pPr>
             <a:r>
-              <a:rPr lang="zh-CN" altLang="en-US" sz="1100">
+              <a:rPr lang="zh-CN" altLang="en-US" sz="1000" b="1">
+                <a:solidFill>
+                  <a:srgbClr val="061F32"/>
+                </a:solidFill>
+                <a:latin typeface="微软雅黑"/>
+                <a:ea typeface="微软雅黑"/>
+                <a:cs typeface="微软雅黑"/>
+              </a:rPr>
+              <a:t>预测模型 AUC &gt; 0.95</a:t>
+            </a:r>
+            <a:r>
+              <a:rPr lang="zh-CN" altLang="en-US" sz="1000">
                 <a:solidFill>
                   <a:srgbClr val="44546A"/>
                 </a:solidFill>
@@ -2559,16 +2802,16 @@
                 <a:ea typeface="微软雅黑"/>
                 <a:cs typeface="微软雅黑"/>
               </a:rPr>
-              <a:t>近 10 年生物信息与多组学数据分析经验</a:t>
+              <a:t>（高维数据分类）；临床多组学预测 AUC &gt; 0.80</a:t>
             </a:r>
           </a:p>
           <a:p>
             <a:pPr algn="l" marL="171450" indent="-171450">
               <a:lnSpc>
-                <a:spcPct val="115000"/>
+                <a:spcPct val="112000"/>
               </a:lnSpc>
               <a:spcAft>
-                <a:spcPts val="400"/>
+                <a:spcPts val="300"/>
               </a:spcAft>
               <a:buClr>
                 <a:srgbClr val="08A6F6"/>
@@ -2577,7 +2820,18 @@
               <a:buChar char="•"/>
             </a:pPr>
             <a:r>
-              <a:rPr lang="zh-CN" altLang="en-US" sz="1100">
+              <a:rPr lang="zh-CN" altLang="en-US" sz="1000" b="1">
+                <a:solidFill>
+                  <a:srgbClr val="061F32"/>
+                </a:solidFill>
+                <a:latin typeface="微软雅黑"/>
+                <a:ea typeface="微软雅黑"/>
+                <a:cs typeface="微软雅黑"/>
+              </a:rPr>
+              <a:t>多模态 + 纵向数据整合</a:t>
+            </a:r>
+            <a:r>
+              <a:rPr lang="zh-CN" altLang="en-US" sz="1000">
                 <a:solidFill>
                   <a:srgbClr val="44546A"/>
                 </a:solidFill>
@@ -2585,16 +2839,16 @@
                 <a:ea typeface="微软雅黑"/>
                 <a:cs typeface="微软雅黑"/>
               </a:rPr>
-              <a:t>精通大规模计算与机器学习预测建模</a:t>
+              <a:t>：测序、转录、代谢、表型与临床元数据</a:t>
             </a:r>
           </a:p>
           <a:p>
             <a:pPr algn="l" marL="171450" indent="-171450">
               <a:lnSpc>
-                <a:spcPct val="115000"/>
+                <a:spcPct val="112000"/>
               </a:lnSpc>
               <a:spcAft>
-                <a:spcPts val="400"/>
+                <a:spcPts val="300"/>
               </a:spcAft>
               <a:buClr>
                 <a:srgbClr val="08A6F6"/>
@@ -2603,7 +2857,18 @@
               <a:buChar char="•"/>
             </a:pPr>
             <a:r>
-              <a:rPr lang="zh-CN" altLang="en-US" sz="1100">
+              <a:rPr lang="zh-CN" altLang="en-US" sz="1000" b="1">
+                <a:solidFill>
+                  <a:srgbClr val="061F32"/>
+                </a:solidFill>
+                <a:latin typeface="微软雅黑"/>
+                <a:ea typeface="微软雅黑"/>
+                <a:cs typeface="微软雅黑"/>
+              </a:rPr>
+              <a:t>HPC / SLURM 规模化分析流程</a:t>
+            </a:r>
+            <a:r>
+              <a:rPr lang="zh-CN" altLang="en-US" sz="1000">
                 <a:solidFill>
                   <a:srgbClr val="44546A"/>
                 </a:solidFill>
@@ -2611,21 +2876,21 @@
                 <a:ea typeface="微软雅黑"/>
                 <a:cs typeface="微软雅黑"/>
               </a:rPr>
-              <a:t>擅长搭建端到端可复用分析流程，支撑临床与生物医药项目的数据挖掘与决策输出</a:t>
-            </a:r>
-          </a:p>
-        </p:txBody>
-      </p:sp>
-      <p:sp>
-        <p:nvSpPr>
-          <p:cNvPr id="313" name="照片 4"/>
+              <a:t>，单批覆盖数百至数千样本</a:t>
+            </a:r>
+          </a:p>
+        </p:txBody>
+      </p:sp>
+      <p:sp>
+        <p:nvSpPr>
+          <p:cNvPr id="316" name="照片 4"/>
           <p:cNvSpPr/>
           <p:nvPr/>
         </p:nvSpPr>
         <p:spPr>
           <a:xfrm>
-            <a:off x="9661779" y="1097280"/>
-            <a:ext cx="1417320" cy="1417320"/>
+            <a:off x="9798939" y="1024128"/>
+            <a:ext cx="1143000" cy="1143000"/>
           </a:xfrm>
           <a:prstGeom prst="ellipse">
             <a:avLst/>
@@ -2645,7 +2910,7 @@
           <a:p>
             <a:pPr algn="ctr">
               <a:lnSpc>
-                <a:spcPct val="115000"/>
+                <a:spcPct val="112000"/>
               </a:lnSpc>
               <a:buNone/>
             </a:pPr>
@@ -2665,14 +2930,14 @@
       </p:sp>
       <p:sp>
         <p:nvSpPr>
-          <p:cNvPr id="314" name="姓名 4"/>
+          <p:cNvPr id="317" name="姓名 4"/>
           <p:cNvSpPr txBox="1"/>
           <p:nvPr/>
         </p:nvSpPr>
         <p:spPr>
           <a:xfrm>
-            <a:off x="9082278" y="2651760"/>
-            <a:ext cx="2576322" cy="347472"/>
+            <a:off x="9082278" y="2240280"/>
+            <a:ext cx="2576322" cy="329184"/>
           </a:xfrm>
           <a:prstGeom prst="rect">
             <a:avLst/>
@@ -2687,7 +2952,7 @@
           <a:p>
             <a:pPr algn="ctr">
               <a:lnSpc>
-                <a:spcPct val="115000"/>
+                <a:spcPct val="112000"/>
               </a:lnSpc>
               <a:buNone/>
             </a:pPr>
@@ -2707,14 +2972,14 @@
       </p:sp>
       <p:sp>
         <p:nvSpPr>
-          <p:cNvPr id="315" name="职位 4"/>
+          <p:cNvPr id="318" name="职位 4"/>
           <p:cNvSpPr txBox="1"/>
           <p:nvPr/>
         </p:nvSpPr>
         <p:spPr>
           <a:xfrm>
-            <a:off x="9082278" y="2999232"/>
-            <a:ext cx="2576322" cy="292608"/>
+            <a:off x="9082278" y="2560320"/>
+            <a:ext cx="2576322" cy="274320"/>
           </a:xfrm>
           <a:prstGeom prst="rect">
             <a:avLst/>
@@ -2729,7 +2994,7 @@
           <a:p>
             <a:pPr algn="ctr">
               <a:lnSpc>
-                <a:spcPct val="115000"/>
+                <a:spcPct val="112000"/>
               </a:lnSpc>
               <a:buNone/>
             </a:pPr>
@@ -2749,14 +3014,56 @@
       </p:sp>
       <p:sp>
         <p:nvSpPr>
-          <p:cNvPr id="316" name="经历 4"/>
+          <p:cNvPr id="319" name="亮点 4"/>
           <p:cNvSpPr txBox="1"/>
           <p:nvPr/>
         </p:nvSpPr>
         <p:spPr>
           <a:xfrm>
-            <a:off x="9173718" y="3474720"/>
-            <a:ext cx="2439162" cy="2788920"/>
+            <a:off x="9082278" y="2852928"/>
+            <a:ext cx="2576322" cy="256032"/>
+          </a:xfrm>
+          <a:prstGeom prst="rect">
+            <a:avLst/>
+          </a:prstGeom>
+          <a:noFill/>
+        </p:spPr>
+        <p:txBody>
+          <a:bodyPr wrap="square" lIns="0" tIns="0" rIns="0" bIns="0" anchor="ctr">
+            <a:noAutofit/>
+          </a:bodyPr>
+          <a:lstStyle/>
+          <a:p>
+            <a:pPr algn="ctr">
+              <a:lnSpc>
+                <a:spcPct val="112000"/>
+              </a:lnSpc>
+              <a:buNone/>
+            </a:pPr>
+            <a:r>
+              <a:rPr lang="zh-CN" altLang="en-US" sz="1050">
+                <a:solidFill>
+                  <a:srgbClr val="44546A"/>
+                </a:solidFill>
+                <a:latin typeface="微软雅黑"/>
+                <a:ea typeface="微软雅黑"/>
+                <a:cs typeface="微软雅黑"/>
+              </a:rPr>
+              <a:t>跨境金融风控 × 科创运营</a:t>
+            </a:r>
+          </a:p>
+        </p:txBody>
+      </p:sp>
+      <p:sp>
+        <p:nvSpPr>
+          <p:cNvPr id="320" name="经历 4"/>
+          <p:cNvSpPr txBox="1"/>
+          <p:nvPr/>
+        </p:nvSpPr>
+        <p:spPr>
+          <a:xfrm>
+            <a:off x="9155430" y="3246120"/>
+            <a:ext cx="2484882" cy="3063240"/>
           </a:xfrm>
           <a:prstGeom prst="rect">
             <a:avLst/>
@@ -2771,10 +3078,10 @@
           <a:p>
             <a:pPr algn="l" marL="171450" indent="-171450">
               <a:lnSpc>
-                <a:spcPct val="115000"/>
+                <a:spcPct val="112000"/>
               </a:lnSpc>
               <a:spcAft>
-                <a:spcPts val="400"/>
+                <a:spcPts val="300"/>
               </a:spcAft>
               <a:buClr>
                 <a:srgbClr val="08A6F6"/>
@@ -2783,7 +3090,18 @@
               <a:buChar char="•"/>
             </a:pPr>
             <a:r>
-              <a:rPr lang="zh-CN" altLang="en-US" sz="1100">
+              <a:rPr lang="zh-CN" altLang="en-US" sz="1000" b="1">
+                <a:solidFill>
+                  <a:srgbClr val="061F32"/>
+                </a:solidFill>
+                <a:latin typeface="微软雅黑"/>
+                <a:ea typeface="微软雅黑"/>
+                <a:cs typeface="微软雅黑"/>
+              </a:rPr>
+              <a:t>德国商业银行（Commerzbank）高级合规官</a:t>
+            </a:r>
+            <a:r>
+              <a:rPr lang="zh-CN" altLang="en-US" sz="1000">
                 <a:solidFill>
                   <a:srgbClr val="44546A"/>
                 </a:solidFill>
@@ -2791,16 +3109,16 @@
                 <a:ea typeface="微软雅黑"/>
                 <a:cs typeface="微软雅黑"/>
               </a:rPr>
-              <a:t>海德堡大学经济学硕士</a:t>
+              <a:t>：统筹集团全球分支风控合规，向董事会提交风险研判</a:t>
             </a:r>
           </a:p>
           <a:p>
             <a:pPr algn="l" marL="171450" indent="-171450">
               <a:lnSpc>
-                <a:spcPct val="115000"/>
+                <a:spcPct val="112000"/>
               </a:lnSpc>
               <a:spcAft>
-                <a:spcPts val="400"/>
+                <a:spcPts val="300"/>
               </a:spcAft>
               <a:buClr>
                 <a:srgbClr val="08A6F6"/>
@@ -2809,7 +3127,18 @@
               <a:buChar char="•"/>
             </a:pPr>
             <a:r>
-              <a:rPr lang="zh-CN" altLang="en-US" sz="1100">
+              <a:rPr lang="zh-CN" altLang="en-US" sz="1000" b="1">
+                <a:solidFill>
+                  <a:srgbClr val="061F32"/>
+                </a:solidFill>
+                <a:latin typeface="微软雅黑"/>
+                <a:ea typeface="微软雅黑"/>
+                <a:cs typeface="微软雅黑"/>
+              </a:rPr>
+              <a:t>曾任 Sopra Steria 合规官</a:t>
+            </a:r>
+            <a:r>
+              <a:rPr lang="zh-CN" altLang="en-US" sz="1000">
                 <a:solidFill>
                   <a:srgbClr val="44546A"/>
                 </a:solidFill>
@@ -2817,16 +3146,16 @@
                 <a:ea typeface="微软雅黑"/>
                 <a:cs typeface="微软雅黑"/>
               </a:rPr>
-              <a:t>浙江大学管理学学士（竺可桢学院创业与创新管理强化班）</a:t>
+              <a:t>、中国银行法兰克福分行反洗钱分析师</a:t>
             </a:r>
           </a:p>
           <a:p>
             <a:pPr algn="l" marL="171450" indent="-171450">
               <a:lnSpc>
-                <a:spcPct val="115000"/>
+                <a:spcPct val="112000"/>
               </a:lnSpc>
               <a:spcAft>
-                <a:spcPts val="400"/>
+                <a:spcPts val="300"/>
               </a:spcAft>
               <a:buClr>
                 <a:srgbClr val="08A6F6"/>
@@ -2835,7 +3164,18 @@
               <a:buChar char="•"/>
             </a:pPr>
             <a:r>
-              <a:rPr lang="zh-CN" altLang="en-US" sz="1100">
+              <a:rPr lang="zh-CN" altLang="en-US" sz="1000" b="1">
+                <a:solidFill>
+                  <a:srgbClr val="061F32"/>
+                </a:solidFill>
+                <a:latin typeface="微软雅黑"/>
+                <a:ea typeface="微软雅黑"/>
+                <a:cs typeface="微软雅黑"/>
+              </a:rPr>
+              <a:t>歌德商学院高管教育中心高级项目经理</a:t>
+            </a:r>
+            <a:r>
+              <a:rPr lang="zh-CN" altLang="en-US" sz="1000">
                 <a:solidFill>
                   <a:srgbClr val="44546A"/>
                 </a:solidFill>
@@ -2843,16 +3183,16 @@
                 <a:ea typeface="微软雅黑"/>
                 <a:cs typeface="微软雅黑"/>
               </a:rPr>
-              <a:t>FRM 持证人</a:t>
+              <a:t>：搭建中德企业家与科创创始人交流平台</a:t>
             </a:r>
           </a:p>
           <a:p>
             <a:pPr algn="l" marL="171450" indent="-171450">
               <a:lnSpc>
-                <a:spcPct val="115000"/>
+                <a:spcPct val="112000"/>
               </a:lnSpc>
               <a:spcAft>
-                <a:spcPts val="400"/>
+                <a:spcPts val="300"/>
               </a:spcAft>
               <a:buClr>
                 <a:srgbClr val="08A6F6"/>
@@ -2861,7 +3201,18 @@
               <a:buChar char="•"/>
             </a:pPr>
             <a:r>
-              <a:rPr lang="zh-CN" altLang="en-US" sz="1100">
+              <a:rPr lang="zh-CN" altLang="en-US" sz="1000" b="1">
+                <a:solidFill>
+                  <a:srgbClr val="061F32"/>
+                </a:solidFill>
+                <a:latin typeface="微软雅黑"/>
+                <a:ea typeface="微软雅黑"/>
+                <a:cs typeface="微软雅黑"/>
+              </a:rPr>
+              <a:t>FRM、ESG Investing 认证</a:t>
+            </a:r>
+            <a:r>
+              <a:rPr lang="zh-CN" altLang="en-US" sz="1000">
                 <a:solidFill>
                   <a:srgbClr val="44546A"/>
                 </a:solidFill>
@@ -2869,16 +3220,16 @@
                 <a:ea typeface="微软雅黑"/>
                 <a:cs typeface="微软雅黑"/>
               </a:rPr>
-              <a:t>多年国际金融机构风控合规与跨境尽调经验</a:t>
+              <a:t>；CFA 一级；精通英语、德语</a:t>
             </a:r>
           </a:p>
           <a:p>
             <a:pPr algn="l" marL="171450" indent="-171450">
               <a:lnSpc>
-                <a:spcPct val="115000"/>
+                <a:spcPct val="112000"/>
               </a:lnSpc>
               <a:spcAft>
-                <a:spcPts val="400"/>
+                <a:spcPts val="300"/>
               </a:spcAft>
               <a:buClr>
                 <a:srgbClr val="08A6F6"/>
@@ -2887,7 +3238,18 @@
               <a:buChar char="•"/>
             </a:pPr>
             <a:r>
-              <a:rPr lang="zh-CN" altLang="en-US" sz="1100">
+              <a:rPr lang="zh-CN" altLang="en-US" sz="1000" b="1">
+                <a:solidFill>
+                  <a:srgbClr val="061F32"/>
+                </a:solidFill>
+                <a:latin typeface="微软雅黑"/>
+                <a:ea typeface="微软雅黑"/>
+                <a:cs typeface="微软雅黑"/>
+              </a:rPr>
+              <a:t>海德堡大学经济学硕士</a:t>
+            </a:r>
+            <a:r>
+              <a:rPr lang="zh-CN" altLang="en-US" sz="1000">
                 <a:solidFill>
                   <a:srgbClr val="44546A"/>
                 </a:solidFill>
@@ -2895,7 +3257,7 @@
                 <a:ea typeface="微软雅黑"/>
                 <a:cs typeface="微软雅黑"/>
               </a:rPr>
-              <a:t>精通跨境财务统筹、合规体系搭建与硬科技项目运营</a:t>
+              <a:t>；浙江大学管理学学士（竺可桢学院创新与创业管理强化班）</a:t>
             </a:r>
           </a:p>
         </p:txBody>

--- a/slides/Vitoma_BP_part1_team.pptx
+++ b/slides/Vitoma_BP_part1_team.pptx
@@ -1933,12 +1933,12 @@
           </a:bodyPr>
           <a:lstStyle/>
           <a:p>
-            <a:pPr algn="l" marL="171450" indent="-171450">
-              <a:lnSpc>
-                <a:spcPct val="112000"/>
+            <a:pPr marL="190500" indent="-190500">
+              <a:lnSpc>
+                <a:spcPct val="110000"/>
               </a:lnSpc>
               <a:spcAft>
-                <a:spcPts val="300"/>
+                <a:spcPts val="1000"/>
               </a:spcAft>
               <a:buClr>
                 <a:srgbClr val="08A6F6"/>
@@ -1947,7 +1947,7 @@
               <a:buChar char="•"/>
             </a:pPr>
             <a:r>
-              <a:rPr lang="zh-CN" altLang="en-US" sz="1000" b="1">
+              <a:rPr lang="zh-CN" altLang="en-US" sz="1400">
                 <a:solidFill>
                   <a:srgbClr val="061F32"/>
                 </a:solidFill>
@@ -1955,27 +1955,16 @@
                 <a:ea typeface="微软雅黑"/>
                 <a:cs typeface="微软雅黑"/>
               </a:rPr>
-              <a:t>Verqura 实验室管理系统创始人</a:t>
-            </a:r>
-            <a:r>
-              <a:rPr lang="zh-CN" altLang="en-US" sz="1000">
-                <a:solidFill>
-                  <a:srgbClr val="44546A"/>
-                </a:solidFill>
-                <a:latin typeface="微软雅黑"/>
-                <a:ea typeface="微软雅黑"/>
-                <a:cs typeface="微软雅黑"/>
-              </a:rPr>
-              <a:t>：打通样本、实验与数据管理</a:t>
-            </a:r>
-          </a:p>
-          <a:p>
-            <a:pPr algn="l" marL="171450" indent="-171450">
-              <a:lnSpc>
-                <a:spcPct val="112000"/>
+              <a:t>Verqura 实验系统创始人</a:t>
+            </a:r>
+          </a:p>
+          <a:p>
+            <a:pPr marL="190500" indent="-190500">
+              <a:lnSpc>
+                <a:spcPct val="110000"/>
               </a:lnSpc>
               <a:spcAft>
-                <a:spcPts val="300"/>
+                <a:spcPts val="1000"/>
               </a:spcAft>
               <a:buClr>
                 <a:srgbClr val="08A6F6"/>
@@ -1984,7 +1973,7 @@
               <a:buChar char="•"/>
             </a:pPr>
             <a:r>
-              <a:rPr lang="zh-CN" altLang="en-US" sz="1000" b="1">
+              <a:rPr lang="zh-CN" altLang="en-US" sz="1400">
                 <a:solidFill>
                   <a:srgbClr val="061F32"/>
                 </a:solidFill>
@@ -1992,27 +1981,16 @@
                 <a:ea typeface="微软雅黑"/>
                 <a:cs typeface="微软雅黑"/>
               </a:rPr>
-              <a:t>Cell Stem Cell 2025、npj Precision Oncology 2024 作者</a:t>
-            </a:r>
-            <a:r>
-              <a:rPr lang="zh-CN" altLang="en-US" sz="1000">
-                <a:solidFill>
-                  <a:srgbClr val="44546A"/>
-                </a:solidFill>
-                <a:latin typeface="微软雅黑"/>
-                <a:ea typeface="微软雅黑"/>
-                <a:cs typeface="微软雅黑"/>
-              </a:rPr>
-              <a:t>（类器官预测患者治疗响应）</a:t>
-            </a:r>
-          </a:p>
-          <a:p>
-            <a:pPr algn="l" marL="171450" indent="-171450">
-              <a:lnSpc>
-                <a:spcPct val="112000"/>
+              <a:t>Cell Stem Cell 2025 作者</a:t>
+            </a:r>
+          </a:p>
+          <a:p>
+            <a:pPr marL="190500" indent="-190500">
+              <a:lnSpc>
+                <a:spcPct val="110000"/>
               </a:lnSpc>
               <a:spcAft>
-                <a:spcPts val="300"/>
+                <a:spcPts val="1000"/>
               </a:spcAft>
               <a:buClr>
                 <a:srgbClr val="08A6F6"/>
@@ -2021,7 +1999,7 @@
               <a:buChar char="•"/>
             </a:pPr>
             <a:r>
-              <a:rPr lang="zh-CN" altLang="en-US" sz="1000" b="1">
+              <a:rPr lang="zh-CN" altLang="en-US" sz="1400">
                 <a:solidFill>
                   <a:srgbClr val="061F32"/>
                 </a:solidFill>
@@ -2029,27 +2007,16 @@
                 <a:ea typeface="微软雅黑"/>
                 <a:cs typeface="微软雅黑"/>
               </a:rPr>
-              <a:t>精通 iPSC 脑类器官构建</a:t>
-            </a:r>
-            <a:r>
-              <a:rPr lang="zh-CN" altLang="en-US" sz="1000">
-                <a:solidFill>
-                  <a:srgbClr val="44546A"/>
-                </a:solidFill>
-                <a:latin typeface="微软雅黑"/>
-                <a:ea typeface="微软雅黑"/>
-                <a:cs typeface="微软雅黑"/>
-              </a:rPr>
-              <a:t>，引进 Pașca 团队分化方案；CRISPR 基因组编辑</a:t>
-            </a:r>
-          </a:p>
-          <a:p>
-            <a:pPr algn="l" marL="171450" indent="-171450">
-              <a:lnSpc>
-                <a:spcPct val="112000"/>
+              <a:t>iPSC 脑类器官｜CRISPR</a:t>
+            </a:r>
+          </a:p>
+          <a:p>
+            <a:pPr marL="190500" indent="-190500">
+              <a:lnSpc>
+                <a:spcPct val="110000"/>
               </a:lnSpc>
               <a:spcAft>
-                <a:spcPts val="300"/>
+                <a:spcPts val="1000"/>
               </a:spcAft>
               <a:buClr>
                 <a:srgbClr val="08A6F6"/>
@@ -2058,7 +2025,7 @@
               <a:buChar char="•"/>
             </a:pPr>
             <a:r>
-              <a:rPr lang="zh-CN" altLang="en-US" sz="1000" b="1">
+              <a:rPr lang="zh-CN" altLang="en-US" sz="1400">
                 <a:solidFill>
                   <a:srgbClr val="061F32"/>
                 </a:solidFill>
@@ -2066,27 +2033,16 @@
                 <a:ea typeface="微软雅黑"/>
                 <a:cs typeface="微软雅黑"/>
               </a:rPr>
-              <a:t>单细胞 RNA / ATAC 测序分析</a:t>
-            </a:r>
-            <a:r>
-              <a:rPr lang="zh-CN" altLang="en-US" sz="1000">
-                <a:solidFill>
-                  <a:srgbClr val="44546A"/>
-                </a:solidFill>
-                <a:latin typeface="微软雅黑"/>
-                <a:ea typeface="微软雅黑"/>
-                <a:cs typeface="微软雅黑"/>
-              </a:rPr>
-              <a:t>；训练 YOLO / Cellpose 图像 AI 模型</a:t>
-            </a:r>
-          </a:p>
-          <a:p>
-            <a:pPr algn="l" marL="171450" indent="-171450">
-              <a:lnSpc>
-                <a:spcPct val="112000"/>
+              <a:t>单细胞组学｜图像 AI</a:t>
+            </a:r>
+          </a:p>
+          <a:p>
+            <a:pPr marL="190500" indent="-190500">
+              <a:lnSpc>
+                <a:spcPct val="110000"/>
               </a:lnSpc>
               <a:spcAft>
-                <a:spcPts val="300"/>
+                <a:spcPts val="1000"/>
               </a:spcAft>
               <a:buClr>
                 <a:srgbClr val="08A6F6"/>
@@ -2095,7 +2051,7 @@
               <a:buChar char="•"/>
             </a:pPr>
             <a:r>
-              <a:rPr lang="zh-CN" altLang="en-US" sz="1000" b="1">
+              <a:rPr lang="zh-CN" altLang="en-US" sz="1400">
                 <a:solidFill>
                   <a:srgbClr val="061F32"/>
                 </a:solidFill>
@@ -2103,18 +2059,7 @@
                 <a:ea typeface="微软雅黑"/>
                 <a:cs typeface="微软雅黑"/>
               </a:rPr>
-              <a:t>海德堡大学 / DKFZ 发育生物学博士</a:t>
-            </a:r>
-            <a:r>
-              <a:rPr lang="zh-CN" altLang="en-US" sz="1000">
-                <a:solidFill>
-                  <a:srgbClr val="44546A"/>
-                </a:solidFill>
-                <a:latin typeface="微软雅黑"/>
-                <a:ea typeface="微软雅黑"/>
-                <a:cs typeface="微软雅黑"/>
-              </a:rPr>
-              <a:t>；密歇根大学安娜堡分校学士；亥姆霍兹研究生院奖学金</a:t>
+              <a:t>海德堡大学 / DKFZ 博士</a:t>
             </a:r>
           </a:p>
         </p:txBody>
@@ -2314,12 +2259,12 @@
           </a:bodyPr>
           <a:lstStyle/>
           <a:p>
-            <a:pPr algn="l" marL="171450" indent="-171450">
-              <a:lnSpc>
-                <a:spcPct val="112000"/>
+            <a:pPr marL="190500" indent="-190500">
+              <a:lnSpc>
+                <a:spcPct val="110000"/>
               </a:lnSpc>
               <a:spcAft>
-                <a:spcPts val="300"/>
+                <a:spcPts val="1000"/>
               </a:spcAft>
               <a:buClr>
                 <a:srgbClr val="08A6F6"/>
@@ -2328,7 +2273,7 @@
               <a:buChar char="•"/>
             </a:pPr>
             <a:r>
-              <a:rPr lang="zh-CN" altLang="en-US" sz="1000" b="1">
+              <a:rPr lang="zh-CN" altLang="en-US" sz="1400">
                 <a:solidFill>
                   <a:srgbClr val="061F32"/>
                 </a:solidFill>
@@ -2338,25 +2283,14 @@
               </a:rPr>
               <a:t>霍英东杰出青年学者</a:t>
             </a:r>
-            <a:r>
-              <a:rPr lang="zh-CN" altLang="en-US" sz="1000">
-                <a:solidFill>
-                  <a:srgbClr val="44546A"/>
-                </a:solidFill>
-                <a:latin typeface="微软雅黑"/>
-                <a:ea typeface="微软雅黑"/>
-                <a:cs typeface="微软雅黑"/>
-              </a:rPr>
-              <a:t>；中山大学香港高等研究所研究员</a:t>
-            </a:r>
-          </a:p>
-          <a:p>
-            <a:pPr algn="l" marL="171450" indent="-171450">
-              <a:lnSpc>
-                <a:spcPct val="112000"/>
+          </a:p>
+          <a:p>
+            <a:pPr marL="190500" indent="-190500">
+              <a:lnSpc>
+                <a:spcPct val="110000"/>
               </a:lnSpc>
               <a:spcAft>
-                <a:spcPts val="300"/>
+                <a:spcPts val="1000"/>
               </a:spcAft>
               <a:buClr>
                 <a:srgbClr val="08A6F6"/>
@@ -2365,7 +2299,7 @@
               <a:buChar char="•"/>
             </a:pPr>
             <a:r>
-              <a:rPr lang="zh-CN" altLang="en-US" sz="1000" b="1">
+              <a:rPr lang="zh-CN" altLang="en-US" sz="1400">
                 <a:solidFill>
                   <a:srgbClr val="061F32"/>
                 </a:solidFill>
@@ -2373,27 +2307,16 @@
                 <a:ea typeface="微软雅黑"/>
                 <a:cs typeface="微软雅黑"/>
               </a:rPr>
-              <a:t>DKFZ 资深科学家、课题负责人</a:t>
-            </a:r>
-            <a:r>
-              <a:rPr lang="zh-CN" altLang="en-US" sz="1000">
-                <a:solidFill>
-                  <a:srgbClr val="44546A"/>
-                </a:solidFill>
-                <a:latin typeface="微软雅黑"/>
-                <a:ea typeface="微软雅黑"/>
-                <a:cs typeface="微软雅黑"/>
-              </a:rPr>
-              <a:t>；海德堡大学医院开展患者来源肿瘤类器官指导的个体化胶质母细胞瘤治疗研究</a:t>
-            </a:r>
-          </a:p>
-          <a:p>
-            <a:pPr algn="l" marL="171450" indent="-171450">
-              <a:lnSpc>
-                <a:spcPct val="112000"/>
+              <a:t>DKFZ 资深科学家 / PI</a:t>
+            </a:r>
+          </a:p>
+          <a:p>
+            <a:pPr marL="190500" indent="-190500">
+              <a:lnSpc>
+                <a:spcPct val="110000"/>
               </a:lnSpc>
               <a:spcAft>
-                <a:spcPts val="300"/>
+                <a:spcPts val="1000"/>
               </a:spcAft>
               <a:buClr>
                 <a:srgbClr val="08A6F6"/>
@@ -2402,7 +2325,7 @@
               <a:buChar char="•"/>
             </a:pPr>
             <a:r>
-              <a:rPr lang="zh-CN" altLang="en-US" sz="1000" b="1">
+              <a:rPr lang="zh-CN" altLang="en-US" sz="1400">
                 <a:solidFill>
                   <a:srgbClr val="061F32"/>
                 </a:solidFill>
@@ -2410,27 +2333,16 @@
                 <a:ea typeface="微软雅黑"/>
                 <a:cs typeface="微软雅黑"/>
               </a:rPr>
-              <a:t>第一作者成果 Science（修回中）、Cell（投稿中）</a:t>
-            </a:r>
-            <a:r>
-              <a:rPr lang="zh-CN" altLang="en-US" sz="1000">
-                <a:solidFill>
-                  <a:srgbClr val="44546A"/>
-                </a:solidFill>
-                <a:latin typeface="微软雅黑"/>
-                <a:ea typeface="微软雅黑"/>
-                <a:cs typeface="微软雅黑"/>
-              </a:rPr>
-              <a:t>；Cell Stem Cell 2025 等 19 篇论文</a:t>
-            </a:r>
-          </a:p>
-          <a:p>
-            <a:pPr algn="l" marL="171450" indent="-171450">
-              <a:lnSpc>
-                <a:spcPct val="112000"/>
+              <a:t>Science 修回｜19 篇论文</a:t>
+            </a:r>
+          </a:p>
+          <a:p>
+            <a:pPr marL="190500" indent="-190500">
+              <a:lnSpc>
+                <a:spcPct val="110000"/>
               </a:lnSpc>
               <a:spcAft>
-                <a:spcPts val="300"/>
+                <a:spcPts val="1000"/>
               </a:spcAft>
               <a:buClr>
                 <a:srgbClr val="08A6F6"/>
@@ -2439,7 +2351,7 @@
               <a:buChar char="•"/>
             </a:pPr>
             <a:r>
-              <a:rPr lang="zh-CN" altLang="en-US" sz="1000" b="1">
+              <a:rPr lang="zh-CN" altLang="en-US" sz="1400">
                 <a:solidFill>
                   <a:srgbClr val="061F32"/>
                 </a:solidFill>
@@ -2447,27 +2359,16 @@
                 <a:ea typeface="微软雅黑"/>
                 <a:cs typeface="微软雅黑"/>
               </a:rPr>
-              <a:t>参与 ERC、DFG、HFSP、NIH BRAIN Initiative</a:t>
-            </a:r>
-            <a:r>
-              <a:rPr lang="zh-CN" altLang="en-US" sz="1000">
-                <a:solidFill>
-                  <a:srgbClr val="44546A"/>
-                </a:solidFill>
-                <a:latin typeface="微软雅黑"/>
-                <a:ea typeface="微软雅黑"/>
-                <a:cs typeface="微软雅黑"/>
-              </a:rPr>
-              <a:t>及国家 973 / 863 等重大项目</a:t>
-            </a:r>
-          </a:p>
-          <a:p>
-            <a:pPr algn="l" marL="171450" indent="-171450">
-              <a:lnSpc>
-                <a:spcPct val="112000"/>
+              <a:t>患者类器官个体化治疗</a:t>
+            </a:r>
+          </a:p>
+          <a:p>
+            <a:pPr marL="190500" indent="-190500">
+              <a:lnSpc>
+                <a:spcPct val="110000"/>
               </a:lnSpc>
               <a:spcAft>
-                <a:spcPts val="300"/>
+                <a:spcPts val="1000"/>
               </a:spcAft>
               <a:buClr>
                 <a:srgbClr val="08A6F6"/>
@@ -2476,7 +2377,7 @@
               <a:buChar char="•"/>
             </a:pPr>
             <a:r>
-              <a:rPr lang="zh-CN" altLang="en-US" sz="1000" b="1">
+              <a:rPr lang="zh-CN" altLang="en-US" sz="1400">
                 <a:solidFill>
                   <a:srgbClr val="061F32"/>
                 </a:solidFill>
@@ -2484,18 +2385,7 @@
                 <a:ea typeface="微软雅黑"/>
                 <a:cs typeface="微软雅黑"/>
               </a:rPr>
-              <a:t>Neusician 首席神经科学官</a:t>
-            </a:r>
-            <a:r>
-              <a:rPr lang="zh-CN" altLang="en-US" sz="1000">
-                <a:solidFill>
-                  <a:srgbClr val="44546A"/>
-                </a:solidFill>
-                <a:latin typeface="微软雅黑"/>
-                <a:ea typeface="微软雅黑"/>
-                <a:cs typeface="微软雅黑"/>
-              </a:rPr>
-              <a:t>；慕尼黑大学 / 亥姆霍兹中心神经生物学博士</a:t>
+              <a:t>慕尼黑大学 / 亥姆霍兹博士</a:t>
             </a:r>
           </a:p>
         </p:txBody>
@@ -2695,12 +2585,12 @@
           </a:bodyPr>
           <a:lstStyle/>
           <a:p>
-            <a:pPr algn="l" marL="171450" indent="-171450">
-              <a:lnSpc>
-                <a:spcPct val="112000"/>
+            <a:pPr marL="190500" indent="-190500">
+              <a:lnSpc>
+                <a:spcPct val="110000"/>
               </a:lnSpc>
               <a:spcAft>
-                <a:spcPts val="300"/>
+                <a:spcPts val="1000"/>
               </a:spcAft>
               <a:buClr>
                 <a:srgbClr val="08A6F6"/>
@@ -2709,7 +2599,7 @@
               <a:buChar char="•"/>
             </a:pPr>
             <a:r>
-              <a:rPr lang="zh-CN" altLang="en-US" sz="1000" b="1">
+              <a:rPr lang="zh-CN" altLang="en-US" sz="1400">
                 <a:solidFill>
                   <a:srgbClr val="061F32"/>
                 </a:solidFill>
@@ -2717,27 +2607,16 @@
                 <a:ea typeface="微软雅黑"/>
                 <a:cs typeface="微软雅黑"/>
               </a:rPr>
-              <a:t>慕尼黑工业大学 / 慕尼黑亥姆霍兹中心生物信息学博士</a:t>
-            </a:r>
-            <a:r>
-              <a:rPr lang="zh-CN" altLang="en-US" sz="1000">
-                <a:solidFill>
-                  <a:srgbClr val="44546A"/>
-                </a:solidFill>
-                <a:latin typeface="微软雅黑"/>
-                <a:ea typeface="微软雅黑"/>
-                <a:cs typeface="微软雅黑"/>
-              </a:rPr>
-              <a:t>；厦门大学硕士</a:t>
-            </a:r>
-          </a:p>
-          <a:p>
-            <a:pPr algn="l" marL="171450" indent="-171450">
-              <a:lnSpc>
-                <a:spcPct val="112000"/>
+              <a:t>慕尼黑工大 / 亥姆霍兹博士</a:t>
+            </a:r>
+          </a:p>
+          <a:p>
+            <a:pPr marL="190500" indent="-190500">
+              <a:lnSpc>
+                <a:spcPct val="110000"/>
               </a:lnSpc>
               <a:spcAft>
-                <a:spcPts val="300"/>
+                <a:spcPts val="1000"/>
               </a:spcAft>
               <a:buClr>
                 <a:srgbClr val="08A6F6"/>
@@ -2746,7 +2625,7 @@
               <a:buChar char="•"/>
             </a:pPr>
             <a:r>
-              <a:rPr lang="zh-CN" altLang="en-US" sz="1000" b="1">
+              <a:rPr lang="zh-CN" altLang="en-US" sz="1400">
                 <a:solidFill>
                   <a:srgbClr val="061F32"/>
                 </a:solidFill>
@@ -2754,27 +2633,16 @@
                 <a:ea typeface="微软雅黑"/>
                 <a:cs typeface="微软雅黑"/>
               </a:rPr>
-              <a:t>约 10 年生物信息与多组学分析经验</a:t>
-            </a:r>
-            <a:r>
-              <a:rPr lang="zh-CN" altLang="en-US" sz="1000">
-                <a:solidFill>
-                  <a:srgbClr val="44546A"/>
-                </a:solidFill>
-                <a:latin typeface="微软雅黑"/>
-                <a:ea typeface="微软雅黑"/>
-                <a:cs typeface="微软雅黑"/>
-              </a:rPr>
-              <a:t>；曾任职哈佛医学院，负责临床试验数据与多组学预测建模</a:t>
-            </a:r>
-          </a:p>
-          <a:p>
-            <a:pPr algn="l" marL="171450" indent="-171450">
-              <a:lnSpc>
-                <a:spcPct val="112000"/>
+              <a:t>曾任职哈佛医学院</a:t>
+            </a:r>
+          </a:p>
+          <a:p>
+            <a:pPr marL="190500" indent="-190500">
+              <a:lnSpc>
+                <a:spcPct val="110000"/>
               </a:lnSpc>
               <a:spcAft>
-                <a:spcPts val="300"/>
+                <a:spcPts val="1000"/>
               </a:spcAft>
               <a:buClr>
                 <a:srgbClr val="08A6F6"/>
@@ -2783,7 +2651,7 @@
               <a:buChar char="•"/>
             </a:pPr>
             <a:r>
-              <a:rPr lang="zh-CN" altLang="en-US" sz="1000" b="1">
+              <a:rPr lang="zh-CN" altLang="en-US" sz="1400">
                 <a:solidFill>
                   <a:srgbClr val="061F32"/>
                 </a:solidFill>
@@ -2791,27 +2659,16 @@
                 <a:ea typeface="微软雅黑"/>
                 <a:cs typeface="微软雅黑"/>
               </a:rPr>
-              <a:t>预测模型 AUC &gt; 0.95</a:t>
-            </a:r>
-            <a:r>
-              <a:rPr lang="zh-CN" altLang="en-US" sz="1000">
-                <a:solidFill>
-                  <a:srgbClr val="44546A"/>
-                </a:solidFill>
-                <a:latin typeface="微软雅黑"/>
-                <a:ea typeface="微软雅黑"/>
-                <a:cs typeface="微软雅黑"/>
-              </a:rPr>
-              <a:t>（高维数据分类）；临床多组学预测 AUC &gt; 0.80</a:t>
-            </a:r>
-          </a:p>
-          <a:p>
-            <a:pPr algn="l" marL="171450" indent="-171450">
-              <a:lnSpc>
-                <a:spcPct val="112000"/>
+              <a:t>10 年多组学分析</a:t>
+            </a:r>
+          </a:p>
+          <a:p>
+            <a:pPr marL="190500" indent="-190500">
+              <a:lnSpc>
+                <a:spcPct val="110000"/>
               </a:lnSpc>
               <a:spcAft>
-                <a:spcPts val="300"/>
+                <a:spcPts val="1000"/>
               </a:spcAft>
               <a:buClr>
                 <a:srgbClr val="08A6F6"/>
@@ -2820,7 +2677,7 @@
               <a:buChar char="•"/>
             </a:pPr>
             <a:r>
-              <a:rPr lang="zh-CN" altLang="en-US" sz="1000" b="1">
+              <a:rPr lang="zh-CN" altLang="en-US" sz="1400">
                 <a:solidFill>
                   <a:srgbClr val="061F32"/>
                 </a:solidFill>
@@ -2828,27 +2685,16 @@
                 <a:ea typeface="微软雅黑"/>
                 <a:cs typeface="微软雅黑"/>
               </a:rPr>
-              <a:t>多模态 + 纵向数据整合</a:t>
-            </a:r>
-            <a:r>
-              <a:rPr lang="zh-CN" altLang="en-US" sz="1000">
-                <a:solidFill>
-                  <a:srgbClr val="44546A"/>
-                </a:solidFill>
-                <a:latin typeface="微软雅黑"/>
-                <a:ea typeface="微软雅黑"/>
-                <a:cs typeface="微软雅黑"/>
-              </a:rPr>
-              <a:t>：测序、转录、代谢、表型与临床元数据</a:t>
-            </a:r>
-          </a:p>
-          <a:p>
-            <a:pPr algn="l" marL="171450" indent="-171450">
-              <a:lnSpc>
-                <a:spcPct val="112000"/>
+              <a:t>预测模型 AUC &gt; 0.95</a:t>
+            </a:r>
+          </a:p>
+          <a:p>
+            <a:pPr marL="190500" indent="-190500">
+              <a:lnSpc>
+                <a:spcPct val="110000"/>
               </a:lnSpc>
               <a:spcAft>
-                <a:spcPts val="300"/>
+                <a:spcPts val="1000"/>
               </a:spcAft>
               <a:buClr>
                 <a:srgbClr val="08A6F6"/>
@@ -2857,7 +2703,7 @@
               <a:buChar char="•"/>
             </a:pPr>
             <a:r>
-              <a:rPr lang="zh-CN" altLang="en-US" sz="1000" b="1">
+              <a:rPr lang="zh-CN" altLang="en-US" sz="1400">
                 <a:solidFill>
                   <a:srgbClr val="061F32"/>
                 </a:solidFill>
@@ -2865,18 +2711,7 @@
                 <a:ea typeface="微软雅黑"/>
                 <a:cs typeface="微软雅黑"/>
               </a:rPr>
-              <a:t>HPC / SLURM 规模化分析流程</a:t>
-            </a:r>
-            <a:r>
-              <a:rPr lang="zh-CN" altLang="en-US" sz="1000">
-                <a:solidFill>
-                  <a:srgbClr val="44546A"/>
-                </a:solidFill>
-                <a:latin typeface="微软雅黑"/>
-                <a:ea typeface="微软雅黑"/>
-                <a:cs typeface="微软雅黑"/>
-              </a:rPr>
-              <a:t>，单批覆盖数百至数千样本</a:t>
+              <a:t>多模态 × 规模化计算</a:t>
             </a:r>
           </a:p>
         </p:txBody>
@@ -3076,12 +2911,12 @@
           </a:bodyPr>
           <a:lstStyle/>
           <a:p>
-            <a:pPr algn="l" marL="171450" indent="-171450">
-              <a:lnSpc>
-                <a:spcPct val="112000"/>
+            <a:pPr marL="190500" indent="-190500">
+              <a:lnSpc>
+                <a:spcPct val="110000"/>
               </a:lnSpc>
               <a:spcAft>
-                <a:spcPts val="300"/>
+                <a:spcPts val="1000"/>
               </a:spcAft>
               <a:buClr>
                 <a:srgbClr val="08A6F6"/>
@@ -3090,7 +2925,7 @@
               <a:buChar char="•"/>
             </a:pPr>
             <a:r>
-              <a:rPr lang="zh-CN" altLang="en-US" sz="1000" b="1">
+              <a:rPr lang="zh-CN" altLang="en-US" sz="1400">
                 <a:solidFill>
                   <a:srgbClr val="061F32"/>
                 </a:solidFill>
@@ -3098,27 +2933,16 @@
                 <a:ea typeface="微软雅黑"/>
                 <a:cs typeface="微软雅黑"/>
               </a:rPr>
-              <a:t>德国商业银行（Commerzbank）高级合规官</a:t>
-            </a:r>
-            <a:r>
-              <a:rPr lang="zh-CN" altLang="en-US" sz="1000">
-                <a:solidFill>
-                  <a:srgbClr val="44546A"/>
-                </a:solidFill>
-                <a:latin typeface="微软雅黑"/>
-                <a:ea typeface="微软雅黑"/>
-                <a:cs typeface="微软雅黑"/>
-              </a:rPr>
-              <a:t>：统筹集团全球分支风控合规，向董事会提交风险研判</a:t>
-            </a:r>
-          </a:p>
-          <a:p>
-            <a:pPr algn="l" marL="171450" indent="-171450">
-              <a:lnSpc>
-                <a:spcPct val="112000"/>
+              <a:t>德国商业银行高级合规官</a:t>
+            </a:r>
+          </a:p>
+          <a:p>
+            <a:pPr marL="190500" indent="-190500">
+              <a:lnSpc>
+                <a:spcPct val="110000"/>
               </a:lnSpc>
               <a:spcAft>
-                <a:spcPts val="300"/>
+                <a:spcPts val="1000"/>
               </a:spcAft>
               <a:buClr>
                 <a:srgbClr val="08A6F6"/>
@@ -3127,7 +2951,7 @@
               <a:buChar char="•"/>
             </a:pPr>
             <a:r>
-              <a:rPr lang="zh-CN" altLang="en-US" sz="1000" b="1">
+              <a:rPr lang="zh-CN" altLang="en-US" sz="1400">
                 <a:solidFill>
                   <a:srgbClr val="061F32"/>
                 </a:solidFill>
@@ -3135,27 +2959,16 @@
                 <a:ea typeface="微软雅黑"/>
                 <a:cs typeface="微软雅黑"/>
               </a:rPr>
-              <a:t>曾任 Sopra Steria 合规官</a:t>
-            </a:r>
-            <a:r>
-              <a:rPr lang="zh-CN" altLang="en-US" sz="1000">
-                <a:solidFill>
-                  <a:srgbClr val="44546A"/>
-                </a:solidFill>
-                <a:latin typeface="微软雅黑"/>
-                <a:ea typeface="微软雅黑"/>
-                <a:cs typeface="微软雅黑"/>
-              </a:rPr>
-              <a:t>、中国银行法兰克福分行反洗钱分析师</a:t>
-            </a:r>
-          </a:p>
-          <a:p>
-            <a:pPr algn="l" marL="171450" indent="-171450">
-              <a:lnSpc>
-                <a:spcPct val="112000"/>
+              <a:t>中国银行法兰克福分行</a:t>
+            </a:r>
+          </a:p>
+          <a:p>
+            <a:pPr marL="190500" indent="-190500">
+              <a:lnSpc>
+                <a:spcPct val="110000"/>
               </a:lnSpc>
               <a:spcAft>
-                <a:spcPts val="300"/>
+                <a:spcPts val="1000"/>
               </a:spcAft>
               <a:buClr>
                 <a:srgbClr val="08A6F6"/>
@@ -3164,7 +2977,7 @@
               <a:buChar char="•"/>
             </a:pPr>
             <a:r>
-              <a:rPr lang="zh-CN" altLang="en-US" sz="1000" b="1">
+              <a:rPr lang="zh-CN" altLang="en-US" sz="1400">
                 <a:solidFill>
                   <a:srgbClr val="061F32"/>
                 </a:solidFill>
@@ -3172,27 +2985,16 @@
                 <a:ea typeface="微软雅黑"/>
                 <a:cs typeface="微软雅黑"/>
               </a:rPr>
-              <a:t>歌德商学院高管教育中心高级项目经理</a:t>
-            </a:r>
-            <a:r>
-              <a:rPr lang="zh-CN" altLang="en-US" sz="1000">
-                <a:solidFill>
-                  <a:srgbClr val="44546A"/>
-                </a:solidFill>
-                <a:latin typeface="微软雅黑"/>
-                <a:ea typeface="微软雅黑"/>
-                <a:cs typeface="微软雅黑"/>
-              </a:rPr>
-              <a:t>：搭建中德企业家与科创创始人交流平台</a:t>
-            </a:r>
-          </a:p>
-          <a:p>
-            <a:pPr algn="l" marL="171450" indent="-171450">
-              <a:lnSpc>
-                <a:spcPct val="112000"/>
+              <a:t>FRM｜CFA 一级</a:t>
+            </a:r>
+          </a:p>
+          <a:p>
+            <a:pPr marL="190500" indent="-190500">
+              <a:lnSpc>
+                <a:spcPct val="110000"/>
               </a:lnSpc>
               <a:spcAft>
-                <a:spcPts val="300"/>
+                <a:spcPts val="1000"/>
               </a:spcAft>
               <a:buClr>
                 <a:srgbClr val="08A6F6"/>
@@ -3201,7 +3003,7 @@
               <a:buChar char="•"/>
             </a:pPr>
             <a:r>
-              <a:rPr lang="zh-CN" altLang="en-US" sz="1000" b="1">
+              <a:rPr lang="zh-CN" altLang="en-US" sz="1400">
                 <a:solidFill>
                   <a:srgbClr val="061F32"/>
                 </a:solidFill>
@@ -3209,27 +3011,16 @@
                 <a:ea typeface="微软雅黑"/>
                 <a:cs typeface="微软雅黑"/>
               </a:rPr>
-              <a:t>FRM、ESG Investing 认证</a:t>
-            </a:r>
-            <a:r>
-              <a:rPr lang="zh-CN" altLang="en-US" sz="1000">
-                <a:solidFill>
-                  <a:srgbClr val="44546A"/>
-                </a:solidFill>
-                <a:latin typeface="微软雅黑"/>
-                <a:ea typeface="微软雅黑"/>
-                <a:cs typeface="微软雅黑"/>
-              </a:rPr>
-              <a:t>；CFA 一级；精通英语、德语</a:t>
-            </a:r>
-          </a:p>
-          <a:p>
-            <a:pPr algn="l" marL="171450" indent="-171450">
-              <a:lnSpc>
-                <a:spcPct val="112000"/>
+              <a:t>海德堡大学经济学硕士</a:t>
+            </a:r>
+          </a:p>
+          <a:p>
+            <a:pPr marL="190500" indent="-190500">
+              <a:lnSpc>
+                <a:spcPct val="110000"/>
               </a:lnSpc>
               <a:spcAft>
-                <a:spcPts val="300"/>
+                <a:spcPts val="1000"/>
               </a:spcAft>
               <a:buClr>
                 <a:srgbClr val="08A6F6"/>
@@ -3238,7 +3029,7 @@
               <a:buChar char="•"/>
             </a:pPr>
             <a:r>
-              <a:rPr lang="zh-CN" altLang="en-US" sz="1000" b="1">
+              <a:rPr lang="zh-CN" altLang="en-US" sz="1400">
                 <a:solidFill>
                   <a:srgbClr val="061F32"/>
                 </a:solidFill>
@@ -3246,18 +3037,7 @@
                 <a:ea typeface="微软雅黑"/>
                 <a:cs typeface="微软雅黑"/>
               </a:rPr>
-              <a:t>海德堡大学经济学硕士</a:t>
-            </a:r>
-            <a:r>
-              <a:rPr lang="zh-CN" altLang="en-US" sz="1000">
-                <a:solidFill>
-                  <a:srgbClr val="44546A"/>
-                </a:solidFill>
-                <a:latin typeface="微软雅黑"/>
-                <a:ea typeface="微软雅黑"/>
-                <a:cs typeface="微软雅黑"/>
-              </a:rPr>
-              <a:t>；浙江大学管理学学士（竺可桢学院创新与创业管理强化班）</a:t>
+              <a:t>浙大竺可桢学院</a:t>
             </a:r>
           </a:p>
         </p:txBody>
